--- a/PPT_Overview_Pabrik_Gula_IMPROVED.pptx
+++ b/PPT_Overview_Pabrik_Gula_IMPROVED.pptx
@@ -22,6 +22,7 @@
     <p:sldId id="270" r:id="rId21"/>
     <p:sldId id="271" r:id="rId22"/>
     <p:sldId id="272" r:id="rId23"/>
+    <p:sldId id="273" r:id="rId24"/>
   </p:sldIdLst>
   <p:sldSz cx="9144000" cy="6858000" type="screen4x3"/>
   <p:notesSz cx="6858000" cy="9144000"/>
@@ -3106,14 +3107,59 @@
       <p:grpSpPr/>
       <p:sp>
         <p:nvSpPr>
-          <p:cNvPr id="2" name="TextBox 1"/>
+          <p:cNvPr id="2" name="Rectangle 1"/>
+          <p:cNvSpPr/>
+          <p:nvPr/>
+        </p:nvSpPr>
+        <p:spPr>
+          <a:xfrm>
+            <a:off x="0" y="0"/>
+            <a:ext cx="9144000" cy="6858000"/>
+          </a:xfrm>
+          <a:prstGeom prst="rect">
+            <a:avLst/>
+          </a:prstGeom>
+          <a:solidFill>
+            <a:srgbClr val="003366"/>
+          </a:solidFill>
+          <a:ln>
+            <a:solidFill>
+              <a:srgbClr val="003366"/>
+            </a:solidFill>
+          </a:ln>
+        </p:spPr>
+        <p:style>
+          <a:lnRef idx="1">
+            <a:schemeClr val="accent1"/>
+          </a:lnRef>
+          <a:fillRef idx="3">
+            <a:schemeClr val="accent1"/>
+          </a:fillRef>
+          <a:effectRef idx="2">
+            <a:schemeClr val="accent1"/>
+          </a:effectRef>
+          <a:fontRef idx="minor">
+            <a:schemeClr val="lt1"/>
+          </a:fontRef>
+        </p:style>
+        <p:txBody>
+          <a:bodyPr rtlCol="0" anchor="ctr"/>
+          <a:lstStyle/>
+          <a:p>
+            <a:pPr algn="ctr"/>
+          </a:p>
+        </p:txBody>
+      </p:sp>
+      <p:sp>
+        <p:nvSpPr>
+          <p:cNvPr id="3" name="TextBox 2"/>
           <p:cNvSpPr txBox="1"/>
           <p:nvPr/>
         </p:nvSpPr>
         <p:spPr>
           <a:xfrm>
             <a:off x="914400" y="2286000"/>
-            <a:ext cx="7315200" cy="914400"/>
+            <a:ext cx="7315200" cy="1097280"/>
           </a:xfrm>
           <a:prstGeom prst="rect">
             <a:avLst/>
@@ -3127,9 +3173,9 @@
           <a:lstStyle/>
           <a:p>
             <a:pPr algn="ctr">
-              <a:defRPr sz="4400" b="1">
-                <a:solidFill>
-                  <a:srgbClr val="003366"/>
+              <a:defRPr sz="4800" b="1">
+                <a:solidFill>
+                  <a:srgbClr val="FFFFFF"/>
                 </a:solidFill>
               </a:defRPr>
             </a:pPr>
@@ -3141,13 +3187,13 @@
       </p:sp>
       <p:sp>
         <p:nvSpPr>
-          <p:cNvPr id="3" name="TextBox 2"/>
+          <p:cNvPr id="4" name="TextBox 3"/>
           <p:cNvSpPr txBox="1"/>
           <p:nvPr/>
         </p:nvSpPr>
         <p:spPr>
           <a:xfrm>
-            <a:off x="914400" y="3474720"/>
+            <a:off x="914400" y="3657600"/>
             <a:ext cx="7315200" cy="731520"/>
           </a:xfrm>
           <a:prstGeom prst="rect">
@@ -3162,9 +3208,9 @@
           <a:lstStyle/>
           <a:p>
             <a:pPr algn="ctr">
-              <a:defRPr sz="2000">
-                <a:solidFill>
-                  <a:srgbClr val="595959"/>
+              <a:defRPr sz="2400">
+                <a:solidFill>
+                  <a:srgbClr val="C8DCFF"/>
                 </a:solidFill>
               </a:defRPr>
             </a:pPr>
@@ -3194,14 +3240,59 @@
       <p:grpSpPr/>
       <p:sp>
         <p:nvSpPr>
-          <p:cNvPr id="2" name="TextBox 1"/>
+          <p:cNvPr id="2" name="Rectangle 1"/>
+          <p:cNvSpPr/>
+          <p:nvPr/>
+        </p:nvSpPr>
+        <p:spPr>
+          <a:xfrm>
+            <a:off x="0" y="0"/>
+            <a:ext cx="9144000" cy="914400"/>
+          </a:xfrm>
+          <a:prstGeom prst="rect">
+            <a:avLst/>
+          </a:prstGeom>
+          <a:solidFill>
+            <a:srgbClr val="003366"/>
+          </a:solidFill>
+          <a:ln>
+            <a:solidFill>
+              <a:srgbClr val="003366"/>
+            </a:solidFill>
+          </a:ln>
+        </p:spPr>
+        <p:style>
+          <a:lnRef idx="1">
+            <a:schemeClr val="accent1"/>
+          </a:lnRef>
+          <a:fillRef idx="3">
+            <a:schemeClr val="accent1"/>
+          </a:fillRef>
+          <a:effectRef idx="2">
+            <a:schemeClr val="accent1"/>
+          </a:effectRef>
+          <a:fontRef idx="minor">
+            <a:schemeClr val="lt1"/>
+          </a:fontRef>
+        </p:style>
+        <p:txBody>
+          <a:bodyPr rtlCol="0" anchor="ctr"/>
+          <a:lstStyle/>
+          <a:p>
+            <a:pPr algn="ctr"/>
+          </a:p>
+        </p:txBody>
+      </p:sp>
+      <p:sp>
+        <p:nvSpPr>
+          <p:cNvPr id="3" name="TextBox 2"/>
           <p:cNvSpPr txBox="1"/>
           <p:nvPr/>
         </p:nvSpPr>
         <p:spPr>
           <a:xfrm>
-            <a:off x="457200" y="457200"/>
-            <a:ext cx="8229600" cy="640080"/>
+            <a:off x="457200" y="228600"/>
+            <a:ext cx="8229600" cy="457200"/>
           </a:xfrm>
           <a:prstGeom prst="rect">
             <a:avLst/>
@@ -3217,19 +3308,19 @@
             <a:pPr>
               <a:defRPr sz="3200" b="1">
                 <a:solidFill>
-                  <a:srgbClr val="003366"/>
-                </a:solidFill>
-              </a:defRPr>
-            </a:pPr>
-            <a:r>
-              <a:t>Key Performance Indicators (KPI)</a:t>
-            </a:r>
-          </a:p>
-        </p:txBody>
-      </p:sp>
-      <p:sp>
-        <p:nvSpPr>
-          <p:cNvPr id="3" name="TextBox 2"/>
+                  <a:srgbClr val="FFFFFF"/>
+                </a:solidFill>
+              </a:defRPr>
+            </a:pPr>
+            <a:r>
+              <a:t>Struktur Divisi Pabrik Gula</a:t>
+            </a:r>
+          </a:p>
+        </p:txBody>
+      </p:sp>
+      <p:sp>
+        <p:nvSpPr>
+          <p:cNvPr id="4" name="TextBox 3"/>
           <p:cNvSpPr txBox="1"/>
           <p:nvPr/>
         </p:nvSpPr>
@@ -3251,89 +3342,178 @@
           <a:p>
             <a:pPr>
               <a:spcAft>
-                <a:spcPts val="1200"/>
-              </a:spcAft>
-              <a:defRPr sz="1600"/>
-            </a:pPr>
-            <a:r>
-              <a:t>1. RENDEMEN: % gula dari tebu → target 8-10%</a:t>
-            </a:r>
-          </a:p>
-          <a:p>
-            <a:pPr>
-              <a:spcAft>
-                <a:spcPts val="1200"/>
-              </a:spcAft>
-              <a:defRPr sz="1600"/>
-            </a:pPr>
-            <a:r>
-              <a:t>   Formula: (Gula/Tebu) x 100%</a:t>
-            </a:r>
-          </a:p>
-          <a:p>
-            <a:pPr>
-              <a:spcAft>
-                <a:spcPts val="1200"/>
-              </a:spcAft>
-              <a:defRPr sz="1600"/>
-            </a:pPr>
-            <a:r>
-              <a:t>2. RECOVERY (Pol Extraction): % pol terekstrak → target 92-96%</a:t>
-            </a:r>
-          </a:p>
-          <a:p>
-            <a:pPr>
-              <a:spcAft>
-                <a:spcPts val="1200"/>
-              </a:spcAft>
-              <a:defRPr sz="1600"/>
-            </a:pPr>
-            <a:r>
-              <a:t>3. KAPASITAS GILING: ton tebu/hari → target 3.000-6.000 TCD</a:t>
-            </a:r>
-          </a:p>
-          <a:p>
-            <a:pPr>
-              <a:spcAft>
-                <a:spcPts val="1200"/>
-              </a:spcAft>
-              <a:defRPr sz="1600"/>
-            </a:pPr>
-            <a:r>
-              <a:t>4. EFISIENSI PABRIK: % waktu operasi vs downtime → target &gt;85%</a:t>
-            </a:r>
-          </a:p>
-          <a:p>
-            <a:pPr>
-              <a:spcAft>
-                <a:spcPts val="1200"/>
-              </a:spcAft>
-              <a:defRPr sz="1600"/>
-            </a:pPr>
-            <a:r>
-              <a:t>5. OVERALL RECOVERY: rendemen aktual/rendemen teoritis → &gt;82%</a:t>
-            </a:r>
-          </a:p>
-          <a:p>
-            <a:pPr>
-              <a:spcAft>
-                <a:spcPts val="1200"/>
-              </a:spcAft>
-              <a:defRPr sz="1600"/>
-            </a:pPr>
-            <a:r>
-              <a:t>6. LOSSES: pol hilang di proses → target &lt;2,5%</a:t>
-            </a:r>
-          </a:p>
-          <a:p>
-            <a:pPr>
-              <a:spcAft>
-                <a:spcPts val="1200"/>
-              </a:spcAft>
-              <a:defRPr sz="1600"/>
-            </a:pPr>
-            <a:r>
-              <a:t>• Monitoring real-time via dashboard SCADA</a:t>
+                <a:spcPts val="1400"/>
+              </a:spcAft>
+              <a:defRPr sz="1600">
+                <a:solidFill>
+                  <a:srgbClr val="333333"/>
+                </a:solidFill>
+              </a:defRPr>
+            </a:pPr>
+            <a:r>
+              <a:t>1️⃣ DIVISI TANAMAN: Budidaya tebu, panen, logistik tebu</a:t>
+            </a:r>
+          </a:p>
+          <a:p>
+            <a:pPr>
+              <a:spcAft>
+                <a:spcPts val="1400"/>
+              </a:spcAft>
+              <a:defRPr sz="1600">
+                <a:solidFill>
+                  <a:srgbClr val="333333"/>
+                </a:solidFill>
+              </a:defRPr>
+            </a:pPr>
+          </a:p>
+          <a:p>
+            <a:pPr>
+              <a:spcAft>
+                <a:spcPts val="1400"/>
+              </a:spcAft>
+              <a:defRPr sz="1600">
+                <a:solidFill>
+                  <a:srgbClr val="333333"/>
+                </a:solidFill>
+              </a:defRPr>
+            </a:pPr>
+            <a:r>
+              <a:t>2️⃣ DIVISI PABRIKASI: Proses produksi gula (shift 24/7)</a:t>
+            </a:r>
+          </a:p>
+          <a:p>
+            <a:pPr>
+              <a:spcAft>
+                <a:spcPts val="1400"/>
+              </a:spcAft>
+              <a:defRPr sz="1600">
+                <a:solidFill>
+                  <a:srgbClr val="333333"/>
+                </a:solidFill>
+              </a:defRPr>
+            </a:pPr>
+          </a:p>
+          <a:p>
+            <a:pPr>
+              <a:spcAft>
+                <a:spcPts val="1400"/>
+              </a:spcAft>
+              <a:defRPr sz="1600">
+                <a:solidFill>
+                  <a:srgbClr val="333333"/>
+                </a:solidFill>
+              </a:defRPr>
+            </a:pPr>
+            <a:r>
+              <a:t>3️⃣ DIVISI INSTALASI: Listrik, mesin, boiler, maintenance</a:t>
+            </a:r>
+          </a:p>
+          <a:p>
+            <a:pPr>
+              <a:spcAft>
+                <a:spcPts val="1400"/>
+              </a:spcAft>
+              <a:defRPr sz="1600">
+                <a:solidFill>
+                  <a:srgbClr val="333333"/>
+                </a:solidFill>
+              </a:defRPr>
+            </a:pPr>
+          </a:p>
+          <a:p>
+            <a:pPr>
+              <a:spcAft>
+                <a:spcPts val="1400"/>
+              </a:spcAft>
+              <a:defRPr sz="1600">
+                <a:solidFill>
+                  <a:srgbClr val="333333"/>
+                </a:solidFill>
+              </a:defRPr>
+            </a:pPr>
+            <a:r>
+              <a:t>4️⃣ DIVISI KEUANGAN: Cash flow, payroll, reporting</a:t>
+            </a:r>
+          </a:p>
+          <a:p>
+            <a:pPr>
+              <a:spcAft>
+                <a:spcPts val="1400"/>
+              </a:spcAft>
+              <a:defRPr sz="1600">
+                <a:solidFill>
+                  <a:srgbClr val="333333"/>
+                </a:solidFill>
+              </a:defRPr>
+            </a:pPr>
+          </a:p>
+          <a:p>
+            <a:pPr>
+              <a:spcAft>
+                <a:spcPts val="1400"/>
+              </a:spcAft>
+              <a:defRPr sz="1600">
+                <a:solidFill>
+                  <a:srgbClr val="333333"/>
+                </a:solidFill>
+              </a:defRPr>
+            </a:pPr>
+            <a:r>
+              <a:t>5️⃣ DIVISI SDM &amp; UMUM: Rekrutmen, K3, gudang, security</a:t>
+            </a:r>
+          </a:p>
+          <a:p>
+            <a:pPr>
+              <a:spcAft>
+                <a:spcPts val="1400"/>
+              </a:spcAft>
+              <a:defRPr sz="1600">
+                <a:solidFill>
+                  <a:srgbClr val="333333"/>
+                </a:solidFill>
+              </a:defRPr>
+            </a:pPr>
+          </a:p>
+          <a:p>
+            <a:pPr>
+              <a:spcAft>
+                <a:spcPts val="1400"/>
+              </a:spcAft>
+              <a:defRPr sz="1600">
+                <a:solidFill>
+                  <a:srgbClr val="333333"/>
+                </a:solidFill>
+              </a:defRPr>
+            </a:pPr>
+            <a:r>
+              <a:t>6️⃣ DIVISI PEMASARAN: Sales gula, molasses, distribusi</a:t>
+            </a:r>
+          </a:p>
+          <a:p>
+            <a:pPr>
+              <a:spcAft>
+                <a:spcPts val="1400"/>
+              </a:spcAft>
+              <a:defRPr sz="1600">
+                <a:solidFill>
+                  <a:srgbClr val="333333"/>
+                </a:solidFill>
+              </a:defRPr>
+            </a:pPr>
+          </a:p>
+          <a:p>
+            <a:pPr>
+              <a:spcAft>
+                <a:spcPts val="1400"/>
+              </a:spcAft>
+              <a:defRPr sz="1600">
+                <a:solidFill>
+                  <a:srgbClr val="333333"/>
+                </a:solidFill>
+              </a:defRPr>
+            </a:pPr>
+            <a:r>
+              <a:t>⏰ Operasional 24/7 selama musim giling (shift 3x8 jam)</a:t>
             </a:r>
           </a:p>
         </p:txBody>
@@ -3358,14 +3538,59 @@
       <p:grpSpPr/>
       <p:sp>
         <p:nvSpPr>
-          <p:cNvPr id="2" name="TextBox 1"/>
+          <p:cNvPr id="2" name="Rectangle 1"/>
+          <p:cNvSpPr/>
+          <p:nvPr/>
+        </p:nvSpPr>
+        <p:spPr>
+          <a:xfrm>
+            <a:off x="0" y="0"/>
+            <a:ext cx="9144000" cy="914400"/>
+          </a:xfrm>
+          <a:prstGeom prst="rect">
+            <a:avLst/>
+          </a:prstGeom>
+          <a:solidFill>
+            <a:srgbClr val="003366"/>
+          </a:solidFill>
+          <a:ln>
+            <a:solidFill>
+              <a:srgbClr val="003366"/>
+            </a:solidFill>
+          </a:ln>
+        </p:spPr>
+        <p:style>
+          <a:lnRef idx="1">
+            <a:schemeClr val="accent1"/>
+          </a:lnRef>
+          <a:fillRef idx="3">
+            <a:schemeClr val="accent1"/>
+          </a:fillRef>
+          <a:effectRef idx="2">
+            <a:schemeClr val="accent1"/>
+          </a:effectRef>
+          <a:fontRef idx="minor">
+            <a:schemeClr val="lt1"/>
+          </a:fontRef>
+        </p:style>
+        <p:txBody>
+          <a:bodyPr rtlCol="0" anchor="ctr"/>
+          <a:lstStyle/>
+          <a:p>
+            <a:pPr algn="ctr"/>
+          </a:p>
+        </p:txBody>
+      </p:sp>
+      <p:sp>
+        <p:nvSpPr>
+          <p:cNvPr id="3" name="TextBox 2"/>
           <p:cNvSpPr txBox="1"/>
           <p:nvPr/>
         </p:nvSpPr>
         <p:spPr>
           <a:xfrm>
-            <a:off x="457200" y="457200"/>
-            <a:ext cx="8229600" cy="640080"/>
+            <a:off x="457200" y="228600"/>
+            <a:ext cx="8229600" cy="457200"/>
           </a:xfrm>
           <a:prstGeom prst="rect">
             <a:avLst/>
@@ -3381,26 +3606,71 @@
             <a:pPr>
               <a:defRPr sz="3200" b="1">
                 <a:solidFill>
-                  <a:srgbClr val="003366"/>
-                </a:solidFill>
-              </a:defRPr>
-            </a:pPr>
-            <a:r>
-              <a:t>Bottleneck Operasional Pabrik Gula</a:t>
-            </a:r>
-          </a:p>
-        </p:txBody>
-      </p:sp>
-      <p:sp>
-        <p:nvSpPr>
-          <p:cNvPr id="3" name="TextBox 2"/>
+                  <a:srgbClr val="FFFFFF"/>
+                </a:solidFill>
+              </a:defRPr>
+            </a:pPr>
+            <a:r>
+              <a:t>Key Performance Indicators (KPI)</a:t>
+            </a:r>
+          </a:p>
+        </p:txBody>
+      </p:sp>
+      <p:sp>
+        <p:nvSpPr>
+          <p:cNvPr id="4" name="Rounded Rectangle 3"/>
+          <p:cNvSpPr/>
+          <p:nvPr/>
+        </p:nvSpPr>
+        <p:spPr>
+          <a:xfrm>
+            <a:off x="731520" y="1645920"/>
+            <a:ext cx="1828800" cy="1097280"/>
+          </a:xfrm>
+          <a:prstGeom prst="roundRect">
+            <a:avLst/>
+          </a:prstGeom>
+          <a:solidFill>
+            <a:srgbClr val="E74C3C"/>
+          </a:solidFill>
+          <a:ln w="38100">
+            <a:solidFill>
+              <a:srgbClr val="FFFFFF"/>
+            </a:solidFill>
+          </a:ln>
+        </p:spPr>
+        <p:style>
+          <a:lnRef idx="1">
+            <a:schemeClr val="accent1"/>
+          </a:lnRef>
+          <a:fillRef idx="3">
+            <a:schemeClr val="accent1"/>
+          </a:fillRef>
+          <a:effectRef idx="2">
+            <a:schemeClr val="accent1"/>
+          </a:effectRef>
+          <a:fontRef idx="minor">
+            <a:schemeClr val="lt1"/>
+          </a:fontRef>
+        </p:style>
+        <p:txBody>
+          <a:bodyPr rtlCol="0" anchor="ctr"/>
+          <a:lstStyle/>
+          <a:p>
+            <a:pPr algn="ctr"/>
+          </a:p>
+        </p:txBody>
+      </p:sp>
+      <p:sp>
+        <p:nvSpPr>
+          <p:cNvPr id="5" name="TextBox 4"/>
           <p:cNvSpPr txBox="1"/>
           <p:nvPr/>
         </p:nvSpPr>
         <p:spPr>
           <a:xfrm>
-            <a:off x="731520" y="1371600"/>
-            <a:ext cx="7772400" cy="5029200"/>
+            <a:off x="822960" y="1783080"/>
+            <a:ext cx="1645920" cy="365760"/>
           </a:xfrm>
           <a:prstGeom prst="rect">
             <a:avLst/>
@@ -3408,85 +3678,691 @@
           <a:noFill/>
         </p:spPr>
         <p:txBody>
+          <a:bodyPr wrap="none">
+            <a:spAutoFit/>
+          </a:bodyPr>
+          <a:lstStyle/>
+          <a:p>
+            <a:pPr algn="ctr">
+              <a:defRPr sz="1400" b="1">
+                <a:solidFill>
+                  <a:srgbClr val="FFFFFF"/>
+                </a:solidFill>
+              </a:defRPr>
+            </a:pPr>
+            <a:r>
+              <a:t>RENDEMEN</a:t>
+            </a:r>
+          </a:p>
+        </p:txBody>
+      </p:sp>
+      <p:sp>
+        <p:nvSpPr>
+          <p:cNvPr id="6" name="TextBox 5"/>
+          <p:cNvSpPr txBox="1"/>
+          <p:nvPr/>
+        </p:nvSpPr>
+        <p:spPr>
+          <a:xfrm>
+            <a:off x="822960" y="2103120"/>
+            <a:ext cx="1645920" cy="457200"/>
+          </a:xfrm>
+          <a:prstGeom prst="rect">
+            <a:avLst/>
+          </a:prstGeom>
+          <a:noFill/>
+        </p:spPr>
+        <p:txBody>
+          <a:bodyPr wrap="none">
+            <a:spAutoFit/>
+          </a:bodyPr>
+          <a:lstStyle/>
+          <a:p>
+            <a:pPr algn="ctr">
+              <a:defRPr sz="2000" b="1">
+                <a:solidFill>
+                  <a:srgbClr val="FFFFFF"/>
+                </a:solidFill>
+              </a:defRPr>
+            </a:pPr>
+            <a:r>
+              <a:t>8-10%</a:t>
+            </a:r>
+          </a:p>
+        </p:txBody>
+      </p:sp>
+      <p:sp>
+        <p:nvSpPr>
+          <p:cNvPr id="7" name="Rounded Rectangle 6"/>
+          <p:cNvSpPr/>
+          <p:nvPr/>
+        </p:nvSpPr>
+        <p:spPr>
+          <a:xfrm>
+            <a:off x="2926080" y="1645920"/>
+            <a:ext cx="1828800" cy="1097280"/>
+          </a:xfrm>
+          <a:prstGeom prst="roundRect">
+            <a:avLst/>
+          </a:prstGeom>
+          <a:solidFill>
+            <a:srgbClr val="3498DB"/>
+          </a:solidFill>
+          <a:ln w="38100">
+            <a:solidFill>
+              <a:srgbClr val="FFFFFF"/>
+            </a:solidFill>
+          </a:ln>
+        </p:spPr>
+        <p:style>
+          <a:lnRef idx="1">
+            <a:schemeClr val="accent1"/>
+          </a:lnRef>
+          <a:fillRef idx="3">
+            <a:schemeClr val="accent1"/>
+          </a:fillRef>
+          <a:effectRef idx="2">
+            <a:schemeClr val="accent1"/>
+          </a:effectRef>
+          <a:fontRef idx="minor">
+            <a:schemeClr val="lt1"/>
+          </a:fontRef>
+        </p:style>
+        <p:txBody>
+          <a:bodyPr rtlCol="0" anchor="ctr"/>
+          <a:lstStyle/>
+          <a:p>
+            <a:pPr algn="ctr"/>
+          </a:p>
+        </p:txBody>
+      </p:sp>
+      <p:sp>
+        <p:nvSpPr>
+          <p:cNvPr id="8" name="TextBox 7"/>
+          <p:cNvSpPr txBox="1"/>
+          <p:nvPr/>
+        </p:nvSpPr>
+        <p:spPr>
+          <a:xfrm>
+            <a:off x="3017520" y="1783080"/>
+            <a:ext cx="1645920" cy="365760"/>
+          </a:xfrm>
+          <a:prstGeom prst="rect">
+            <a:avLst/>
+          </a:prstGeom>
+          <a:noFill/>
+        </p:spPr>
+        <p:txBody>
+          <a:bodyPr wrap="none">
+            <a:spAutoFit/>
+          </a:bodyPr>
+          <a:lstStyle/>
+          <a:p>
+            <a:pPr algn="ctr">
+              <a:defRPr sz="1400" b="1">
+                <a:solidFill>
+                  <a:srgbClr val="FFFFFF"/>
+                </a:solidFill>
+              </a:defRPr>
+            </a:pPr>
+            <a:r>
+              <a:t>RECOVERY</a:t>
+            </a:r>
+          </a:p>
+        </p:txBody>
+      </p:sp>
+      <p:sp>
+        <p:nvSpPr>
+          <p:cNvPr id="9" name="TextBox 8"/>
+          <p:cNvSpPr txBox="1"/>
+          <p:nvPr/>
+        </p:nvSpPr>
+        <p:spPr>
+          <a:xfrm>
+            <a:off x="3017520" y="2103120"/>
+            <a:ext cx="1645920" cy="457200"/>
+          </a:xfrm>
+          <a:prstGeom prst="rect">
+            <a:avLst/>
+          </a:prstGeom>
+          <a:noFill/>
+        </p:spPr>
+        <p:txBody>
+          <a:bodyPr wrap="none">
+            <a:spAutoFit/>
+          </a:bodyPr>
+          <a:lstStyle/>
+          <a:p>
+            <a:pPr algn="ctr">
+              <a:defRPr sz="2000" b="1">
+                <a:solidFill>
+                  <a:srgbClr val="FFFFFF"/>
+                </a:solidFill>
+              </a:defRPr>
+            </a:pPr>
+            <a:r>
+              <a:t>92-96%</a:t>
+            </a:r>
+          </a:p>
+        </p:txBody>
+      </p:sp>
+      <p:sp>
+        <p:nvSpPr>
+          <p:cNvPr id="10" name="Rounded Rectangle 9"/>
+          <p:cNvSpPr/>
+          <p:nvPr/>
+        </p:nvSpPr>
+        <p:spPr>
+          <a:xfrm>
+            <a:off x="5120640" y="1645920"/>
+            <a:ext cx="1828800" cy="1097280"/>
+          </a:xfrm>
+          <a:prstGeom prst="roundRect">
+            <a:avLst/>
+          </a:prstGeom>
+          <a:solidFill>
+            <a:srgbClr val="2ECC71"/>
+          </a:solidFill>
+          <a:ln w="38100">
+            <a:solidFill>
+              <a:srgbClr val="FFFFFF"/>
+            </a:solidFill>
+          </a:ln>
+        </p:spPr>
+        <p:style>
+          <a:lnRef idx="1">
+            <a:schemeClr val="accent1"/>
+          </a:lnRef>
+          <a:fillRef idx="3">
+            <a:schemeClr val="accent1"/>
+          </a:fillRef>
+          <a:effectRef idx="2">
+            <a:schemeClr val="accent1"/>
+          </a:effectRef>
+          <a:fontRef idx="minor">
+            <a:schemeClr val="lt1"/>
+          </a:fontRef>
+        </p:style>
+        <p:txBody>
+          <a:bodyPr rtlCol="0" anchor="ctr"/>
+          <a:lstStyle/>
+          <a:p>
+            <a:pPr algn="ctr"/>
+          </a:p>
+        </p:txBody>
+      </p:sp>
+      <p:sp>
+        <p:nvSpPr>
+          <p:cNvPr id="11" name="TextBox 10"/>
+          <p:cNvSpPr txBox="1"/>
+          <p:nvPr/>
+        </p:nvSpPr>
+        <p:spPr>
+          <a:xfrm>
+            <a:off x="5212080" y="1783080"/>
+            <a:ext cx="1645920" cy="365760"/>
+          </a:xfrm>
+          <a:prstGeom prst="rect">
+            <a:avLst/>
+          </a:prstGeom>
+          <a:noFill/>
+        </p:spPr>
+        <p:txBody>
+          <a:bodyPr wrap="none">
+            <a:spAutoFit/>
+          </a:bodyPr>
+          <a:lstStyle/>
+          <a:p>
+            <a:pPr algn="ctr">
+              <a:defRPr sz="1400" b="1">
+                <a:solidFill>
+                  <a:srgbClr val="FFFFFF"/>
+                </a:solidFill>
+              </a:defRPr>
+            </a:pPr>
+            <a:r>
+              <a:t>KAPASITAS</a:t>
+            </a:r>
+          </a:p>
+        </p:txBody>
+      </p:sp>
+      <p:sp>
+        <p:nvSpPr>
+          <p:cNvPr id="12" name="TextBox 11"/>
+          <p:cNvSpPr txBox="1"/>
+          <p:nvPr/>
+        </p:nvSpPr>
+        <p:spPr>
+          <a:xfrm>
+            <a:off x="5212080" y="2103120"/>
+            <a:ext cx="1645920" cy="457200"/>
+          </a:xfrm>
+          <a:prstGeom prst="rect">
+            <a:avLst/>
+          </a:prstGeom>
+          <a:noFill/>
+        </p:spPr>
+        <p:txBody>
+          <a:bodyPr wrap="none">
+            <a:spAutoFit/>
+          </a:bodyPr>
+          <a:lstStyle/>
+          <a:p>
+            <a:pPr algn="ctr">
+              <a:defRPr sz="2000" b="1">
+                <a:solidFill>
+                  <a:srgbClr val="FFFFFF"/>
+                </a:solidFill>
+              </a:defRPr>
+            </a:pPr>
+            <a:r>
+              <a:t>3K-6K TCD</a:t>
+            </a:r>
+          </a:p>
+        </p:txBody>
+      </p:sp>
+      <p:sp>
+        <p:nvSpPr>
+          <p:cNvPr id="13" name="Rounded Rectangle 12"/>
+          <p:cNvSpPr/>
+          <p:nvPr/>
+        </p:nvSpPr>
+        <p:spPr>
+          <a:xfrm>
+            <a:off x="7315200" y="1645920"/>
+            <a:ext cx="1828800" cy="1097280"/>
+          </a:xfrm>
+          <a:prstGeom prst="roundRect">
+            <a:avLst/>
+          </a:prstGeom>
+          <a:solidFill>
+            <a:srgbClr val="F1C40F"/>
+          </a:solidFill>
+          <a:ln w="38100">
+            <a:solidFill>
+              <a:srgbClr val="FFFFFF"/>
+            </a:solidFill>
+          </a:ln>
+        </p:spPr>
+        <p:style>
+          <a:lnRef idx="1">
+            <a:schemeClr val="accent1"/>
+          </a:lnRef>
+          <a:fillRef idx="3">
+            <a:schemeClr val="accent1"/>
+          </a:fillRef>
+          <a:effectRef idx="2">
+            <a:schemeClr val="accent1"/>
+          </a:effectRef>
+          <a:fontRef idx="minor">
+            <a:schemeClr val="lt1"/>
+          </a:fontRef>
+        </p:style>
+        <p:txBody>
+          <a:bodyPr rtlCol="0" anchor="ctr"/>
+          <a:lstStyle/>
+          <a:p>
+            <a:pPr algn="ctr"/>
+          </a:p>
+        </p:txBody>
+      </p:sp>
+      <p:sp>
+        <p:nvSpPr>
+          <p:cNvPr id="14" name="TextBox 13"/>
+          <p:cNvSpPr txBox="1"/>
+          <p:nvPr/>
+        </p:nvSpPr>
+        <p:spPr>
+          <a:xfrm>
+            <a:off x="7406640" y="1783080"/>
+            <a:ext cx="1645920" cy="365760"/>
+          </a:xfrm>
+          <a:prstGeom prst="rect">
+            <a:avLst/>
+          </a:prstGeom>
+          <a:noFill/>
+        </p:spPr>
+        <p:txBody>
+          <a:bodyPr wrap="none">
+            <a:spAutoFit/>
+          </a:bodyPr>
+          <a:lstStyle/>
+          <a:p>
+            <a:pPr algn="ctr">
+              <a:defRPr sz="1400" b="1">
+                <a:solidFill>
+                  <a:srgbClr val="FFFFFF"/>
+                </a:solidFill>
+              </a:defRPr>
+            </a:pPr>
+            <a:r>
+              <a:t>LOSSES</a:t>
+            </a:r>
+          </a:p>
+        </p:txBody>
+      </p:sp>
+      <p:sp>
+        <p:nvSpPr>
+          <p:cNvPr id="15" name="TextBox 14"/>
+          <p:cNvSpPr txBox="1"/>
+          <p:nvPr/>
+        </p:nvSpPr>
+        <p:spPr>
+          <a:xfrm>
+            <a:off x="7406640" y="2103120"/>
+            <a:ext cx="1645920" cy="457200"/>
+          </a:xfrm>
+          <a:prstGeom prst="rect">
+            <a:avLst/>
+          </a:prstGeom>
+          <a:noFill/>
+        </p:spPr>
+        <p:txBody>
+          <a:bodyPr wrap="none">
+            <a:spAutoFit/>
+          </a:bodyPr>
+          <a:lstStyle/>
+          <a:p>
+            <a:pPr algn="ctr">
+              <a:defRPr sz="2000" b="1">
+                <a:solidFill>
+                  <a:srgbClr val="FFFFFF"/>
+                </a:solidFill>
+              </a:defRPr>
+            </a:pPr>
+            <a:r>
+              <a:t>&lt;2,5%</a:t>
+            </a:r>
+          </a:p>
+        </p:txBody>
+      </p:sp>
+      <p:sp>
+        <p:nvSpPr>
+          <p:cNvPr id="16" name="Rounded Rectangle 15"/>
+          <p:cNvSpPr/>
+          <p:nvPr/>
+        </p:nvSpPr>
+        <p:spPr>
+          <a:xfrm>
+            <a:off x="731520" y="3017520"/>
+            <a:ext cx="1828800" cy="1097280"/>
+          </a:xfrm>
+          <a:prstGeom prst="roundRect">
+            <a:avLst/>
+          </a:prstGeom>
+          <a:solidFill>
+            <a:srgbClr val="E74C3C"/>
+          </a:solidFill>
+          <a:ln w="38100">
+            <a:solidFill>
+              <a:srgbClr val="FFFFFF"/>
+            </a:solidFill>
+          </a:ln>
+        </p:spPr>
+        <p:style>
+          <a:lnRef idx="1">
+            <a:schemeClr val="accent1"/>
+          </a:lnRef>
+          <a:fillRef idx="3">
+            <a:schemeClr val="accent1"/>
+          </a:fillRef>
+          <a:effectRef idx="2">
+            <a:schemeClr val="accent1"/>
+          </a:effectRef>
+          <a:fontRef idx="minor">
+            <a:schemeClr val="lt1"/>
+          </a:fontRef>
+        </p:style>
+        <p:txBody>
+          <a:bodyPr rtlCol="0" anchor="ctr"/>
+          <a:lstStyle/>
+          <a:p>
+            <a:pPr algn="ctr"/>
+          </a:p>
+        </p:txBody>
+      </p:sp>
+      <p:sp>
+        <p:nvSpPr>
+          <p:cNvPr id="17" name="TextBox 16"/>
+          <p:cNvSpPr txBox="1"/>
+          <p:nvPr/>
+        </p:nvSpPr>
+        <p:spPr>
+          <a:xfrm>
+            <a:off x="822960" y="3154680"/>
+            <a:ext cx="1645920" cy="365760"/>
+          </a:xfrm>
+          <a:prstGeom prst="rect">
+            <a:avLst/>
+          </a:prstGeom>
+          <a:noFill/>
+        </p:spPr>
+        <p:txBody>
+          <a:bodyPr wrap="none">
+            <a:spAutoFit/>
+          </a:bodyPr>
+          <a:lstStyle/>
+          <a:p>
+            <a:pPr algn="ctr">
+              <a:defRPr sz="1400" b="1">
+                <a:solidFill>
+                  <a:srgbClr val="FFFFFF"/>
+                </a:solidFill>
+              </a:defRPr>
+            </a:pPr>
+            <a:r>
+              <a:t>EFISIENSI</a:t>
+            </a:r>
+          </a:p>
+        </p:txBody>
+      </p:sp>
+      <p:sp>
+        <p:nvSpPr>
+          <p:cNvPr id="18" name="TextBox 17"/>
+          <p:cNvSpPr txBox="1"/>
+          <p:nvPr/>
+        </p:nvSpPr>
+        <p:spPr>
+          <a:xfrm>
+            <a:off x="822960" y="3474720"/>
+            <a:ext cx="1645920" cy="457200"/>
+          </a:xfrm>
+          <a:prstGeom prst="rect">
+            <a:avLst/>
+          </a:prstGeom>
+          <a:noFill/>
+        </p:spPr>
+        <p:txBody>
+          <a:bodyPr wrap="none">
+            <a:spAutoFit/>
+          </a:bodyPr>
+          <a:lstStyle/>
+          <a:p>
+            <a:pPr algn="ctr">
+              <a:defRPr sz="2000" b="1">
+                <a:solidFill>
+                  <a:srgbClr val="FFFFFF"/>
+                </a:solidFill>
+              </a:defRPr>
+            </a:pPr>
+            <a:r>
+              <a:t>&gt;85%</a:t>
+            </a:r>
+          </a:p>
+        </p:txBody>
+      </p:sp>
+      <p:sp>
+        <p:nvSpPr>
+          <p:cNvPr id="19" name="Rounded Rectangle 18"/>
+          <p:cNvSpPr/>
+          <p:nvPr/>
+        </p:nvSpPr>
+        <p:spPr>
+          <a:xfrm>
+            <a:off x="2926080" y="3017520"/>
+            <a:ext cx="1828800" cy="1097280"/>
+          </a:xfrm>
+          <a:prstGeom prst="roundRect">
+            <a:avLst/>
+          </a:prstGeom>
+          <a:solidFill>
+            <a:srgbClr val="3498DB"/>
+          </a:solidFill>
+          <a:ln w="38100">
+            <a:solidFill>
+              <a:srgbClr val="FFFFFF"/>
+            </a:solidFill>
+          </a:ln>
+        </p:spPr>
+        <p:style>
+          <a:lnRef idx="1">
+            <a:schemeClr val="accent1"/>
+          </a:lnRef>
+          <a:fillRef idx="3">
+            <a:schemeClr val="accent1"/>
+          </a:fillRef>
+          <a:effectRef idx="2">
+            <a:schemeClr val="accent1"/>
+          </a:effectRef>
+          <a:fontRef idx="minor">
+            <a:schemeClr val="lt1"/>
+          </a:fontRef>
+        </p:style>
+        <p:txBody>
+          <a:bodyPr rtlCol="0" anchor="ctr"/>
+          <a:lstStyle/>
+          <a:p>
+            <a:pPr algn="ctr"/>
+          </a:p>
+        </p:txBody>
+      </p:sp>
+      <p:sp>
+        <p:nvSpPr>
+          <p:cNvPr id="20" name="TextBox 19"/>
+          <p:cNvSpPr txBox="1"/>
+          <p:nvPr/>
+        </p:nvSpPr>
+        <p:spPr>
+          <a:xfrm>
+            <a:off x="3017520" y="3154680"/>
+            <a:ext cx="1645920" cy="365760"/>
+          </a:xfrm>
+          <a:prstGeom prst="rect">
+            <a:avLst/>
+          </a:prstGeom>
+          <a:noFill/>
+        </p:spPr>
+        <p:txBody>
+          <a:bodyPr wrap="none">
+            <a:spAutoFit/>
+          </a:bodyPr>
+          <a:lstStyle/>
+          <a:p>
+            <a:pPr algn="ctr">
+              <a:defRPr sz="1400" b="1">
+                <a:solidFill>
+                  <a:srgbClr val="FFFFFF"/>
+                </a:solidFill>
+              </a:defRPr>
+            </a:pPr>
+            <a:r>
+              <a:t>OVERALL</a:t>
+            </a:r>
+          </a:p>
+          <a:p>
+            <a:r>
+              <a:t>RECOVERY</a:t>
+            </a:r>
+          </a:p>
+        </p:txBody>
+      </p:sp>
+      <p:sp>
+        <p:nvSpPr>
+          <p:cNvPr id="21" name="TextBox 20"/>
+          <p:cNvSpPr txBox="1"/>
+          <p:nvPr/>
+        </p:nvSpPr>
+        <p:spPr>
+          <a:xfrm>
+            <a:off x="3017520" y="3474720"/>
+            <a:ext cx="1645920" cy="457200"/>
+          </a:xfrm>
+          <a:prstGeom prst="rect">
+            <a:avLst/>
+          </a:prstGeom>
+          <a:noFill/>
+        </p:spPr>
+        <p:txBody>
+          <a:bodyPr wrap="none">
+            <a:spAutoFit/>
+          </a:bodyPr>
+          <a:lstStyle/>
+          <a:p>
+            <a:pPr algn="ctr">
+              <a:defRPr sz="2000" b="1">
+                <a:solidFill>
+                  <a:srgbClr val="FFFFFF"/>
+                </a:solidFill>
+              </a:defRPr>
+            </a:pPr>
+            <a:r>
+              <a:t>&gt;82%</a:t>
+            </a:r>
+          </a:p>
+        </p:txBody>
+      </p:sp>
+      <p:sp>
+        <p:nvSpPr>
+          <p:cNvPr id="22" name="TextBox 21"/>
+          <p:cNvSpPr txBox="1"/>
+          <p:nvPr/>
+        </p:nvSpPr>
+        <p:spPr>
+          <a:xfrm>
+            <a:off x="731520" y="4114800"/>
+            <a:ext cx="7772400" cy="2286000"/>
+          </a:xfrm>
+          <a:prstGeom prst="rect">
+            <a:avLst/>
+          </a:prstGeom>
+          <a:noFill/>
+        </p:spPr>
+        <p:txBody>
           <a:bodyPr wrap="square">
             <a:spAutoFit/>
           </a:bodyPr>
           <a:lstStyle/>
           <a:p>
             <a:pPr>
-              <a:spcAft>
-                <a:spcPts val="1200"/>
-              </a:spcAft>
-              <a:defRPr sz="1600"/>
-            </a:pPr>
-            <a:r>
-              <a:t>1. Kualitas tebu rendah: pol &lt;8%, kotoran tinggi → rendemen turun</a:t>
-            </a:r>
-          </a:p>
-          <a:p>
-            <a:pPr>
-              <a:spcAft>
-                <a:spcPts val="1200"/>
-              </a:spcAft>
-              <a:defRPr sz="1600"/>
-            </a:pPr>
-            <a:r>
-              <a:t>2. Breakdown mesin: gilingan, boiler → stop produksi (loss besar)</a:t>
-            </a:r>
-          </a:p>
-          <a:p>
-            <a:pPr>
-              <a:spcAft>
-                <a:spcPts val="1200"/>
-              </a:spcAft>
-              <a:defRPr sz="1600"/>
-            </a:pPr>
-            <a:r>
-              <a:t>3. Keterlambatan tebu: antrian panjang → tebu menua, pol turun</a:t>
-            </a:r>
-          </a:p>
-          <a:p>
-            <a:pPr>
-              <a:spcAft>
-                <a:spcPts val="1200"/>
-              </a:spcAft>
-              <a:defRPr sz="1600"/>
-            </a:pPr>
-            <a:r>
-              <a:t>4. Cuaca buruk: hujan → tebu basah, susah giling</a:t>
-            </a:r>
-          </a:p>
-          <a:p>
-            <a:pPr>
-              <a:spcAft>
-                <a:spcPts val="1200"/>
-              </a:spcAft>
-              <a:defRPr sz="1600"/>
-            </a:pPr>
-            <a:r>
-              <a:t>5. Kekurangan SDM terampil: operator, teknisi → inefficiency</a:t>
-            </a:r>
-          </a:p>
-          <a:p>
-            <a:pPr>
-              <a:spcAft>
-                <a:spcPts val="1200"/>
-              </a:spcAft>
-              <a:defRPr sz="1600"/>
-            </a:pPr>
-            <a:r>
-              <a:t>6. Kapasitas terbatas: demand tinggi tapi kapasitas tetap</a:t>
-            </a:r>
-          </a:p>
-          <a:p>
-            <a:pPr>
-              <a:spcAft>
-                <a:spcPts val="1200"/>
-              </a:spcAft>
-              <a:defRPr sz="1600"/>
-            </a:pPr>
-            <a:r>
-              <a:t>• Mitigasi: preventive maintenance, buffer stock, training</a:t>
+              <a:defRPr sz="1400">
+                <a:solidFill>
+                  <a:srgbClr val="333333"/>
+                </a:solidFill>
+              </a:defRPr>
+            </a:pPr>
+            <a:r>
+              <a:t>📊 Monitoring Real-Time via Dashboard SCADA</a:t>
+            </a:r>
+          </a:p>
+          <a:p/>
+          <a:p>
+            <a:r>
+              <a:t>• Rendemen = (Gula/Tebu) x 100% → Indikator efisiensi total</a:t>
+            </a:r>
+          </a:p>
+          <a:p>
+            <a:r>
+              <a:t>• Recovery = % pol yang berhasil diekstrak dari tebu</a:t>
+            </a:r>
+          </a:p>
+          <a:p>
+            <a:r>
+              <a:t>• Kapasitas = Ton Cane per Day (TCD) → Throughput produksi</a:t>
+            </a:r>
+          </a:p>
+          <a:p>
+            <a:r>
+              <a:t>• Losses = Pol yang hilang selama proses (target minimal)</a:t>
             </a:r>
           </a:p>
         </p:txBody>
@@ -3511,14 +4387,59 @@
       <p:grpSpPr/>
       <p:sp>
         <p:nvSpPr>
-          <p:cNvPr id="2" name="TextBox 1"/>
+          <p:cNvPr id="2" name="Rectangle 1"/>
+          <p:cNvSpPr/>
+          <p:nvPr/>
+        </p:nvSpPr>
+        <p:spPr>
+          <a:xfrm>
+            <a:off x="0" y="0"/>
+            <a:ext cx="9144000" cy="914400"/>
+          </a:xfrm>
+          <a:prstGeom prst="rect">
+            <a:avLst/>
+          </a:prstGeom>
+          <a:solidFill>
+            <a:srgbClr val="003366"/>
+          </a:solidFill>
+          <a:ln>
+            <a:solidFill>
+              <a:srgbClr val="003366"/>
+            </a:solidFill>
+          </a:ln>
+        </p:spPr>
+        <p:style>
+          <a:lnRef idx="1">
+            <a:schemeClr val="accent1"/>
+          </a:lnRef>
+          <a:fillRef idx="3">
+            <a:schemeClr val="accent1"/>
+          </a:fillRef>
+          <a:effectRef idx="2">
+            <a:schemeClr val="accent1"/>
+          </a:effectRef>
+          <a:fontRef idx="minor">
+            <a:schemeClr val="lt1"/>
+          </a:fontRef>
+        </p:style>
+        <p:txBody>
+          <a:bodyPr rtlCol="0" anchor="ctr"/>
+          <a:lstStyle/>
+          <a:p>
+            <a:pPr algn="ctr"/>
+          </a:p>
+        </p:txBody>
+      </p:sp>
+      <p:sp>
+        <p:nvSpPr>
+          <p:cNvPr id="3" name="TextBox 2"/>
           <p:cNvSpPr txBox="1"/>
           <p:nvPr/>
         </p:nvSpPr>
         <p:spPr>
           <a:xfrm>
-            <a:off x="457200" y="457200"/>
-            <a:ext cx="8229600" cy="640080"/>
+            <a:off x="457200" y="228600"/>
+            <a:ext cx="8229600" cy="457200"/>
           </a:xfrm>
           <a:prstGeom prst="rect">
             <a:avLst/>
@@ -3534,26 +4455,26 @@
             <a:pPr>
               <a:defRPr sz="3200" b="1">
                 <a:solidFill>
-                  <a:srgbClr val="003366"/>
-                </a:solidFill>
-              </a:defRPr>
-            </a:pPr>
-            <a:r>
-              <a:t>Tantangan Industri Gula Indonesia</a:t>
-            </a:r>
-          </a:p>
-        </p:txBody>
-      </p:sp>
-      <p:sp>
-        <p:nvSpPr>
-          <p:cNvPr id="3" name="TextBox 2"/>
+                  <a:srgbClr val="FFFFFF"/>
+                </a:solidFill>
+              </a:defRPr>
+            </a:pPr>
+            <a:r>
+              <a:t>Bottleneck Operasional</a:t>
+            </a:r>
+          </a:p>
+        </p:txBody>
+      </p:sp>
+      <p:sp>
+        <p:nvSpPr>
+          <p:cNvPr id="4" name="TextBox 3"/>
           <p:cNvSpPr txBox="1"/>
           <p:nvPr/>
         </p:nvSpPr>
         <p:spPr>
           <a:xfrm>
-            <a:off x="731520" y="1371600"/>
-            <a:ext cx="7772400" cy="5029200"/>
+            <a:off x="457200" y="1371600"/>
+            <a:ext cx="4114800" cy="5029200"/>
           </a:xfrm>
           <a:prstGeom prst="rect">
             <a:avLst/>
@@ -3570,76 +4491,433 @@
               <a:spcAft>
                 <a:spcPts val="1200"/>
               </a:spcAft>
-              <a:defRPr sz="1600"/>
-            </a:pPr>
-            <a:r>
-              <a:t>• Produktivitas rendah: rendemen 6-8% vs Thailand 10-12%</a:t>
-            </a:r>
-          </a:p>
-          <a:p>
-            <a:pPr>
-              <a:spcAft>
-                <a:spcPts val="1200"/>
-              </a:spcAft>
-              <a:defRPr sz="1600"/>
-            </a:pPr>
-            <a:r>
-              <a:t>• Impor tinggi: ±50% kebutuhan nasional dari impor</a:t>
-            </a:r>
-          </a:p>
-          <a:p>
-            <a:pPr>
-              <a:spcAft>
-                <a:spcPts val="1200"/>
-              </a:spcAft>
-              <a:defRPr sz="1600"/>
-            </a:pPr>
-            <a:r>
-              <a:t>• Biaya produksi tinggi: HPP Rp 9.000-11.000/kg vs harga jual</a:t>
-            </a:r>
-          </a:p>
-          <a:p>
-            <a:pPr>
-              <a:spcAft>
-                <a:spcPts val="1200"/>
-              </a:spcAft>
-              <a:defRPr sz="1600"/>
-            </a:pPr>
-            <a:r>
-              <a:t>• Teknologi tua: mesin &gt;30 tahun, efisiensi rendah</a:t>
-            </a:r>
-          </a:p>
-          <a:p>
-            <a:pPr>
-              <a:spcAft>
-                <a:spcPts val="1200"/>
-              </a:spcAft>
-              <a:defRPr sz="1600"/>
-            </a:pPr>
-            <a:r>
-              <a:t>• Persaingan global: gula impor lebih murah</a:t>
-            </a:r>
-          </a:p>
-          <a:p>
-            <a:pPr>
-              <a:spcAft>
-                <a:spcPts val="1200"/>
-              </a:spcAft>
-              <a:defRPr sz="1600"/>
-            </a:pPr>
-            <a:r>
-              <a:t>• Regulasi: harga gula diatur pemerintah (floor/ceiling price)</a:t>
-            </a:r>
-          </a:p>
-          <a:p>
-            <a:pPr>
-              <a:spcAft>
-                <a:spcPts val="1200"/>
-              </a:spcAft>
-              <a:defRPr sz="1600"/>
-            </a:pPr>
-            <a:r>
-              <a:t>• Perubahan iklim: musim giling tidak menentu</a:t>
+              <a:defRPr sz="1500">
+                <a:solidFill>
+                  <a:srgbClr val="333333"/>
+                </a:solidFill>
+              </a:defRPr>
+            </a:pPr>
+            <a:r>
+              <a:t>⚠️  BOTTLENECK UTAMA</a:t>
+            </a:r>
+          </a:p>
+          <a:p>
+            <a:pPr>
+              <a:spcAft>
+                <a:spcPts val="1200"/>
+              </a:spcAft>
+              <a:defRPr sz="1500">
+                <a:solidFill>
+                  <a:srgbClr val="333333"/>
+                </a:solidFill>
+              </a:defRPr>
+            </a:pPr>
+          </a:p>
+          <a:p>
+            <a:pPr>
+              <a:spcAft>
+                <a:spcPts val="1200"/>
+              </a:spcAft>
+              <a:defRPr sz="1500">
+                <a:solidFill>
+                  <a:srgbClr val="333333"/>
+                </a:solidFill>
+              </a:defRPr>
+            </a:pPr>
+            <a:r>
+              <a:t>❌ Kualitas tebu rendah</a:t>
+            </a:r>
+          </a:p>
+          <a:p>
+            <a:pPr>
+              <a:spcAft>
+                <a:spcPts val="1200"/>
+              </a:spcAft>
+              <a:defRPr sz="1500">
+                <a:solidFill>
+                  <a:srgbClr val="333333"/>
+                </a:solidFill>
+              </a:defRPr>
+            </a:pPr>
+            <a:r>
+              <a:t>   → Pol &lt;8%, kotoran tinggi</a:t>
+            </a:r>
+          </a:p>
+          <a:p>
+            <a:pPr>
+              <a:spcAft>
+                <a:spcPts val="1200"/>
+              </a:spcAft>
+              <a:defRPr sz="1500">
+                <a:solidFill>
+                  <a:srgbClr val="333333"/>
+                </a:solidFill>
+              </a:defRPr>
+            </a:pPr>
+            <a:r>
+              <a:t>   → Rendemen turun</a:t>
+            </a:r>
+          </a:p>
+          <a:p>
+            <a:pPr>
+              <a:spcAft>
+                <a:spcPts val="1200"/>
+              </a:spcAft>
+              <a:defRPr sz="1500">
+                <a:solidFill>
+                  <a:srgbClr val="333333"/>
+                </a:solidFill>
+              </a:defRPr>
+            </a:pPr>
+          </a:p>
+          <a:p>
+            <a:pPr>
+              <a:spcAft>
+                <a:spcPts val="1200"/>
+              </a:spcAft>
+              <a:defRPr sz="1500">
+                <a:solidFill>
+                  <a:srgbClr val="333333"/>
+                </a:solidFill>
+              </a:defRPr>
+            </a:pPr>
+            <a:r>
+              <a:t>❌ Breakdown mesin</a:t>
+            </a:r>
+          </a:p>
+          <a:p>
+            <a:pPr>
+              <a:spcAft>
+                <a:spcPts val="1200"/>
+              </a:spcAft>
+              <a:defRPr sz="1500">
+                <a:solidFill>
+                  <a:srgbClr val="333333"/>
+                </a:solidFill>
+              </a:defRPr>
+            </a:pPr>
+            <a:r>
+              <a:t>   → Gilingan, boiler rusak</a:t>
+            </a:r>
+          </a:p>
+          <a:p>
+            <a:pPr>
+              <a:spcAft>
+                <a:spcPts val="1200"/>
+              </a:spcAft>
+              <a:defRPr sz="1500">
+                <a:solidFill>
+                  <a:srgbClr val="333333"/>
+                </a:solidFill>
+              </a:defRPr>
+            </a:pPr>
+            <a:r>
+              <a:t>   → Stop produksi (loss besar)</a:t>
+            </a:r>
+          </a:p>
+          <a:p>
+            <a:pPr>
+              <a:spcAft>
+                <a:spcPts val="1200"/>
+              </a:spcAft>
+              <a:defRPr sz="1500">
+                <a:solidFill>
+                  <a:srgbClr val="333333"/>
+                </a:solidFill>
+              </a:defRPr>
+            </a:pPr>
+          </a:p>
+          <a:p>
+            <a:pPr>
+              <a:spcAft>
+                <a:spcPts val="1200"/>
+              </a:spcAft>
+              <a:defRPr sz="1500">
+                <a:solidFill>
+                  <a:srgbClr val="333333"/>
+                </a:solidFill>
+              </a:defRPr>
+            </a:pPr>
+            <a:r>
+              <a:t>❌ Keterlambatan tebu</a:t>
+            </a:r>
+          </a:p>
+          <a:p>
+            <a:pPr>
+              <a:spcAft>
+                <a:spcPts val="1200"/>
+              </a:spcAft>
+              <a:defRPr sz="1500">
+                <a:solidFill>
+                  <a:srgbClr val="333333"/>
+                </a:solidFill>
+              </a:defRPr>
+            </a:pPr>
+            <a:r>
+              <a:t>   → Antrian panjang</a:t>
+            </a:r>
+          </a:p>
+          <a:p>
+            <a:pPr>
+              <a:spcAft>
+                <a:spcPts val="1200"/>
+              </a:spcAft>
+              <a:defRPr sz="1500">
+                <a:solidFill>
+                  <a:srgbClr val="333333"/>
+                </a:solidFill>
+              </a:defRPr>
+            </a:pPr>
+            <a:r>
+              <a:t>   → Tebu menua, pol turun</a:t>
+            </a:r>
+          </a:p>
+        </p:txBody>
+      </p:sp>
+      <p:sp>
+        <p:nvSpPr>
+          <p:cNvPr id="5" name="TextBox 4"/>
+          <p:cNvSpPr txBox="1"/>
+          <p:nvPr/>
+        </p:nvSpPr>
+        <p:spPr>
+          <a:xfrm>
+            <a:off x="4754880" y="1371600"/>
+            <a:ext cx="4114800" cy="5029200"/>
+          </a:xfrm>
+          <a:prstGeom prst="rect">
+            <a:avLst/>
+          </a:prstGeom>
+          <a:noFill/>
+        </p:spPr>
+        <p:txBody>
+          <a:bodyPr wrap="square">
+            <a:spAutoFit/>
+          </a:bodyPr>
+          <a:lstStyle/>
+          <a:p>
+            <a:pPr>
+              <a:spcAft>
+                <a:spcPts val="1200"/>
+              </a:spcAft>
+              <a:defRPr sz="1500">
+                <a:solidFill>
+                  <a:srgbClr val="333333"/>
+                </a:solidFill>
+              </a:defRPr>
+            </a:pPr>
+          </a:p>
+          <a:p>
+            <a:pPr>
+              <a:spcAft>
+                <a:spcPts val="1200"/>
+              </a:spcAft>
+              <a:defRPr sz="1500">
+                <a:solidFill>
+                  <a:srgbClr val="333333"/>
+                </a:solidFill>
+              </a:defRPr>
+            </a:pPr>
+          </a:p>
+          <a:p>
+            <a:pPr>
+              <a:spcAft>
+                <a:spcPts val="1200"/>
+              </a:spcAft>
+              <a:defRPr sz="1500">
+                <a:solidFill>
+                  <a:srgbClr val="333333"/>
+                </a:solidFill>
+              </a:defRPr>
+            </a:pPr>
+            <a:r>
+              <a:t>❌ Cuaca buruk</a:t>
+            </a:r>
+          </a:p>
+          <a:p>
+            <a:pPr>
+              <a:spcAft>
+                <a:spcPts val="1200"/>
+              </a:spcAft>
+              <a:defRPr sz="1500">
+                <a:solidFill>
+                  <a:srgbClr val="333333"/>
+                </a:solidFill>
+              </a:defRPr>
+            </a:pPr>
+            <a:r>
+              <a:t>   → Hujan, tebu basah</a:t>
+            </a:r>
+          </a:p>
+          <a:p>
+            <a:pPr>
+              <a:spcAft>
+                <a:spcPts val="1200"/>
+              </a:spcAft>
+              <a:defRPr sz="1500">
+                <a:solidFill>
+                  <a:srgbClr val="333333"/>
+                </a:solidFill>
+              </a:defRPr>
+            </a:pPr>
+            <a:r>
+              <a:t>   → Susah giling</a:t>
+            </a:r>
+          </a:p>
+          <a:p>
+            <a:pPr>
+              <a:spcAft>
+                <a:spcPts val="1200"/>
+              </a:spcAft>
+              <a:defRPr sz="1500">
+                <a:solidFill>
+                  <a:srgbClr val="333333"/>
+                </a:solidFill>
+              </a:defRPr>
+            </a:pPr>
+          </a:p>
+          <a:p>
+            <a:pPr>
+              <a:spcAft>
+                <a:spcPts val="1200"/>
+              </a:spcAft>
+              <a:defRPr sz="1500">
+                <a:solidFill>
+                  <a:srgbClr val="333333"/>
+                </a:solidFill>
+              </a:defRPr>
+            </a:pPr>
+            <a:r>
+              <a:t>❌ SDM kurang terampil</a:t>
+            </a:r>
+          </a:p>
+          <a:p>
+            <a:pPr>
+              <a:spcAft>
+                <a:spcPts val="1200"/>
+              </a:spcAft>
+              <a:defRPr sz="1500">
+                <a:solidFill>
+                  <a:srgbClr val="333333"/>
+                </a:solidFill>
+              </a:defRPr>
+            </a:pPr>
+            <a:r>
+              <a:t>   → Operator, teknisi</a:t>
+            </a:r>
+          </a:p>
+          <a:p>
+            <a:pPr>
+              <a:spcAft>
+                <a:spcPts val="1200"/>
+              </a:spcAft>
+              <a:defRPr sz="1500">
+                <a:solidFill>
+                  <a:srgbClr val="333333"/>
+                </a:solidFill>
+              </a:defRPr>
+            </a:pPr>
+            <a:r>
+              <a:t>   → Inefficiency</a:t>
+            </a:r>
+          </a:p>
+          <a:p>
+            <a:pPr>
+              <a:spcAft>
+                <a:spcPts val="1200"/>
+              </a:spcAft>
+              <a:defRPr sz="1500">
+                <a:solidFill>
+                  <a:srgbClr val="333333"/>
+                </a:solidFill>
+              </a:defRPr>
+            </a:pPr>
+          </a:p>
+          <a:p>
+            <a:pPr>
+              <a:spcAft>
+                <a:spcPts val="1200"/>
+              </a:spcAft>
+              <a:defRPr sz="1500">
+                <a:solidFill>
+                  <a:srgbClr val="333333"/>
+                </a:solidFill>
+              </a:defRPr>
+            </a:pPr>
+            <a:r>
+              <a:t>❌ Kapasitas terbatas</a:t>
+            </a:r>
+          </a:p>
+          <a:p>
+            <a:pPr>
+              <a:spcAft>
+                <a:spcPts val="1200"/>
+              </a:spcAft>
+              <a:defRPr sz="1500">
+                <a:solidFill>
+                  <a:srgbClr val="333333"/>
+                </a:solidFill>
+              </a:defRPr>
+            </a:pPr>
+            <a:r>
+              <a:t>   → Demand tinggi</a:t>
+            </a:r>
+          </a:p>
+          <a:p>
+            <a:pPr>
+              <a:spcAft>
+                <a:spcPts val="1200"/>
+              </a:spcAft>
+              <a:defRPr sz="1500">
+                <a:solidFill>
+                  <a:srgbClr val="333333"/>
+                </a:solidFill>
+              </a:defRPr>
+            </a:pPr>
+            <a:r>
+              <a:t>   → Kapasitas tetap</a:t>
+            </a:r>
+          </a:p>
+          <a:p>
+            <a:pPr>
+              <a:spcAft>
+                <a:spcPts val="1200"/>
+              </a:spcAft>
+              <a:defRPr sz="1500">
+                <a:solidFill>
+                  <a:srgbClr val="333333"/>
+                </a:solidFill>
+              </a:defRPr>
+            </a:pPr>
+          </a:p>
+          <a:p>
+            <a:pPr>
+              <a:spcAft>
+                <a:spcPts val="1200"/>
+              </a:spcAft>
+              <a:defRPr sz="1500">
+                <a:solidFill>
+                  <a:srgbClr val="333333"/>
+                </a:solidFill>
+              </a:defRPr>
+            </a:pPr>
+            <a:r>
+              <a:t>✅ Mitigasi: Preventive</a:t>
+            </a:r>
+          </a:p>
+          <a:p>
+            <a:pPr>
+              <a:spcAft>
+                <a:spcPts val="1200"/>
+              </a:spcAft>
+              <a:defRPr sz="1500">
+                <a:solidFill>
+                  <a:srgbClr val="333333"/>
+                </a:solidFill>
+              </a:defRPr>
+            </a:pPr>
+            <a:r>
+              <a:t>   maintenance &amp; training</a:t>
             </a:r>
           </a:p>
         </p:txBody>
@@ -3664,14 +4942,59 @@
       <p:grpSpPr/>
       <p:sp>
         <p:nvSpPr>
-          <p:cNvPr id="2" name="TextBox 1"/>
+          <p:cNvPr id="2" name="Rectangle 1"/>
+          <p:cNvSpPr/>
+          <p:nvPr/>
+        </p:nvSpPr>
+        <p:spPr>
+          <a:xfrm>
+            <a:off x="0" y="0"/>
+            <a:ext cx="9144000" cy="914400"/>
+          </a:xfrm>
+          <a:prstGeom prst="rect">
+            <a:avLst/>
+          </a:prstGeom>
+          <a:solidFill>
+            <a:srgbClr val="003366"/>
+          </a:solidFill>
+          <a:ln>
+            <a:solidFill>
+              <a:srgbClr val="003366"/>
+            </a:solidFill>
+          </a:ln>
+        </p:spPr>
+        <p:style>
+          <a:lnRef idx="1">
+            <a:schemeClr val="accent1"/>
+          </a:lnRef>
+          <a:fillRef idx="3">
+            <a:schemeClr val="accent1"/>
+          </a:fillRef>
+          <a:effectRef idx="2">
+            <a:schemeClr val="accent1"/>
+          </a:effectRef>
+          <a:fontRef idx="minor">
+            <a:schemeClr val="lt1"/>
+          </a:fontRef>
+        </p:style>
+        <p:txBody>
+          <a:bodyPr rtlCol="0" anchor="ctr"/>
+          <a:lstStyle/>
+          <a:p>
+            <a:pPr algn="ctr"/>
+          </a:p>
+        </p:txBody>
+      </p:sp>
+      <p:sp>
+        <p:nvSpPr>
+          <p:cNvPr id="3" name="TextBox 2"/>
           <p:cNvSpPr txBox="1"/>
           <p:nvPr/>
         </p:nvSpPr>
         <p:spPr>
           <a:xfrm>
-            <a:off x="457200" y="457200"/>
-            <a:ext cx="8229600" cy="640080"/>
+            <a:off x="457200" y="228600"/>
+            <a:ext cx="8229600" cy="457200"/>
           </a:xfrm>
           <a:prstGeom prst="rect">
             <a:avLst/>
@@ -3687,19 +5010,19 @@
             <a:pPr>
               <a:defRPr sz="3200" b="1">
                 <a:solidFill>
-                  <a:srgbClr val="003366"/>
-                </a:solidFill>
-              </a:defRPr>
-            </a:pPr>
-            <a:r>
-              <a:t>Peluang Improvement &amp; Modernisasi</a:t>
-            </a:r>
-          </a:p>
-        </p:txBody>
-      </p:sp>
-      <p:sp>
-        <p:nvSpPr>
-          <p:cNvPr id="3" name="TextBox 2"/>
+                  <a:srgbClr val="FFFFFF"/>
+                </a:solidFill>
+              </a:defRPr>
+            </a:pPr>
+            <a:r>
+              <a:t>Tantangan Industri Gula Indonesia</a:t>
+            </a:r>
+          </a:p>
+        </p:txBody>
+      </p:sp>
+      <p:sp>
+        <p:nvSpPr>
+          <p:cNvPr id="4" name="TextBox 3"/>
           <p:cNvSpPr txBox="1"/>
           <p:nvPr/>
         </p:nvSpPr>
@@ -3721,89 +5044,178 @@
           <a:p>
             <a:pPr>
               <a:spcAft>
-                <a:spcPts val="1200"/>
-              </a:spcAft>
-              <a:defRPr sz="1600"/>
-            </a:pPr>
-            <a:r>
-              <a:t>1. DIGITALISASI: IoT sensor, AI untuk optimasi proses</a:t>
-            </a:r>
-          </a:p>
-          <a:p>
-            <a:pPr>
-              <a:spcAft>
-                <a:spcPts val="1200"/>
-              </a:spcAft>
-              <a:defRPr sz="1600"/>
-            </a:pPr>
-            <a:r>
-              <a:t>2. MODERNISASI MESIN: upgrade gilingan, boiler high-pressure</a:t>
-            </a:r>
-          </a:p>
-          <a:p>
-            <a:pPr>
-              <a:spcAft>
-                <a:spcPts val="1200"/>
-              </a:spcAft>
-              <a:defRPr sz="1600"/>
-            </a:pPr>
-            <a:r>
-              <a:t>3. CO-GENERATION: jual listrik surplus ke PLN (renewable energy)</a:t>
-            </a:r>
-          </a:p>
-          <a:p>
-            <a:pPr>
-              <a:spcAft>
-                <a:spcPts val="1200"/>
-              </a:spcAft>
-              <a:defRPr sz="1600"/>
-            </a:pPr>
-            <a:r>
-              <a:t>4. DIVERSIFIKASI PRODUK: bioethanol, refined sugar, gula khusus</a:t>
-            </a:r>
-          </a:p>
-          <a:p>
-            <a:pPr>
-              <a:spcAft>
-                <a:spcPts val="1200"/>
-              </a:spcAft>
-              <a:defRPr sz="1600"/>
-            </a:pPr>
-            <a:r>
-              <a:t>5. BIOFUEL: bagasse → pellet/biogas</a:t>
-            </a:r>
-          </a:p>
-          <a:p>
-            <a:pPr>
-              <a:spcAft>
-                <a:spcPts val="1200"/>
-              </a:spcAft>
-              <a:defRPr sz="1600"/>
-            </a:pPr>
-            <a:r>
-              <a:t>6. PRECISION AGRICULTURE: drone, GPS untuk efisiensi kebun</a:t>
-            </a:r>
-          </a:p>
-          <a:p>
-            <a:pPr>
-              <a:spcAft>
-                <a:spcPts val="1200"/>
-              </a:spcAft>
-              <a:defRPr sz="1600"/>
-            </a:pPr>
-            <a:r>
-              <a:t>7. BACKWARD INTEGRATION: petani mitra → kualitas tebu konsisten</a:t>
-            </a:r>
-          </a:p>
-          <a:p>
-            <a:pPr>
-              <a:spcAft>
-                <a:spcPts val="1200"/>
-              </a:spcAft>
-              <a:defRPr sz="1600"/>
-            </a:pPr>
-            <a:r>
-              <a:t>• Potensi peningkatan EBITDA: 20-30%</a:t>
+                <a:spcPts val="1400"/>
+              </a:spcAft>
+              <a:defRPr sz="1600">
+                <a:solidFill>
+                  <a:srgbClr val="333333"/>
+                </a:solidFill>
+              </a:defRPr>
+            </a:pPr>
+            <a:r>
+              <a:t>📉 Produktivitas rendah: Rendemen 6-8% vs Thailand 10-12%</a:t>
+            </a:r>
+          </a:p>
+          <a:p>
+            <a:pPr>
+              <a:spcAft>
+                <a:spcPts val="1400"/>
+              </a:spcAft>
+              <a:defRPr sz="1600">
+                <a:solidFill>
+                  <a:srgbClr val="333333"/>
+                </a:solidFill>
+              </a:defRPr>
+            </a:pPr>
+          </a:p>
+          <a:p>
+            <a:pPr>
+              <a:spcAft>
+                <a:spcPts val="1400"/>
+              </a:spcAft>
+              <a:defRPr sz="1600">
+                <a:solidFill>
+                  <a:srgbClr val="333333"/>
+                </a:solidFill>
+              </a:defRPr>
+            </a:pPr>
+            <a:r>
+              <a:t>📥 Impor tinggi: ±50% kebutuhan nasional dari impor</a:t>
+            </a:r>
+          </a:p>
+          <a:p>
+            <a:pPr>
+              <a:spcAft>
+                <a:spcPts val="1400"/>
+              </a:spcAft>
+              <a:defRPr sz="1600">
+                <a:solidFill>
+                  <a:srgbClr val="333333"/>
+                </a:solidFill>
+              </a:defRPr>
+            </a:pPr>
+          </a:p>
+          <a:p>
+            <a:pPr>
+              <a:spcAft>
+                <a:spcPts val="1400"/>
+              </a:spcAft>
+              <a:defRPr sz="1600">
+                <a:solidFill>
+                  <a:srgbClr val="333333"/>
+                </a:solidFill>
+              </a:defRPr>
+            </a:pPr>
+            <a:r>
+              <a:t>💸 Biaya produksi tinggi: HPP Rp 9.000-11.000/kg vs harga jual</a:t>
+            </a:r>
+          </a:p>
+          <a:p>
+            <a:pPr>
+              <a:spcAft>
+                <a:spcPts val="1400"/>
+              </a:spcAft>
+              <a:defRPr sz="1600">
+                <a:solidFill>
+                  <a:srgbClr val="333333"/>
+                </a:solidFill>
+              </a:defRPr>
+            </a:pPr>
+          </a:p>
+          <a:p>
+            <a:pPr>
+              <a:spcAft>
+                <a:spcPts val="1400"/>
+              </a:spcAft>
+              <a:defRPr sz="1600">
+                <a:solidFill>
+                  <a:srgbClr val="333333"/>
+                </a:solidFill>
+              </a:defRPr>
+            </a:pPr>
+            <a:r>
+              <a:t>⚙️  Teknologi tua: Mesin &gt;30 tahun, efisiensi rendah</a:t>
+            </a:r>
+          </a:p>
+          <a:p>
+            <a:pPr>
+              <a:spcAft>
+                <a:spcPts val="1400"/>
+              </a:spcAft>
+              <a:defRPr sz="1600">
+                <a:solidFill>
+                  <a:srgbClr val="333333"/>
+                </a:solidFill>
+              </a:defRPr>
+            </a:pPr>
+          </a:p>
+          <a:p>
+            <a:pPr>
+              <a:spcAft>
+                <a:spcPts val="1400"/>
+              </a:spcAft>
+              <a:defRPr sz="1600">
+                <a:solidFill>
+                  <a:srgbClr val="333333"/>
+                </a:solidFill>
+              </a:defRPr>
+            </a:pPr>
+            <a:r>
+              <a:t>🌍 Persaingan global: Gula impor lebih murah</a:t>
+            </a:r>
+          </a:p>
+          <a:p>
+            <a:pPr>
+              <a:spcAft>
+                <a:spcPts val="1400"/>
+              </a:spcAft>
+              <a:defRPr sz="1600">
+                <a:solidFill>
+                  <a:srgbClr val="333333"/>
+                </a:solidFill>
+              </a:defRPr>
+            </a:pPr>
+          </a:p>
+          <a:p>
+            <a:pPr>
+              <a:spcAft>
+                <a:spcPts val="1400"/>
+              </a:spcAft>
+              <a:defRPr sz="1600">
+                <a:solidFill>
+                  <a:srgbClr val="333333"/>
+                </a:solidFill>
+              </a:defRPr>
+            </a:pPr>
+            <a:r>
+              <a:t>📜 Regulasi: Harga gula diatur pemerintah (floor/ceiling price)</a:t>
+            </a:r>
+          </a:p>
+          <a:p>
+            <a:pPr>
+              <a:spcAft>
+                <a:spcPts val="1400"/>
+              </a:spcAft>
+              <a:defRPr sz="1600">
+                <a:solidFill>
+                  <a:srgbClr val="333333"/>
+                </a:solidFill>
+              </a:defRPr>
+            </a:pPr>
+          </a:p>
+          <a:p>
+            <a:pPr>
+              <a:spcAft>
+                <a:spcPts val="1400"/>
+              </a:spcAft>
+              <a:defRPr sz="1600">
+                <a:solidFill>
+                  <a:srgbClr val="333333"/>
+                </a:solidFill>
+              </a:defRPr>
+            </a:pPr>
+            <a:r>
+              <a:t>🌦️  Perubahan iklim: Musim giling tidak menentu</a:t>
             </a:r>
           </a:p>
         </p:txBody>
@@ -3828,14 +5240,59 @@
       <p:grpSpPr/>
       <p:sp>
         <p:nvSpPr>
-          <p:cNvPr id="2" name="TextBox 1"/>
+          <p:cNvPr id="2" name="Rectangle 1"/>
+          <p:cNvSpPr/>
+          <p:nvPr/>
+        </p:nvSpPr>
+        <p:spPr>
+          <a:xfrm>
+            <a:off x="0" y="0"/>
+            <a:ext cx="9144000" cy="914400"/>
+          </a:xfrm>
+          <a:prstGeom prst="rect">
+            <a:avLst/>
+          </a:prstGeom>
+          <a:solidFill>
+            <a:srgbClr val="003366"/>
+          </a:solidFill>
+          <a:ln>
+            <a:solidFill>
+              <a:srgbClr val="003366"/>
+            </a:solidFill>
+          </a:ln>
+        </p:spPr>
+        <p:style>
+          <a:lnRef idx="1">
+            <a:schemeClr val="accent1"/>
+          </a:lnRef>
+          <a:fillRef idx="3">
+            <a:schemeClr val="accent1"/>
+          </a:fillRef>
+          <a:effectRef idx="2">
+            <a:schemeClr val="accent1"/>
+          </a:effectRef>
+          <a:fontRef idx="minor">
+            <a:schemeClr val="lt1"/>
+          </a:fontRef>
+        </p:style>
+        <p:txBody>
+          <a:bodyPr rtlCol="0" anchor="ctr"/>
+          <a:lstStyle/>
+          <a:p>
+            <a:pPr algn="ctr"/>
+          </a:p>
+        </p:txBody>
+      </p:sp>
+      <p:sp>
+        <p:nvSpPr>
+          <p:cNvPr id="3" name="TextBox 2"/>
           <p:cNvSpPr txBox="1"/>
           <p:nvPr/>
         </p:nvSpPr>
         <p:spPr>
           <a:xfrm>
-            <a:off x="457200" y="457200"/>
-            <a:ext cx="8229600" cy="640080"/>
+            <a:off x="457200" y="228600"/>
+            <a:ext cx="8229600" cy="457200"/>
           </a:xfrm>
           <a:prstGeom prst="rect">
             <a:avLst/>
@@ -3851,26 +5308,26 @@
             <a:pPr>
               <a:defRPr sz="3200" b="1">
                 <a:solidFill>
-                  <a:srgbClr val="003366"/>
-                </a:solidFill>
-              </a:defRPr>
-            </a:pPr>
-            <a:r>
-              <a:t>Bagaimana PG Menghasilkan Uang?</a:t>
-            </a:r>
-          </a:p>
-        </p:txBody>
-      </p:sp>
-      <p:sp>
-        <p:nvSpPr>
-          <p:cNvPr id="3" name="TextBox 2"/>
+                  <a:srgbClr val="FFFFFF"/>
+                </a:solidFill>
+              </a:defRPr>
+            </a:pPr>
+            <a:r>
+              <a:t>Peluang Improvement &amp; Modernisasi</a:t>
+            </a:r>
+          </a:p>
+        </p:txBody>
+      </p:sp>
+      <p:sp>
+        <p:nvSpPr>
+          <p:cNvPr id="4" name="TextBox 3"/>
           <p:cNvSpPr txBox="1"/>
           <p:nvPr/>
         </p:nvSpPr>
         <p:spPr>
           <a:xfrm>
-            <a:off x="731520" y="1371600"/>
-            <a:ext cx="7772400" cy="5029200"/>
+            <a:off x="457200" y="1371600"/>
+            <a:ext cx="4114800" cy="5029200"/>
           </a:xfrm>
           <a:prstGeom prst="rect">
             <a:avLst/>
@@ -3887,136 +5344,433 @@
               <a:spcAft>
                 <a:spcPts val="1200"/>
               </a:spcAft>
-              <a:defRPr sz="1600"/>
-            </a:pPr>
-            <a:r>
-              <a:t>REVENUE STREAMS:</a:t>
-            </a:r>
-          </a:p>
-          <a:p>
-            <a:pPr>
-              <a:spcAft>
-                <a:spcPts val="1200"/>
-              </a:spcAft>
-              <a:defRPr sz="1600"/>
-            </a:pPr>
-            <a:r>
-              <a:t>• Penjualan gula (70-80%): Rp 12.000-15.000/kg</a:t>
-            </a:r>
-          </a:p>
-          <a:p>
-            <a:pPr>
-              <a:spcAft>
-                <a:spcPts val="1200"/>
-              </a:spcAft>
-              <a:defRPr sz="1600"/>
-            </a:pPr>
-            <a:r>
-              <a:t>• Molasses (10-15%): Rp 1.500-2.500/kg</a:t>
-            </a:r>
-          </a:p>
-          <a:p>
-            <a:pPr>
-              <a:spcAft>
-                <a:spcPts val="1200"/>
-              </a:spcAft>
-              <a:defRPr sz="1600"/>
-            </a:pPr>
-            <a:r>
-              <a:t>• Listrik co-gen (5-10%): Rp 1.000-1.200/kWh</a:t>
-            </a:r>
-          </a:p>
-          <a:p>
-            <a:pPr>
-              <a:spcAft>
-                <a:spcPts val="1200"/>
-              </a:spcAft>
-              <a:defRPr sz="1600"/>
-            </a:pPr>
-            <a:r>
-              <a:t>• Blotong (2-3%): Rp 200-500/kg</a:t>
-            </a:r>
-          </a:p>
-          <a:p>
-            <a:pPr>
-              <a:spcAft>
-                <a:spcPts val="1200"/>
-              </a:spcAft>
-              <a:defRPr sz="1600"/>
-            </a:pPr>
-          </a:p>
-          <a:p>
-            <a:pPr>
-              <a:spcAft>
-                <a:spcPts val="1200"/>
-              </a:spcAft>
-              <a:defRPr sz="1600"/>
-            </a:pPr>
-            <a:r>
-              <a:t>COST STRUCTURE:</a:t>
-            </a:r>
-          </a:p>
-          <a:p>
-            <a:pPr>
-              <a:spcAft>
-                <a:spcPts val="1200"/>
-              </a:spcAft>
-              <a:defRPr sz="1600"/>
-            </a:pPr>
-            <a:r>
-              <a:t>• Bahan baku tebu (50-60%)</a:t>
-            </a:r>
-          </a:p>
-          <a:p>
-            <a:pPr>
-              <a:spcAft>
-                <a:spcPts val="1200"/>
-              </a:spcAft>
-              <a:defRPr sz="1600"/>
-            </a:pPr>
-            <a:r>
-              <a:t>• Operasional &amp; energi (20-25%)</a:t>
-            </a:r>
-          </a:p>
-          <a:p>
-            <a:pPr>
-              <a:spcAft>
-                <a:spcPts val="1200"/>
-              </a:spcAft>
-              <a:defRPr sz="1600"/>
-            </a:pPr>
-            <a:r>
-              <a:t>• SDM &amp; overhead (10-15%)</a:t>
-            </a:r>
-          </a:p>
-          <a:p>
-            <a:pPr>
-              <a:spcAft>
-                <a:spcPts val="1200"/>
-              </a:spcAft>
-              <a:defRPr sz="1600"/>
-            </a:pPr>
-            <a:r>
-              <a:t>• Maintenance (5-8%)</a:t>
-            </a:r>
-          </a:p>
-          <a:p>
-            <a:pPr>
-              <a:spcAft>
-                <a:spcPts val="1200"/>
-              </a:spcAft>
-              <a:defRPr sz="1600"/>
-            </a:pPr>
-          </a:p>
-          <a:p>
-            <a:pPr>
-              <a:spcAft>
-                <a:spcPts val="1200"/>
-              </a:spcAft>
-              <a:defRPr sz="1600"/>
-            </a:pPr>
-            <a:r>
-              <a:t>MARGIN: EBITDA 15-25% (kondisi normal)</a:t>
+              <a:defRPr sz="1500">
+                <a:solidFill>
+                  <a:srgbClr val="333333"/>
+                </a:solidFill>
+              </a:defRPr>
+            </a:pPr>
+            <a:r>
+              <a:t>💡 PELUANG UTAMA</a:t>
+            </a:r>
+          </a:p>
+          <a:p>
+            <a:pPr>
+              <a:spcAft>
+                <a:spcPts val="1200"/>
+              </a:spcAft>
+              <a:defRPr sz="1500">
+                <a:solidFill>
+                  <a:srgbClr val="333333"/>
+                </a:solidFill>
+              </a:defRPr>
+            </a:pPr>
+          </a:p>
+          <a:p>
+            <a:pPr>
+              <a:spcAft>
+                <a:spcPts val="1200"/>
+              </a:spcAft>
+              <a:defRPr sz="1500">
+                <a:solidFill>
+                  <a:srgbClr val="333333"/>
+                </a:solidFill>
+              </a:defRPr>
+            </a:pPr>
+            <a:r>
+              <a:t>1️⃣ DIGITALISASI</a:t>
+            </a:r>
+          </a:p>
+          <a:p>
+            <a:pPr>
+              <a:spcAft>
+                <a:spcPts val="1200"/>
+              </a:spcAft>
+              <a:defRPr sz="1500">
+                <a:solidFill>
+                  <a:srgbClr val="333333"/>
+                </a:solidFill>
+              </a:defRPr>
+            </a:pPr>
+            <a:r>
+              <a:t>   • IoT sensor</a:t>
+            </a:r>
+          </a:p>
+          <a:p>
+            <a:pPr>
+              <a:spcAft>
+                <a:spcPts val="1200"/>
+              </a:spcAft>
+              <a:defRPr sz="1500">
+                <a:solidFill>
+                  <a:srgbClr val="333333"/>
+                </a:solidFill>
+              </a:defRPr>
+            </a:pPr>
+            <a:r>
+              <a:t>   • AI optimasi proses</a:t>
+            </a:r>
+          </a:p>
+          <a:p>
+            <a:pPr>
+              <a:spcAft>
+                <a:spcPts val="1200"/>
+              </a:spcAft>
+              <a:defRPr sz="1500">
+                <a:solidFill>
+                  <a:srgbClr val="333333"/>
+                </a:solidFill>
+              </a:defRPr>
+            </a:pPr>
+          </a:p>
+          <a:p>
+            <a:pPr>
+              <a:spcAft>
+                <a:spcPts val="1200"/>
+              </a:spcAft>
+              <a:defRPr sz="1500">
+                <a:solidFill>
+                  <a:srgbClr val="333333"/>
+                </a:solidFill>
+              </a:defRPr>
+            </a:pPr>
+            <a:r>
+              <a:t>2️⃣ MODERNISASI MESIN</a:t>
+            </a:r>
+          </a:p>
+          <a:p>
+            <a:pPr>
+              <a:spcAft>
+                <a:spcPts val="1200"/>
+              </a:spcAft>
+              <a:defRPr sz="1500">
+                <a:solidFill>
+                  <a:srgbClr val="333333"/>
+                </a:solidFill>
+              </a:defRPr>
+            </a:pPr>
+            <a:r>
+              <a:t>   • Upgrade gilingan</a:t>
+            </a:r>
+          </a:p>
+          <a:p>
+            <a:pPr>
+              <a:spcAft>
+                <a:spcPts val="1200"/>
+              </a:spcAft>
+              <a:defRPr sz="1500">
+                <a:solidFill>
+                  <a:srgbClr val="333333"/>
+                </a:solidFill>
+              </a:defRPr>
+            </a:pPr>
+            <a:r>
+              <a:t>   • Boiler high-pressure</a:t>
+            </a:r>
+          </a:p>
+          <a:p>
+            <a:pPr>
+              <a:spcAft>
+                <a:spcPts val="1200"/>
+              </a:spcAft>
+              <a:defRPr sz="1500">
+                <a:solidFill>
+                  <a:srgbClr val="333333"/>
+                </a:solidFill>
+              </a:defRPr>
+            </a:pPr>
+          </a:p>
+          <a:p>
+            <a:pPr>
+              <a:spcAft>
+                <a:spcPts val="1200"/>
+              </a:spcAft>
+              <a:defRPr sz="1500">
+                <a:solidFill>
+                  <a:srgbClr val="333333"/>
+                </a:solidFill>
+              </a:defRPr>
+            </a:pPr>
+            <a:r>
+              <a:t>3️⃣ CO-GENERATION</a:t>
+            </a:r>
+          </a:p>
+          <a:p>
+            <a:pPr>
+              <a:spcAft>
+                <a:spcPts val="1200"/>
+              </a:spcAft>
+              <a:defRPr sz="1500">
+                <a:solidFill>
+                  <a:srgbClr val="333333"/>
+                </a:solidFill>
+              </a:defRPr>
+            </a:pPr>
+            <a:r>
+              <a:t>   • Jual listrik surplus</a:t>
+            </a:r>
+          </a:p>
+          <a:p>
+            <a:pPr>
+              <a:spcAft>
+                <a:spcPts val="1200"/>
+              </a:spcAft>
+              <a:defRPr sz="1500">
+                <a:solidFill>
+                  <a:srgbClr val="333333"/>
+                </a:solidFill>
+              </a:defRPr>
+            </a:pPr>
+            <a:r>
+              <a:t>   • Renewable energy</a:t>
+            </a:r>
+          </a:p>
+        </p:txBody>
+      </p:sp>
+      <p:sp>
+        <p:nvSpPr>
+          <p:cNvPr id="5" name="TextBox 4"/>
+          <p:cNvSpPr txBox="1"/>
+          <p:nvPr/>
+        </p:nvSpPr>
+        <p:spPr>
+          <a:xfrm>
+            <a:off x="4754880" y="1371600"/>
+            <a:ext cx="4114800" cy="5029200"/>
+          </a:xfrm>
+          <a:prstGeom prst="rect">
+            <a:avLst/>
+          </a:prstGeom>
+          <a:noFill/>
+        </p:spPr>
+        <p:txBody>
+          <a:bodyPr wrap="square">
+            <a:spAutoFit/>
+          </a:bodyPr>
+          <a:lstStyle/>
+          <a:p>
+            <a:pPr>
+              <a:spcAft>
+                <a:spcPts val="1200"/>
+              </a:spcAft>
+              <a:defRPr sz="1500">
+                <a:solidFill>
+                  <a:srgbClr val="333333"/>
+                </a:solidFill>
+              </a:defRPr>
+            </a:pPr>
+          </a:p>
+          <a:p>
+            <a:pPr>
+              <a:spcAft>
+                <a:spcPts val="1200"/>
+              </a:spcAft>
+              <a:defRPr sz="1500">
+                <a:solidFill>
+                  <a:srgbClr val="333333"/>
+                </a:solidFill>
+              </a:defRPr>
+            </a:pPr>
+          </a:p>
+          <a:p>
+            <a:pPr>
+              <a:spcAft>
+                <a:spcPts val="1200"/>
+              </a:spcAft>
+              <a:defRPr sz="1500">
+                <a:solidFill>
+                  <a:srgbClr val="333333"/>
+                </a:solidFill>
+              </a:defRPr>
+            </a:pPr>
+            <a:r>
+              <a:t>4️⃣ DIVERSIFIKASI PRODUK</a:t>
+            </a:r>
+          </a:p>
+          <a:p>
+            <a:pPr>
+              <a:spcAft>
+                <a:spcPts val="1200"/>
+              </a:spcAft>
+              <a:defRPr sz="1500">
+                <a:solidFill>
+                  <a:srgbClr val="333333"/>
+                </a:solidFill>
+              </a:defRPr>
+            </a:pPr>
+            <a:r>
+              <a:t>   • Bioethanol</a:t>
+            </a:r>
+          </a:p>
+          <a:p>
+            <a:pPr>
+              <a:spcAft>
+                <a:spcPts val="1200"/>
+              </a:spcAft>
+              <a:defRPr sz="1500">
+                <a:solidFill>
+                  <a:srgbClr val="333333"/>
+                </a:solidFill>
+              </a:defRPr>
+            </a:pPr>
+            <a:r>
+              <a:t>   • Refined sugar</a:t>
+            </a:r>
+          </a:p>
+          <a:p>
+            <a:pPr>
+              <a:spcAft>
+                <a:spcPts val="1200"/>
+              </a:spcAft>
+              <a:defRPr sz="1500">
+                <a:solidFill>
+                  <a:srgbClr val="333333"/>
+                </a:solidFill>
+              </a:defRPr>
+            </a:pPr>
+            <a:r>
+              <a:t>   • Gula khusus</a:t>
+            </a:r>
+          </a:p>
+          <a:p>
+            <a:pPr>
+              <a:spcAft>
+                <a:spcPts val="1200"/>
+              </a:spcAft>
+              <a:defRPr sz="1500">
+                <a:solidFill>
+                  <a:srgbClr val="333333"/>
+                </a:solidFill>
+              </a:defRPr>
+            </a:pPr>
+          </a:p>
+          <a:p>
+            <a:pPr>
+              <a:spcAft>
+                <a:spcPts val="1200"/>
+              </a:spcAft>
+              <a:defRPr sz="1500">
+                <a:solidFill>
+                  <a:srgbClr val="333333"/>
+                </a:solidFill>
+              </a:defRPr>
+            </a:pPr>
+            <a:r>
+              <a:t>5️⃣ PRECISION AGRICULTURE</a:t>
+            </a:r>
+          </a:p>
+          <a:p>
+            <a:pPr>
+              <a:spcAft>
+                <a:spcPts val="1200"/>
+              </a:spcAft>
+              <a:defRPr sz="1500">
+                <a:solidFill>
+                  <a:srgbClr val="333333"/>
+                </a:solidFill>
+              </a:defRPr>
+            </a:pPr>
+            <a:r>
+              <a:t>   • Drone mapping</a:t>
+            </a:r>
+          </a:p>
+          <a:p>
+            <a:pPr>
+              <a:spcAft>
+                <a:spcPts val="1200"/>
+              </a:spcAft>
+              <a:defRPr sz="1500">
+                <a:solidFill>
+                  <a:srgbClr val="333333"/>
+                </a:solidFill>
+              </a:defRPr>
+            </a:pPr>
+            <a:r>
+              <a:t>   • GPS tracking</a:t>
+            </a:r>
+          </a:p>
+          <a:p>
+            <a:pPr>
+              <a:spcAft>
+                <a:spcPts val="1200"/>
+              </a:spcAft>
+              <a:defRPr sz="1500">
+                <a:solidFill>
+                  <a:srgbClr val="333333"/>
+                </a:solidFill>
+              </a:defRPr>
+            </a:pPr>
+          </a:p>
+          <a:p>
+            <a:pPr>
+              <a:spcAft>
+                <a:spcPts val="1200"/>
+              </a:spcAft>
+              <a:defRPr sz="1500">
+                <a:solidFill>
+                  <a:srgbClr val="333333"/>
+                </a:solidFill>
+              </a:defRPr>
+            </a:pPr>
+            <a:r>
+              <a:t>6️⃣ BACKWARD INTEGRATION</a:t>
+            </a:r>
+          </a:p>
+          <a:p>
+            <a:pPr>
+              <a:spcAft>
+                <a:spcPts val="1200"/>
+              </a:spcAft>
+              <a:defRPr sz="1500">
+                <a:solidFill>
+                  <a:srgbClr val="333333"/>
+                </a:solidFill>
+              </a:defRPr>
+            </a:pPr>
+            <a:r>
+              <a:t>   • Petani mitra</a:t>
+            </a:r>
+          </a:p>
+          <a:p>
+            <a:pPr>
+              <a:spcAft>
+                <a:spcPts val="1200"/>
+              </a:spcAft>
+              <a:defRPr sz="1500">
+                <a:solidFill>
+                  <a:srgbClr val="333333"/>
+                </a:solidFill>
+              </a:defRPr>
+            </a:pPr>
+            <a:r>
+              <a:t>   • Kualitas konsisten</a:t>
+            </a:r>
+          </a:p>
+          <a:p>
+            <a:pPr>
+              <a:spcAft>
+                <a:spcPts val="1200"/>
+              </a:spcAft>
+              <a:defRPr sz="1500">
+                <a:solidFill>
+                  <a:srgbClr val="333333"/>
+                </a:solidFill>
+              </a:defRPr>
+            </a:pPr>
+          </a:p>
+          <a:p>
+            <a:pPr>
+              <a:spcAft>
+                <a:spcPts val="1200"/>
+              </a:spcAft>
+              <a:defRPr sz="1500">
+                <a:solidFill>
+                  <a:srgbClr val="333333"/>
+                </a:solidFill>
+              </a:defRPr>
+            </a:pPr>
+            <a:r>
+              <a:t>📈 Potensi: +20-30% EBITDA</a:t>
             </a:r>
           </a:p>
         </p:txBody>
@@ -4041,14 +5795,59 @@
       <p:grpSpPr/>
       <p:sp>
         <p:nvSpPr>
-          <p:cNvPr id="2" name="TextBox 1"/>
+          <p:cNvPr id="2" name="Rectangle 1"/>
+          <p:cNvSpPr/>
+          <p:nvPr/>
+        </p:nvSpPr>
+        <p:spPr>
+          <a:xfrm>
+            <a:off x="0" y="0"/>
+            <a:ext cx="9144000" cy="914400"/>
+          </a:xfrm>
+          <a:prstGeom prst="rect">
+            <a:avLst/>
+          </a:prstGeom>
+          <a:solidFill>
+            <a:srgbClr val="003366"/>
+          </a:solidFill>
+          <a:ln>
+            <a:solidFill>
+              <a:srgbClr val="003366"/>
+            </a:solidFill>
+          </a:ln>
+        </p:spPr>
+        <p:style>
+          <a:lnRef idx="1">
+            <a:schemeClr val="accent1"/>
+          </a:lnRef>
+          <a:fillRef idx="3">
+            <a:schemeClr val="accent1"/>
+          </a:fillRef>
+          <a:effectRef idx="2">
+            <a:schemeClr val="accent1"/>
+          </a:effectRef>
+          <a:fontRef idx="minor">
+            <a:schemeClr val="lt1"/>
+          </a:fontRef>
+        </p:style>
+        <p:txBody>
+          <a:bodyPr rtlCol="0" anchor="ctr"/>
+          <a:lstStyle/>
+          <a:p>
+            <a:pPr algn="ctr"/>
+          </a:p>
+        </p:txBody>
+      </p:sp>
+      <p:sp>
+        <p:nvSpPr>
+          <p:cNvPr id="3" name="TextBox 2"/>
           <p:cNvSpPr txBox="1"/>
           <p:nvPr/>
         </p:nvSpPr>
         <p:spPr>
           <a:xfrm>
-            <a:off x="457200" y="457200"/>
-            <a:ext cx="8229600" cy="640080"/>
+            <a:off x="457200" y="228600"/>
+            <a:ext cx="8229600" cy="457200"/>
           </a:xfrm>
           <a:prstGeom prst="rect">
             <a:avLst/>
@@ -4064,26 +5863,26 @@
             <a:pPr>
               <a:defRPr sz="3200" b="1">
                 <a:solidFill>
-                  <a:srgbClr val="003366"/>
-                </a:solidFill>
-              </a:defRPr>
-            </a:pPr>
-            <a:r>
-              <a:t>Apa yang Dimonitor Manajemen?</a:t>
-            </a:r>
-          </a:p>
-        </p:txBody>
-      </p:sp>
-      <p:sp>
-        <p:nvSpPr>
-          <p:cNvPr id="3" name="TextBox 2"/>
+                  <a:srgbClr val="FFFFFF"/>
+                </a:solidFill>
+              </a:defRPr>
+            </a:pPr>
+            <a:r>
+              <a:t>Model Bisnis: Bagaimana PG Menghasilkan Uang?</a:t>
+            </a:r>
+          </a:p>
+        </p:txBody>
+      </p:sp>
+      <p:sp>
+        <p:nvSpPr>
+          <p:cNvPr id="4" name="TextBox 3"/>
           <p:cNvSpPr txBox="1"/>
           <p:nvPr/>
         </p:nvSpPr>
         <p:spPr>
           <a:xfrm>
-            <a:off x="731520" y="1371600"/>
-            <a:ext cx="7772400" cy="5029200"/>
+            <a:off x="457200" y="1371600"/>
+            <a:ext cx="4114800" cy="5029200"/>
           </a:xfrm>
           <a:prstGeom prst="rect">
             <a:avLst/>
@@ -4100,128 +5899,415 @@
               <a:spcAft>
                 <a:spcPts val="1200"/>
               </a:spcAft>
-              <a:defRPr sz="1600"/>
-            </a:pPr>
-            <a:r>
-              <a:t>DAILY MONITORING:</a:t>
-            </a:r>
-          </a:p>
-          <a:p>
-            <a:pPr>
-              <a:spcAft>
-                <a:spcPts val="1200"/>
-              </a:spcAft>
-              <a:defRPr sz="1600"/>
-            </a:pPr>
-            <a:r>
-              <a:t>• Kapasitas giling harian (ton tebu/hari)</a:t>
-            </a:r>
-          </a:p>
-          <a:p>
-            <a:pPr>
-              <a:spcAft>
-                <a:spcPts val="1200"/>
-              </a:spcAft>
-              <a:defRPr sz="1600"/>
-            </a:pPr>
-            <a:r>
-              <a:t>• Rendemen &amp; recovery real-time</a:t>
-            </a:r>
-          </a:p>
-          <a:p>
-            <a:pPr>
-              <a:spcAft>
-                <a:spcPts val="1200"/>
-              </a:spcAft>
-              <a:defRPr sz="1600"/>
-            </a:pPr>
-            <a:r>
-              <a:t>• Downtime &amp; breakdown analysis</a:t>
-            </a:r>
-          </a:p>
-          <a:p>
-            <a:pPr>
-              <a:spcAft>
-                <a:spcPts val="1200"/>
-              </a:spcAft>
-              <a:defRPr sz="1600"/>
-            </a:pPr>
-            <a:r>
-              <a:t>• Stok tebu &amp; antrian tebang angkut</a:t>
-            </a:r>
-          </a:p>
-          <a:p>
-            <a:pPr>
-              <a:spcAft>
-                <a:spcPts val="1200"/>
-              </a:spcAft>
-              <a:defRPr sz="1600"/>
-            </a:pPr>
-          </a:p>
-          <a:p>
-            <a:pPr>
-              <a:spcAft>
-                <a:spcPts val="1200"/>
-              </a:spcAft>
-              <a:defRPr sz="1600"/>
-            </a:pPr>
-            <a:r>
-              <a:t>WEEKLY/MONTHLY MONITORING:</a:t>
-            </a:r>
-          </a:p>
-          <a:p>
-            <a:pPr>
-              <a:spcAft>
-                <a:spcPts val="1200"/>
-              </a:spcAft>
-              <a:defRPr sz="1600"/>
-            </a:pPr>
-            <a:r>
-              <a:t>• Cash flow &amp; working capital</a:t>
-            </a:r>
-          </a:p>
-          <a:p>
-            <a:pPr>
-              <a:spcAft>
-                <a:spcPts val="1200"/>
-              </a:spcAft>
-              <a:defRPr sz="1600"/>
-            </a:pPr>
-            <a:r>
-              <a:t>• Penjualan gula &amp; piutang</a:t>
-            </a:r>
-          </a:p>
-          <a:p>
-            <a:pPr>
-              <a:spcAft>
-                <a:spcPts val="1200"/>
-              </a:spcAft>
-              <a:defRPr sz="1600"/>
-            </a:pPr>
-            <a:r>
-              <a:t>• HPP (Harga Pokok Produksi)</a:t>
-            </a:r>
-          </a:p>
-          <a:p>
-            <a:pPr>
-              <a:spcAft>
-                <a:spcPts val="1200"/>
-              </a:spcAft>
-              <a:defRPr sz="1600"/>
-            </a:pPr>
-            <a:r>
-              <a:t>• Safety incident &amp; K3 compliance</a:t>
-            </a:r>
-          </a:p>
-          <a:p>
-            <a:pPr>
-              <a:spcAft>
-                <a:spcPts val="1200"/>
-              </a:spcAft>
-              <a:defRPr sz="1600"/>
-            </a:pPr>
-            <a:r>
-              <a:t>• Target vs actual production</a:t>
+              <a:defRPr sz="1500">
+                <a:solidFill>
+                  <a:srgbClr val="333333"/>
+                </a:solidFill>
+              </a:defRPr>
+            </a:pPr>
+            <a:r>
+              <a:t>💰 REVENUE STREAMS</a:t>
+            </a:r>
+          </a:p>
+          <a:p>
+            <a:pPr>
+              <a:spcAft>
+                <a:spcPts val="1200"/>
+              </a:spcAft>
+              <a:defRPr sz="1500">
+                <a:solidFill>
+                  <a:srgbClr val="333333"/>
+                </a:solidFill>
+              </a:defRPr>
+            </a:pPr>
+          </a:p>
+          <a:p>
+            <a:pPr>
+              <a:spcAft>
+                <a:spcPts val="1200"/>
+              </a:spcAft>
+              <a:defRPr sz="1500">
+                <a:solidFill>
+                  <a:srgbClr val="333333"/>
+                </a:solidFill>
+              </a:defRPr>
+            </a:pPr>
+            <a:r>
+              <a:t>🍬 Gula (70-80%)</a:t>
+            </a:r>
+          </a:p>
+          <a:p>
+            <a:pPr>
+              <a:spcAft>
+                <a:spcPts val="1200"/>
+              </a:spcAft>
+              <a:defRPr sz="1500">
+                <a:solidFill>
+                  <a:srgbClr val="333333"/>
+                </a:solidFill>
+              </a:defRPr>
+            </a:pPr>
+            <a:r>
+              <a:t>   Rp 12.000-15.000/kg</a:t>
+            </a:r>
+          </a:p>
+          <a:p>
+            <a:pPr>
+              <a:spcAft>
+                <a:spcPts val="1200"/>
+              </a:spcAft>
+              <a:defRPr sz="1500">
+                <a:solidFill>
+                  <a:srgbClr val="333333"/>
+                </a:solidFill>
+              </a:defRPr>
+            </a:pPr>
+          </a:p>
+          <a:p>
+            <a:pPr>
+              <a:spcAft>
+                <a:spcPts val="1200"/>
+              </a:spcAft>
+              <a:defRPr sz="1500">
+                <a:solidFill>
+                  <a:srgbClr val="333333"/>
+                </a:solidFill>
+              </a:defRPr>
+            </a:pPr>
+            <a:r>
+              <a:t>🍯 Molasses (10-15%)</a:t>
+            </a:r>
+          </a:p>
+          <a:p>
+            <a:pPr>
+              <a:spcAft>
+                <a:spcPts val="1200"/>
+              </a:spcAft>
+              <a:defRPr sz="1500">
+                <a:solidFill>
+                  <a:srgbClr val="333333"/>
+                </a:solidFill>
+              </a:defRPr>
+            </a:pPr>
+            <a:r>
+              <a:t>   Rp 1.500-2.500/kg</a:t>
+            </a:r>
+          </a:p>
+          <a:p>
+            <a:pPr>
+              <a:spcAft>
+                <a:spcPts val="1200"/>
+              </a:spcAft>
+              <a:defRPr sz="1500">
+                <a:solidFill>
+                  <a:srgbClr val="333333"/>
+                </a:solidFill>
+              </a:defRPr>
+            </a:pPr>
+          </a:p>
+          <a:p>
+            <a:pPr>
+              <a:spcAft>
+                <a:spcPts val="1200"/>
+              </a:spcAft>
+              <a:defRPr sz="1500">
+                <a:solidFill>
+                  <a:srgbClr val="333333"/>
+                </a:solidFill>
+              </a:defRPr>
+            </a:pPr>
+            <a:r>
+              <a:t>⚡ Listrik co-gen (5-10%)</a:t>
+            </a:r>
+          </a:p>
+          <a:p>
+            <a:pPr>
+              <a:spcAft>
+                <a:spcPts val="1200"/>
+              </a:spcAft>
+              <a:defRPr sz="1500">
+                <a:solidFill>
+                  <a:srgbClr val="333333"/>
+                </a:solidFill>
+              </a:defRPr>
+            </a:pPr>
+            <a:r>
+              <a:t>   Rp 1.000-1.200/kWh</a:t>
+            </a:r>
+          </a:p>
+          <a:p>
+            <a:pPr>
+              <a:spcAft>
+                <a:spcPts val="1200"/>
+              </a:spcAft>
+              <a:defRPr sz="1500">
+                <a:solidFill>
+                  <a:srgbClr val="333333"/>
+                </a:solidFill>
+              </a:defRPr>
+            </a:pPr>
+          </a:p>
+          <a:p>
+            <a:pPr>
+              <a:spcAft>
+                <a:spcPts val="1200"/>
+              </a:spcAft>
+              <a:defRPr sz="1500">
+                <a:solidFill>
+                  <a:srgbClr val="333333"/>
+                </a:solidFill>
+              </a:defRPr>
+            </a:pPr>
+            <a:r>
+              <a:t>🌱 Blotong (2-3%)</a:t>
+            </a:r>
+          </a:p>
+          <a:p>
+            <a:pPr>
+              <a:spcAft>
+                <a:spcPts val="1200"/>
+              </a:spcAft>
+              <a:defRPr sz="1500">
+                <a:solidFill>
+                  <a:srgbClr val="333333"/>
+                </a:solidFill>
+              </a:defRPr>
+            </a:pPr>
+            <a:r>
+              <a:t>   Rp 200-500/kg</a:t>
+            </a:r>
+          </a:p>
+        </p:txBody>
+      </p:sp>
+      <p:sp>
+        <p:nvSpPr>
+          <p:cNvPr id="5" name="TextBox 4"/>
+          <p:cNvSpPr txBox="1"/>
+          <p:nvPr/>
+        </p:nvSpPr>
+        <p:spPr>
+          <a:xfrm>
+            <a:off x="4754880" y="1371600"/>
+            <a:ext cx="4114800" cy="5029200"/>
+          </a:xfrm>
+          <a:prstGeom prst="rect">
+            <a:avLst/>
+          </a:prstGeom>
+          <a:noFill/>
+        </p:spPr>
+        <p:txBody>
+          <a:bodyPr wrap="square">
+            <a:spAutoFit/>
+          </a:bodyPr>
+          <a:lstStyle/>
+          <a:p>
+            <a:pPr>
+              <a:spcAft>
+                <a:spcPts val="1200"/>
+              </a:spcAft>
+              <a:defRPr sz="1500">
+                <a:solidFill>
+                  <a:srgbClr val="333333"/>
+                </a:solidFill>
+              </a:defRPr>
+            </a:pPr>
+            <a:r>
+              <a:t>💸 COST STRUCTURE</a:t>
+            </a:r>
+          </a:p>
+          <a:p>
+            <a:pPr>
+              <a:spcAft>
+                <a:spcPts val="1200"/>
+              </a:spcAft>
+              <a:defRPr sz="1500">
+                <a:solidFill>
+                  <a:srgbClr val="333333"/>
+                </a:solidFill>
+              </a:defRPr>
+            </a:pPr>
+          </a:p>
+          <a:p>
+            <a:pPr>
+              <a:spcAft>
+                <a:spcPts val="1200"/>
+              </a:spcAft>
+              <a:defRPr sz="1500">
+                <a:solidFill>
+                  <a:srgbClr val="333333"/>
+                </a:solidFill>
+              </a:defRPr>
+            </a:pPr>
+            <a:r>
+              <a:t>🌾 Bahan baku tebu</a:t>
+            </a:r>
+          </a:p>
+          <a:p>
+            <a:pPr>
+              <a:spcAft>
+                <a:spcPts val="1200"/>
+              </a:spcAft>
+              <a:defRPr sz="1500">
+                <a:solidFill>
+                  <a:srgbClr val="333333"/>
+                </a:solidFill>
+              </a:defRPr>
+            </a:pPr>
+            <a:r>
+              <a:t>   50-60%</a:t>
+            </a:r>
+          </a:p>
+          <a:p>
+            <a:pPr>
+              <a:spcAft>
+                <a:spcPts val="1200"/>
+              </a:spcAft>
+              <a:defRPr sz="1500">
+                <a:solidFill>
+                  <a:srgbClr val="333333"/>
+                </a:solidFill>
+              </a:defRPr>
+            </a:pPr>
+          </a:p>
+          <a:p>
+            <a:pPr>
+              <a:spcAft>
+                <a:spcPts val="1200"/>
+              </a:spcAft>
+              <a:defRPr sz="1500">
+                <a:solidFill>
+                  <a:srgbClr val="333333"/>
+                </a:solidFill>
+              </a:defRPr>
+            </a:pPr>
+            <a:r>
+              <a:t>⚙️  Operasional &amp; energi</a:t>
+            </a:r>
+          </a:p>
+          <a:p>
+            <a:pPr>
+              <a:spcAft>
+                <a:spcPts val="1200"/>
+              </a:spcAft>
+              <a:defRPr sz="1500">
+                <a:solidFill>
+                  <a:srgbClr val="333333"/>
+                </a:solidFill>
+              </a:defRPr>
+            </a:pPr>
+            <a:r>
+              <a:t>   20-25%</a:t>
+            </a:r>
+          </a:p>
+          <a:p>
+            <a:pPr>
+              <a:spcAft>
+                <a:spcPts val="1200"/>
+              </a:spcAft>
+              <a:defRPr sz="1500">
+                <a:solidFill>
+                  <a:srgbClr val="333333"/>
+                </a:solidFill>
+              </a:defRPr>
+            </a:pPr>
+          </a:p>
+          <a:p>
+            <a:pPr>
+              <a:spcAft>
+                <a:spcPts val="1200"/>
+              </a:spcAft>
+              <a:defRPr sz="1500">
+                <a:solidFill>
+                  <a:srgbClr val="333333"/>
+                </a:solidFill>
+              </a:defRPr>
+            </a:pPr>
+            <a:r>
+              <a:t>👥 SDM &amp; overhead</a:t>
+            </a:r>
+          </a:p>
+          <a:p>
+            <a:pPr>
+              <a:spcAft>
+                <a:spcPts val="1200"/>
+              </a:spcAft>
+              <a:defRPr sz="1500">
+                <a:solidFill>
+                  <a:srgbClr val="333333"/>
+                </a:solidFill>
+              </a:defRPr>
+            </a:pPr>
+            <a:r>
+              <a:t>   10-15%</a:t>
+            </a:r>
+          </a:p>
+          <a:p>
+            <a:pPr>
+              <a:spcAft>
+                <a:spcPts val="1200"/>
+              </a:spcAft>
+              <a:defRPr sz="1500">
+                <a:solidFill>
+                  <a:srgbClr val="333333"/>
+                </a:solidFill>
+              </a:defRPr>
+            </a:pPr>
+          </a:p>
+          <a:p>
+            <a:pPr>
+              <a:spcAft>
+                <a:spcPts val="1200"/>
+              </a:spcAft>
+              <a:defRPr sz="1500">
+                <a:solidFill>
+                  <a:srgbClr val="333333"/>
+                </a:solidFill>
+              </a:defRPr>
+            </a:pPr>
+            <a:r>
+              <a:t>🔧 Maintenance</a:t>
+            </a:r>
+          </a:p>
+          <a:p>
+            <a:pPr>
+              <a:spcAft>
+                <a:spcPts val="1200"/>
+              </a:spcAft>
+              <a:defRPr sz="1500">
+                <a:solidFill>
+                  <a:srgbClr val="333333"/>
+                </a:solidFill>
+              </a:defRPr>
+            </a:pPr>
+            <a:r>
+              <a:t>   5-8%</a:t>
+            </a:r>
+          </a:p>
+          <a:p>
+            <a:pPr>
+              <a:spcAft>
+                <a:spcPts val="1200"/>
+              </a:spcAft>
+              <a:defRPr sz="1500">
+                <a:solidFill>
+                  <a:srgbClr val="333333"/>
+                </a:solidFill>
+              </a:defRPr>
+            </a:pPr>
+          </a:p>
+          <a:p>
+            <a:pPr>
+              <a:spcAft>
+                <a:spcPts val="1200"/>
+              </a:spcAft>
+              <a:defRPr sz="1500">
+                <a:solidFill>
+                  <a:srgbClr val="333333"/>
+                </a:solidFill>
+              </a:defRPr>
+            </a:pPr>
+            <a:r>
+              <a:t>📊 MARGIN EBITDA: 15-25%</a:t>
             </a:r>
           </a:p>
         </p:txBody>
@@ -4246,14 +6332,59 @@
       <p:grpSpPr/>
       <p:sp>
         <p:nvSpPr>
-          <p:cNvPr id="2" name="TextBox 1"/>
+          <p:cNvPr id="2" name="Rectangle 1"/>
+          <p:cNvSpPr/>
+          <p:nvPr/>
+        </p:nvSpPr>
+        <p:spPr>
+          <a:xfrm>
+            <a:off x="0" y="0"/>
+            <a:ext cx="9144000" cy="914400"/>
+          </a:xfrm>
+          <a:prstGeom prst="rect">
+            <a:avLst/>
+          </a:prstGeom>
+          <a:solidFill>
+            <a:srgbClr val="003366"/>
+          </a:solidFill>
+          <a:ln>
+            <a:solidFill>
+              <a:srgbClr val="003366"/>
+            </a:solidFill>
+          </a:ln>
+        </p:spPr>
+        <p:style>
+          <a:lnRef idx="1">
+            <a:schemeClr val="accent1"/>
+          </a:lnRef>
+          <a:fillRef idx="3">
+            <a:schemeClr val="accent1"/>
+          </a:fillRef>
+          <a:effectRef idx="2">
+            <a:schemeClr val="accent1"/>
+          </a:effectRef>
+          <a:fontRef idx="minor">
+            <a:schemeClr val="lt1"/>
+          </a:fontRef>
+        </p:style>
+        <p:txBody>
+          <a:bodyPr rtlCol="0" anchor="ctr"/>
+          <a:lstStyle/>
+          <a:p>
+            <a:pPr algn="ctr"/>
+          </a:p>
+        </p:txBody>
+      </p:sp>
+      <p:sp>
+        <p:nvSpPr>
+          <p:cNvPr id="3" name="TextBox 2"/>
           <p:cNvSpPr txBox="1"/>
           <p:nvPr/>
         </p:nvSpPr>
         <p:spPr>
           <a:xfrm>
-            <a:off x="457200" y="457200"/>
-            <a:ext cx="8229600" cy="640080"/>
+            <a:off x="457200" y="228600"/>
+            <a:ext cx="8229600" cy="457200"/>
           </a:xfrm>
           <a:prstGeom prst="rect">
             <a:avLst/>
@@ -4269,26 +6400,26 @@
             <a:pPr>
               <a:defRPr sz="3200" b="1">
                 <a:solidFill>
-                  <a:srgbClr val="003366"/>
-                </a:solidFill>
-              </a:defRPr>
-            </a:pPr>
-            <a:r>
-              <a:t>Kesimpulan</a:t>
-            </a:r>
-          </a:p>
-        </p:txBody>
-      </p:sp>
-      <p:sp>
-        <p:nvSpPr>
-          <p:cNvPr id="3" name="TextBox 2"/>
+                  <a:srgbClr val="FFFFFF"/>
+                </a:solidFill>
+              </a:defRPr>
+            </a:pPr>
+            <a:r>
+              <a:t>Apa yang Dimonitor Manajemen?</a:t>
+            </a:r>
+          </a:p>
+        </p:txBody>
+      </p:sp>
+      <p:sp>
+        <p:nvSpPr>
+          <p:cNvPr id="4" name="TextBox 3"/>
           <p:cNvSpPr txBox="1"/>
           <p:nvPr/>
         </p:nvSpPr>
         <p:spPr>
           <a:xfrm>
-            <a:off x="731520" y="1371600"/>
-            <a:ext cx="7772400" cy="5029200"/>
+            <a:off x="457200" y="1371600"/>
+            <a:ext cx="4114800" cy="5029200"/>
           </a:xfrm>
           <a:prstGeom prst="rect">
             <a:avLst/>
@@ -4305,87 +6436,415 @@
               <a:spcAft>
                 <a:spcPts val="1200"/>
               </a:spcAft>
-              <a:defRPr sz="1600"/>
-            </a:pPr>
-            <a:r>
-              <a:t>• Pabrik gula = bisnis padat modal, padat karya, musiman</a:t>
-            </a:r>
-          </a:p>
-          <a:p>
-            <a:pPr>
-              <a:spcAft>
-                <a:spcPts val="1200"/>
-              </a:spcAft>
-              <a:defRPr sz="1600"/>
-            </a:pPr>
-            <a:r>
-              <a:t>• Proses produksi: 9 tahapan utama (24-48 jam tebu → gula)</a:t>
-            </a:r>
-          </a:p>
-          <a:p>
-            <a:pPr>
-              <a:spcAft>
-                <a:spcPts val="1200"/>
-              </a:spcAft>
-              <a:defRPr sz="1600"/>
-            </a:pPr>
-            <a:r>
-              <a:t>• Value creation: gula + 4 produk samping (circular economy)</a:t>
-            </a:r>
-          </a:p>
-          <a:p>
-            <a:pPr>
-              <a:spcAft>
-                <a:spcPts val="1200"/>
-              </a:spcAft>
-              <a:defRPr sz="1600"/>
-            </a:pPr>
-            <a:r>
-              <a:t>• Profitabilitas tergantung: rendemen, harga jual, efisiensi</a:t>
-            </a:r>
-          </a:p>
-          <a:p>
-            <a:pPr>
-              <a:spcAft>
-                <a:spcPts val="1200"/>
-              </a:spcAft>
-              <a:defRPr sz="1600"/>
-            </a:pPr>
-            <a:r>
-              <a:t>• Tantangan besar: produktivitas, impor, teknologi</a:t>
-            </a:r>
-          </a:p>
-          <a:p>
-            <a:pPr>
-              <a:spcAft>
-                <a:spcPts val="1200"/>
-              </a:spcAft>
-              <a:defRPr sz="1600"/>
-            </a:pPr>
-            <a:r>
-              <a:t>• Peluang: modernisasi, digitalisasi, diversifikasi produk</a:t>
-            </a:r>
-          </a:p>
-          <a:p>
-            <a:pPr>
-              <a:spcAft>
-                <a:spcPts val="1200"/>
-              </a:spcAft>
-              <a:defRPr sz="1600"/>
-            </a:pPr>
-            <a:r>
-              <a:t>• KPI kritis: rendemen, recovery, kapasitas giling, losses</a:t>
-            </a:r>
-          </a:p>
-          <a:p>
-            <a:pPr>
-              <a:spcAft>
-                <a:spcPts val="1200"/>
-              </a:spcAft>
-              <a:defRPr sz="1600"/>
-            </a:pPr>
-            <a:r>
-              <a:t>• Industri strategis: ketahanan pangan, lapangan kerja, devisa</a:t>
+              <a:defRPr sz="1500">
+                <a:solidFill>
+                  <a:srgbClr val="333333"/>
+                </a:solidFill>
+              </a:defRPr>
+            </a:pPr>
+            <a:r>
+              <a:t>📅 MONITORING HARIAN</a:t>
+            </a:r>
+          </a:p>
+          <a:p>
+            <a:pPr>
+              <a:spcAft>
+                <a:spcPts val="1200"/>
+              </a:spcAft>
+              <a:defRPr sz="1500">
+                <a:solidFill>
+                  <a:srgbClr val="333333"/>
+                </a:solidFill>
+              </a:defRPr>
+            </a:pPr>
+          </a:p>
+          <a:p>
+            <a:pPr>
+              <a:spcAft>
+                <a:spcPts val="1200"/>
+              </a:spcAft>
+              <a:defRPr sz="1500">
+                <a:solidFill>
+                  <a:srgbClr val="333333"/>
+                </a:solidFill>
+              </a:defRPr>
+            </a:pPr>
+            <a:r>
+              <a:t>• Kapasitas giling harian</a:t>
+            </a:r>
+          </a:p>
+          <a:p>
+            <a:pPr>
+              <a:spcAft>
+                <a:spcPts val="1200"/>
+              </a:spcAft>
+              <a:defRPr sz="1500">
+                <a:solidFill>
+                  <a:srgbClr val="333333"/>
+                </a:solidFill>
+              </a:defRPr>
+            </a:pPr>
+            <a:r>
+              <a:t>  (ton tebu/hari)</a:t>
+            </a:r>
+          </a:p>
+          <a:p>
+            <a:pPr>
+              <a:spcAft>
+                <a:spcPts val="1200"/>
+              </a:spcAft>
+              <a:defRPr sz="1500">
+                <a:solidFill>
+                  <a:srgbClr val="333333"/>
+                </a:solidFill>
+              </a:defRPr>
+            </a:pPr>
+          </a:p>
+          <a:p>
+            <a:pPr>
+              <a:spcAft>
+                <a:spcPts val="1200"/>
+              </a:spcAft>
+              <a:defRPr sz="1500">
+                <a:solidFill>
+                  <a:srgbClr val="333333"/>
+                </a:solidFill>
+              </a:defRPr>
+            </a:pPr>
+            <a:r>
+              <a:t>• Rendemen &amp; recovery</a:t>
+            </a:r>
+          </a:p>
+          <a:p>
+            <a:pPr>
+              <a:spcAft>
+                <a:spcPts val="1200"/>
+              </a:spcAft>
+              <a:defRPr sz="1500">
+                <a:solidFill>
+                  <a:srgbClr val="333333"/>
+                </a:solidFill>
+              </a:defRPr>
+            </a:pPr>
+            <a:r>
+              <a:t>  real-time</a:t>
+            </a:r>
+          </a:p>
+          <a:p>
+            <a:pPr>
+              <a:spcAft>
+                <a:spcPts val="1200"/>
+              </a:spcAft>
+              <a:defRPr sz="1500">
+                <a:solidFill>
+                  <a:srgbClr val="333333"/>
+                </a:solidFill>
+              </a:defRPr>
+            </a:pPr>
+          </a:p>
+          <a:p>
+            <a:pPr>
+              <a:spcAft>
+                <a:spcPts val="1200"/>
+              </a:spcAft>
+              <a:defRPr sz="1500">
+                <a:solidFill>
+                  <a:srgbClr val="333333"/>
+                </a:solidFill>
+              </a:defRPr>
+            </a:pPr>
+            <a:r>
+              <a:t>• Downtime &amp; breakdown</a:t>
+            </a:r>
+          </a:p>
+          <a:p>
+            <a:pPr>
+              <a:spcAft>
+                <a:spcPts val="1200"/>
+              </a:spcAft>
+              <a:defRPr sz="1500">
+                <a:solidFill>
+                  <a:srgbClr val="333333"/>
+                </a:solidFill>
+              </a:defRPr>
+            </a:pPr>
+            <a:r>
+              <a:t>  analysis</a:t>
+            </a:r>
+          </a:p>
+          <a:p>
+            <a:pPr>
+              <a:spcAft>
+                <a:spcPts val="1200"/>
+              </a:spcAft>
+              <a:defRPr sz="1500">
+                <a:solidFill>
+                  <a:srgbClr val="333333"/>
+                </a:solidFill>
+              </a:defRPr>
+            </a:pPr>
+          </a:p>
+          <a:p>
+            <a:pPr>
+              <a:spcAft>
+                <a:spcPts val="1200"/>
+              </a:spcAft>
+              <a:defRPr sz="1500">
+                <a:solidFill>
+                  <a:srgbClr val="333333"/>
+                </a:solidFill>
+              </a:defRPr>
+            </a:pPr>
+            <a:r>
+              <a:t>• Stok tebu &amp; antrian</a:t>
+            </a:r>
+          </a:p>
+          <a:p>
+            <a:pPr>
+              <a:spcAft>
+                <a:spcPts val="1200"/>
+              </a:spcAft>
+              <a:defRPr sz="1500">
+                <a:solidFill>
+                  <a:srgbClr val="333333"/>
+                </a:solidFill>
+              </a:defRPr>
+            </a:pPr>
+            <a:r>
+              <a:t>  tebang angkut</a:t>
+            </a:r>
+          </a:p>
+        </p:txBody>
+      </p:sp>
+      <p:sp>
+        <p:nvSpPr>
+          <p:cNvPr id="5" name="TextBox 4"/>
+          <p:cNvSpPr txBox="1"/>
+          <p:nvPr/>
+        </p:nvSpPr>
+        <p:spPr>
+          <a:xfrm>
+            <a:off x="4754880" y="1371600"/>
+            <a:ext cx="4114800" cy="5029200"/>
+          </a:xfrm>
+          <a:prstGeom prst="rect">
+            <a:avLst/>
+          </a:prstGeom>
+          <a:noFill/>
+        </p:spPr>
+        <p:txBody>
+          <a:bodyPr wrap="square">
+            <a:spAutoFit/>
+          </a:bodyPr>
+          <a:lstStyle/>
+          <a:p>
+            <a:pPr>
+              <a:spcAft>
+                <a:spcPts val="1200"/>
+              </a:spcAft>
+              <a:defRPr sz="1500">
+                <a:solidFill>
+                  <a:srgbClr val="333333"/>
+                </a:solidFill>
+              </a:defRPr>
+            </a:pPr>
+            <a:r>
+              <a:t>📊 MONITORING MINGGUAN/</a:t>
+            </a:r>
+          </a:p>
+          <a:p>
+            <a:pPr>
+              <a:spcAft>
+                <a:spcPts val="1200"/>
+              </a:spcAft>
+              <a:defRPr sz="1500">
+                <a:solidFill>
+                  <a:srgbClr val="333333"/>
+                </a:solidFill>
+              </a:defRPr>
+            </a:pPr>
+            <a:r>
+              <a:t>    BULANAN</a:t>
+            </a:r>
+          </a:p>
+          <a:p>
+            <a:pPr>
+              <a:spcAft>
+                <a:spcPts val="1200"/>
+              </a:spcAft>
+              <a:defRPr sz="1500">
+                <a:solidFill>
+                  <a:srgbClr val="333333"/>
+                </a:solidFill>
+              </a:defRPr>
+            </a:pPr>
+          </a:p>
+          <a:p>
+            <a:pPr>
+              <a:spcAft>
+                <a:spcPts val="1200"/>
+              </a:spcAft>
+              <a:defRPr sz="1500">
+                <a:solidFill>
+                  <a:srgbClr val="333333"/>
+                </a:solidFill>
+              </a:defRPr>
+            </a:pPr>
+            <a:r>
+              <a:t>• Cash flow &amp; working</a:t>
+            </a:r>
+          </a:p>
+          <a:p>
+            <a:pPr>
+              <a:spcAft>
+                <a:spcPts val="1200"/>
+              </a:spcAft>
+              <a:defRPr sz="1500">
+                <a:solidFill>
+                  <a:srgbClr val="333333"/>
+                </a:solidFill>
+              </a:defRPr>
+            </a:pPr>
+            <a:r>
+              <a:t>  capital</a:t>
+            </a:r>
+          </a:p>
+          <a:p>
+            <a:pPr>
+              <a:spcAft>
+                <a:spcPts val="1200"/>
+              </a:spcAft>
+              <a:defRPr sz="1500">
+                <a:solidFill>
+                  <a:srgbClr val="333333"/>
+                </a:solidFill>
+              </a:defRPr>
+            </a:pPr>
+          </a:p>
+          <a:p>
+            <a:pPr>
+              <a:spcAft>
+                <a:spcPts val="1200"/>
+              </a:spcAft>
+              <a:defRPr sz="1500">
+                <a:solidFill>
+                  <a:srgbClr val="333333"/>
+                </a:solidFill>
+              </a:defRPr>
+            </a:pPr>
+            <a:r>
+              <a:t>• Penjualan gula &amp; piutang</a:t>
+            </a:r>
+          </a:p>
+          <a:p>
+            <a:pPr>
+              <a:spcAft>
+                <a:spcPts val="1200"/>
+              </a:spcAft>
+              <a:defRPr sz="1500">
+                <a:solidFill>
+                  <a:srgbClr val="333333"/>
+                </a:solidFill>
+              </a:defRPr>
+            </a:pPr>
+          </a:p>
+          <a:p>
+            <a:pPr>
+              <a:spcAft>
+                <a:spcPts val="1200"/>
+              </a:spcAft>
+              <a:defRPr sz="1500">
+                <a:solidFill>
+                  <a:srgbClr val="333333"/>
+                </a:solidFill>
+              </a:defRPr>
+            </a:pPr>
+            <a:r>
+              <a:t>• HPP (Harga Pokok</a:t>
+            </a:r>
+          </a:p>
+          <a:p>
+            <a:pPr>
+              <a:spcAft>
+                <a:spcPts val="1200"/>
+              </a:spcAft>
+              <a:defRPr sz="1500">
+                <a:solidFill>
+                  <a:srgbClr val="333333"/>
+                </a:solidFill>
+              </a:defRPr>
+            </a:pPr>
+            <a:r>
+              <a:t>  Produksi)</a:t>
+            </a:r>
+          </a:p>
+          <a:p>
+            <a:pPr>
+              <a:spcAft>
+                <a:spcPts val="1200"/>
+              </a:spcAft>
+              <a:defRPr sz="1500">
+                <a:solidFill>
+                  <a:srgbClr val="333333"/>
+                </a:solidFill>
+              </a:defRPr>
+            </a:pPr>
+          </a:p>
+          <a:p>
+            <a:pPr>
+              <a:spcAft>
+                <a:spcPts val="1200"/>
+              </a:spcAft>
+              <a:defRPr sz="1500">
+                <a:solidFill>
+                  <a:srgbClr val="333333"/>
+                </a:solidFill>
+              </a:defRPr>
+            </a:pPr>
+            <a:r>
+              <a:t>• Safety incident &amp; K3</a:t>
+            </a:r>
+          </a:p>
+          <a:p>
+            <a:pPr>
+              <a:spcAft>
+                <a:spcPts val="1200"/>
+              </a:spcAft>
+              <a:defRPr sz="1500">
+                <a:solidFill>
+                  <a:srgbClr val="333333"/>
+                </a:solidFill>
+              </a:defRPr>
+            </a:pPr>
+          </a:p>
+          <a:p>
+            <a:pPr>
+              <a:spcAft>
+                <a:spcPts val="1200"/>
+              </a:spcAft>
+              <a:defRPr sz="1500">
+                <a:solidFill>
+                  <a:srgbClr val="333333"/>
+                </a:solidFill>
+              </a:defRPr>
+            </a:pPr>
+            <a:r>
+              <a:t>• Target vs actual</a:t>
+            </a:r>
+          </a:p>
+          <a:p>
+            <a:pPr>
+              <a:spcAft>
+                <a:spcPts val="1200"/>
+              </a:spcAft>
+              <a:defRPr sz="1500">
+                <a:solidFill>
+                  <a:srgbClr val="333333"/>
+                </a:solidFill>
+              </a:defRPr>
+            </a:pPr>
+            <a:r>
+              <a:t>  production</a:t>
             </a:r>
           </a:p>
         </p:txBody>
@@ -4410,14 +6869,59 @@
       <p:grpSpPr/>
       <p:sp>
         <p:nvSpPr>
-          <p:cNvPr id="2" name="TextBox 1"/>
+          <p:cNvPr id="2" name="Rectangle 1"/>
+          <p:cNvSpPr/>
+          <p:nvPr/>
+        </p:nvSpPr>
+        <p:spPr>
+          <a:xfrm>
+            <a:off x="0" y="0"/>
+            <a:ext cx="9144000" cy="914400"/>
+          </a:xfrm>
+          <a:prstGeom prst="rect">
+            <a:avLst/>
+          </a:prstGeom>
+          <a:solidFill>
+            <a:srgbClr val="003366"/>
+          </a:solidFill>
+          <a:ln>
+            <a:solidFill>
+              <a:srgbClr val="003366"/>
+            </a:solidFill>
+          </a:ln>
+        </p:spPr>
+        <p:style>
+          <a:lnRef idx="1">
+            <a:schemeClr val="accent1"/>
+          </a:lnRef>
+          <a:fillRef idx="3">
+            <a:schemeClr val="accent1"/>
+          </a:fillRef>
+          <a:effectRef idx="2">
+            <a:schemeClr val="accent1"/>
+          </a:effectRef>
+          <a:fontRef idx="minor">
+            <a:schemeClr val="lt1"/>
+          </a:fontRef>
+        </p:style>
+        <p:txBody>
+          <a:bodyPr rtlCol="0" anchor="ctr"/>
+          <a:lstStyle/>
+          <a:p>
+            <a:pPr algn="ctr"/>
+          </a:p>
+        </p:txBody>
+      </p:sp>
+      <p:sp>
+        <p:nvSpPr>
+          <p:cNvPr id="3" name="TextBox 2"/>
           <p:cNvSpPr txBox="1"/>
           <p:nvPr/>
         </p:nvSpPr>
         <p:spPr>
           <a:xfrm>
-            <a:off x="914400" y="2286000"/>
-            <a:ext cx="7315200" cy="914400"/>
+            <a:off x="457200" y="228600"/>
+            <a:ext cx="8229600" cy="457200"/>
           </a:xfrm>
           <a:prstGeom prst="rect">
             <a:avLst/>
@@ -4430,29 +6934,29 @@
           </a:bodyPr>
           <a:lstStyle/>
           <a:p>
-            <a:pPr algn="ctr">
-              <a:defRPr sz="4400" b="1">
-                <a:solidFill>
-                  <a:srgbClr val="003366"/>
-                </a:solidFill>
-              </a:defRPr>
-            </a:pPr>
-            <a:r>
-              <a:t>TERIMA KASIH</a:t>
-            </a:r>
-          </a:p>
-        </p:txBody>
-      </p:sp>
-      <p:sp>
-        <p:nvSpPr>
-          <p:cNvPr id="3" name="TextBox 2"/>
+            <a:pPr>
+              <a:defRPr sz="3200" b="1">
+                <a:solidFill>
+                  <a:srgbClr val="FFFFFF"/>
+                </a:solidFill>
+              </a:defRPr>
+            </a:pPr>
+            <a:r>
+              <a:t>Kesimpulan</a:t>
+            </a:r>
+          </a:p>
+        </p:txBody>
+      </p:sp>
+      <p:sp>
+        <p:nvSpPr>
+          <p:cNvPr id="4" name="TextBox 3"/>
           <p:cNvSpPr txBox="1"/>
           <p:nvPr/>
         </p:nvSpPr>
         <p:spPr>
           <a:xfrm>
-            <a:off x="914400" y="3474720"/>
-            <a:ext cx="7315200" cy="731520"/>
+            <a:off x="731520" y="1371600"/>
+            <a:ext cx="7772400" cy="5029200"/>
           </a:xfrm>
           <a:prstGeom prst="rect">
             <a:avLst/>
@@ -4460,15 +6964,340 @@
           <a:noFill/>
         </p:spPr>
         <p:txBody>
+          <a:bodyPr wrap="square">
+            <a:spAutoFit/>
+          </a:bodyPr>
+          <a:lstStyle/>
+          <a:p>
+            <a:pPr>
+              <a:spcAft>
+                <a:spcPts val="1400"/>
+              </a:spcAft>
+              <a:defRPr sz="1600">
+                <a:solidFill>
+                  <a:srgbClr val="333333"/>
+                </a:solidFill>
+              </a:defRPr>
+            </a:pPr>
+            <a:r>
+              <a:t>✅ Pabrik gula = bisnis padat modal, padat karya, musiman</a:t>
+            </a:r>
+          </a:p>
+          <a:p>
+            <a:pPr>
+              <a:spcAft>
+                <a:spcPts val="1400"/>
+              </a:spcAft>
+              <a:defRPr sz="1600">
+                <a:solidFill>
+                  <a:srgbClr val="333333"/>
+                </a:solidFill>
+              </a:defRPr>
+            </a:pPr>
+          </a:p>
+          <a:p>
+            <a:pPr>
+              <a:spcAft>
+                <a:spcPts val="1400"/>
+              </a:spcAft>
+              <a:defRPr sz="1600">
+                <a:solidFill>
+                  <a:srgbClr val="333333"/>
+                </a:solidFill>
+              </a:defRPr>
+            </a:pPr>
+            <a:r>
+              <a:t>✅ Proses produksi: 9 tahapan (24-48 jam tebu → gula)</a:t>
+            </a:r>
+          </a:p>
+          <a:p>
+            <a:pPr>
+              <a:spcAft>
+                <a:spcPts val="1400"/>
+              </a:spcAft>
+              <a:defRPr sz="1600">
+                <a:solidFill>
+                  <a:srgbClr val="333333"/>
+                </a:solidFill>
+              </a:defRPr>
+            </a:pPr>
+          </a:p>
+          <a:p>
+            <a:pPr>
+              <a:spcAft>
+                <a:spcPts val="1400"/>
+              </a:spcAft>
+              <a:defRPr sz="1600">
+                <a:solidFill>
+                  <a:srgbClr val="333333"/>
+                </a:solidFill>
+              </a:defRPr>
+            </a:pPr>
+            <a:r>
+              <a:t>✅ Value creation: gula + 4 produk samping (circular economy)</a:t>
+            </a:r>
+          </a:p>
+          <a:p>
+            <a:pPr>
+              <a:spcAft>
+                <a:spcPts val="1400"/>
+              </a:spcAft>
+              <a:defRPr sz="1600">
+                <a:solidFill>
+                  <a:srgbClr val="333333"/>
+                </a:solidFill>
+              </a:defRPr>
+            </a:pPr>
+          </a:p>
+          <a:p>
+            <a:pPr>
+              <a:spcAft>
+                <a:spcPts val="1400"/>
+              </a:spcAft>
+              <a:defRPr sz="1600">
+                <a:solidFill>
+                  <a:srgbClr val="333333"/>
+                </a:solidFill>
+              </a:defRPr>
+            </a:pPr>
+            <a:r>
+              <a:t>✅ Profitabilitas: rendemen, harga jual, efisiensi operasional</a:t>
+            </a:r>
+          </a:p>
+          <a:p>
+            <a:pPr>
+              <a:spcAft>
+                <a:spcPts val="1400"/>
+              </a:spcAft>
+              <a:defRPr sz="1600">
+                <a:solidFill>
+                  <a:srgbClr val="333333"/>
+                </a:solidFill>
+              </a:defRPr>
+            </a:pPr>
+          </a:p>
+          <a:p>
+            <a:pPr>
+              <a:spcAft>
+                <a:spcPts val="1400"/>
+              </a:spcAft>
+              <a:defRPr sz="1600">
+                <a:solidFill>
+                  <a:srgbClr val="333333"/>
+                </a:solidFill>
+              </a:defRPr>
+            </a:pPr>
+            <a:r>
+              <a:t>✅ Tantangan: produktivitas, impor, teknologi tua</a:t>
+            </a:r>
+          </a:p>
+          <a:p>
+            <a:pPr>
+              <a:spcAft>
+                <a:spcPts val="1400"/>
+              </a:spcAft>
+              <a:defRPr sz="1600">
+                <a:solidFill>
+                  <a:srgbClr val="333333"/>
+                </a:solidFill>
+              </a:defRPr>
+            </a:pPr>
+          </a:p>
+          <a:p>
+            <a:pPr>
+              <a:spcAft>
+                <a:spcPts val="1400"/>
+              </a:spcAft>
+              <a:defRPr sz="1600">
+                <a:solidFill>
+                  <a:srgbClr val="333333"/>
+                </a:solidFill>
+              </a:defRPr>
+            </a:pPr>
+            <a:r>
+              <a:t>✅ Peluang: modernisasi, digitalisasi, diversifikasi produk</a:t>
+            </a:r>
+          </a:p>
+          <a:p>
+            <a:pPr>
+              <a:spcAft>
+                <a:spcPts val="1400"/>
+              </a:spcAft>
+              <a:defRPr sz="1600">
+                <a:solidFill>
+                  <a:srgbClr val="333333"/>
+                </a:solidFill>
+              </a:defRPr>
+            </a:pPr>
+          </a:p>
+          <a:p>
+            <a:pPr>
+              <a:spcAft>
+                <a:spcPts val="1400"/>
+              </a:spcAft>
+              <a:defRPr sz="1600">
+                <a:solidFill>
+                  <a:srgbClr val="333333"/>
+                </a:solidFill>
+              </a:defRPr>
+            </a:pPr>
+            <a:r>
+              <a:t>✅ KPI kritis: rendemen, recovery, kapasitas giling, losses</a:t>
+            </a:r>
+          </a:p>
+          <a:p>
+            <a:pPr>
+              <a:spcAft>
+                <a:spcPts val="1400"/>
+              </a:spcAft>
+              <a:defRPr sz="1600">
+                <a:solidFill>
+                  <a:srgbClr val="333333"/>
+                </a:solidFill>
+              </a:defRPr>
+            </a:pPr>
+          </a:p>
+          <a:p>
+            <a:pPr>
+              <a:spcAft>
+                <a:spcPts val="1400"/>
+              </a:spcAft>
+              <a:defRPr sz="1600">
+                <a:solidFill>
+                  <a:srgbClr val="333333"/>
+                </a:solidFill>
+              </a:defRPr>
+            </a:pPr>
+            <a:r>
+              <a:t>✅ Industri strategis: ketahanan pangan, lapangan kerja, devisa</a:t>
+            </a:r>
+          </a:p>
+        </p:txBody>
+      </p:sp>
+    </p:spTree>
+  </p:cSld>
+  <p:clrMapOvr>
+    <a:masterClrMapping/>
+  </p:clrMapOvr>
+</p:sld>
+</file>
+
+<file path=ppt/slides/slide18.xml><?xml version="1.0" encoding="utf-8"?>
+<p:sld xmlns:a="http://schemas.openxmlformats.org/drawingml/2006/main" xmlns:p="http://schemas.openxmlformats.org/presentationml/2006/main" xmlns:r="http://schemas.openxmlformats.org/officeDocument/2006/relationships">
+  <p:cSld>
+    <p:spTree>
+      <p:nvGrpSpPr>
+        <p:cNvPr id="1" name=""/>
+        <p:cNvGrpSpPr/>
+        <p:nvPr/>
+      </p:nvGrpSpPr>
+      <p:grpSpPr/>
+      <p:sp>
+        <p:nvSpPr>
+          <p:cNvPr id="2" name="Rectangle 1"/>
+          <p:cNvSpPr/>
+          <p:nvPr/>
+        </p:nvSpPr>
+        <p:spPr>
+          <a:xfrm>
+            <a:off x="0" y="0"/>
+            <a:ext cx="9144000" cy="6858000"/>
+          </a:xfrm>
+          <a:prstGeom prst="rect">
+            <a:avLst/>
+          </a:prstGeom>
+          <a:solidFill>
+            <a:srgbClr val="003366"/>
+          </a:solidFill>
+          <a:ln>
+            <a:solidFill>
+              <a:srgbClr val="003366"/>
+            </a:solidFill>
+          </a:ln>
+        </p:spPr>
+        <p:style>
+          <a:lnRef idx="1">
+            <a:schemeClr val="accent1"/>
+          </a:lnRef>
+          <a:fillRef idx="3">
+            <a:schemeClr val="accent1"/>
+          </a:fillRef>
+          <a:effectRef idx="2">
+            <a:schemeClr val="accent1"/>
+          </a:effectRef>
+          <a:fontRef idx="minor">
+            <a:schemeClr val="lt1"/>
+          </a:fontRef>
+        </p:style>
+        <p:txBody>
+          <a:bodyPr rtlCol="0" anchor="ctr"/>
+          <a:lstStyle/>
+          <a:p>
+            <a:pPr algn="ctr"/>
+          </a:p>
+        </p:txBody>
+      </p:sp>
+      <p:sp>
+        <p:nvSpPr>
+          <p:cNvPr id="3" name="TextBox 2"/>
+          <p:cNvSpPr txBox="1"/>
+          <p:nvPr/>
+        </p:nvSpPr>
+        <p:spPr>
+          <a:xfrm>
+            <a:off x="914400" y="2286000"/>
+            <a:ext cx="7315200" cy="1097280"/>
+          </a:xfrm>
+          <a:prstGeom prst="rect">
+            <a:avLst/>
+          </a:prstGeom>
+          <a:noFill/>
+        </p:spPr>
+        <p:txBody>
           <a:bodyPr wrap="none">
             <a:spAutoFit/>
           </a:bodyPr>
           <a:lstStyle/>
           <a:p>
             <a:pPr algn="ctr">
-              <a:defRPr sz="2000">
-                <a:solidFill>
-                  <a:srgbClr val="595959"/>
+              <a:defRPr sz="4800" b="1">
+                <a:solidFill>
+                  <a:srgbClr val="FFFFFF"/>
+                </a:solidFill>
+              </a:defRPr>
+            </a:pPr>
+            <a:r>
+              <a:t>TERIMA KASIH</a:t>
+            </a:r>
+          </a:p>
+        </p:txBody>
+      </p:sp>
+      <p:sp>
+        <p:nvSpPr>
+          <p:cNvPr id="4" name="TextBox 3"/>
+          <p:cNvSpPr txBox="1"/>
+          <p:nvPr/>
+        </p:nvSpPr>
+        <p:spPr>
+          <a:xfrm>
+            <a:off x="914400" y="3657600"/>
+            <a:ext cx="7315200" cy="731520"/>
+          </a:xfrm>
+          <a:prstGeom prst="rect">
+            <a:avLst/>
+          </a:prstGeom>
+          <a:noFill/>
+        </p:spPr>
+        <p:txBody>
+          <a:bodyPr wrap="none">
+            <a:spAutoFit/>
+          </a:bodyPr>
+          <a:lstStyle/>
+          <a:p>
+            <a:pPr algn="ctr">
+              <a:defRPr sz="2400">
+                <a:solidFill>
+                  <a:srgbClr val="C8DCFF"/>
                 </a:solidFill>
               </a:defRPr>
             </a:pPr>
@@ -4498,14 +7327,59 @@
       <p:grpSpPr/>
       <p:sp>
         <p:nvSpPr>
-          <p:cNvPr id="2" name="TextBox 1"/>
+          <p:cNvPr id="2" name="Rectangle 1"/>
+          <p:cNvSpPr/>
+          <p:nvPr/>
+        </p:nvSpPr>
+        <p:spPr>
+          <a:xfrm>
+            <a:off x="0" y="0"/>
+            <a:ext cx="9144000" cy="914400"/>
+          </a:xfrm>
+          <a:prstGeom prst="rect">
+            <a:avLst/>
+          </a:prstGeom>
+          <a:solidFill>
+            <a:srgbClr val="003366"/>
+          </a:solidFill>
+          <a:ln>
+            <a:solidFill>
+              <a:srgbClr val="003366"/>
+            </a:solidFill>
+          </a:ln>
+        </p:spPr>
+        <p:style>
+          <a:lnRef idx="1">
+            <a:schemeClr val="accent1"/>
+          </a:lnRef>
+          <a:fillRef idx="3">
+            <a:schemeClr val="accent1"/>
+          </a:fillRef>
+          <a:effectRef idx="2">
+            <a:schemeClr val="accent1"/>
+          </a:effectRef>
+          <a:fontRef idx="minor">
+            <a:schemeClr val="lt1"/>
+          </a:fontRef>
+        </p:style>
+        <p:txBody>
+          <a:bodyPr rtlCol="0" anchor="ctr"/>
+          <a:lstStyle/>
+          <a:p>
+            <a:pPr algn="ctr"/>
+          </a:p>
+        </p:txBody>
+      </p:sp>
+      <p:sp>
+        <p:nvSpPr>
+          <p:cNvPr id="3" name="TextBox 2"/>
           <p:cNvSpPr txBox="1"/>
           <p:nvPr/>
         </p:nvSpPr>
         <p:spPr>
           <a:xfrm>
-            <a:off x="457200" y="457200"/>
-            <a:ext cx="8229600" cy="640080"/>
+            <a:off x="457200" y="228600"/>
+            <a:ext cx="8229600" cy="457200"/>
           </a:xfrm>
           <a:prstGeom prst="rect">
             <a:avLst/>
@@ -4521,7 +7395,7 @@
             <a:pPr>
               <a:defRPr sz="3200" b="1">
                 <a:solidFill>
-                  <a:srgbClr val="003366"/>
+                  <a:srgbClr val="FFFFFF"/>
                 </a:solidFill>
               </a:defRPr>
             </a:pPr>
@@ -4533,7 +7407,7 @@
       </p:sp>
       <p:sp>
         <p:nvSpPr>
-          <p:cNvPr id="3" name="TextBox 2"/>
+          <p:cNvPr id="4" name="TextBox 3"/>
           <p:cNvSpPr txBox="1"/>
           <p:nvPr/>
         </p:nvSpPr>
@@ -4555,67 +7429,91 @@
           <a:p>
             <a:pPr>
               <a:spcAft>
-                <a:spcPts val="1200"/>
-              </a:spcAft>
-              <a:defRPr sz="1600"/>
-            </a:pPr>
-            <a:r>
-              <a:t>• Indonesia: produsen gula terbesar ke-10 dunia</a:t>
-            </a:r>
-          </a:p>
-          <a:p>
-            <a:pPr>
-              <a:spcAft>
-                <a:spcPts val="1200"/>
-              </a:spcAft>
-              <a:defRPr sz="1600"/>
-            </a:pPr>
-            <a:r>
-              <a:t>• Produksi nasional: ±2,2 juta ton/tahun</a:t>
-            </a:r>
-          </a:p>
-          <a:p>
-            <a:pPr>
-              <a:spcAft>
-                <a:spcPts val="1200"/>
-              </a:spcAft>
-              <a:defRPr sz="1600"/>
-            </a:pPr>
-            <a:r>
-              <a:t>• Kebutuhan nasional: ±5-6 juta ton/tahun (impor ±50%)</a:t>
-            </a:r>
-          </a:p>
-          <a:p>
-            <a:pPr>
-              <a:spcAft>
-                <a:spcPts val="1200"/>
-              </a:spcAft>
-              <a:defRPr sz="1600"/>
-            </a:pPr>
-            <a:r>
-              <a:t>• Pabrik gula aktif: ±60 unit (BUMN, swasta, rakyat)</a:t>
-            </a:r>
-          </a:p>
-          <a:p>
-            <a:pPr>
-              <a:spcAft>
-                <a:spcPts val="1200"/>
-              </a:spcAft>
-              <a:defRPr sz="1600"/>
-            </a:pPr>
-            <a:r>
-              <a:t>• Musim giling: April - November (±6-7 bulan)</a:t>
-            </a:r>
-          </a:p>
-          <a:p>
-            <a:pPr>
-              <a:spcAft>
-                <a:spcPts val="1200"/>
-              </a:spcAft>
-              <a:defRPr sz="1600"/>
-            </a:pPr>
-            <a:r>
-              <a:t>• Kontribusi: lapangan kerja, devisa, gula strategis nasional</a:t>
+                <a:spcPts val="1400"/>
+              </a:spcAft>
+              <a:defRPr sz="1600">
+                <a:solidFill>
+                  <a:srgbClr val="333333"/>
+                </a:solidFill>
+              </a:defRPr>
+            </a:pPr>
+            <a:r>
+              <a:t>🏭 Indonesia: produsen gula terbesar ke-10 dunia</a:t>
+            </a:r>
+          </a:p>
+          <a:p>
+            <a:pPr>
+              <a:spcAft>
+                <a:spcPts val="1400"/>
+              </a:spcAft>
+              <a:defRPr sz="1600">
+                <a:solidFill>
+                  <a:srgbClr val="333333"/>
+                </a:solidFill>
+              </a:defRPr>
+            </a:pPr>
+            <a:r>
+              <a:t>📊 Produksi nasional: ±2,2 juta ton/tahun</a:t>
+            </a:r>
+          </a:p>
+          <a:p>
+            <a:pPr>
+              <a:spcAft>
+                <a:spcPts val="1400"/>
+              </a:spcAft>
+              <a:defRPr sz="1600">
+                <a:solidFill>
+                  <a:srgbClr val="333333"/>
+                </a:solidFill>
+              </a:defRPr>
+            </a:pPr>
+            <a:r>
+              <a:t>📈 Kebutuhan nasional: ±5-6 juta ton/tahun (impor ±50%)</a:t>
+            </a:r>
+          </a:p>
+          <a:p>
+            <a:pPr>
+              <a:spcAft>
+                <a:spcPts val="1400"/>
+              </a:spcAft>
+              <a:defRPr sz="1600">
+                <a:solidFill>
+                  <a:srgbClr val="333333"/>
+                </a:solidFill>
+              </a:defRPr>
+            </a:pPr>
+            <a:r>
+              <a:t>🏢 Pabrik gula aktif: ±60 unit (BUMN, swasta, rakyat)</a:t>
+            </a:r>
+          </a:p>
+          <a:p>
+            <a:pPr>
+              <a:spcAft>
+                <a:spcPts val="1400"/>
+              </a:spcAft>
+              <a:defRPr sz="1600">
+                <a:solidFill>
+                  <a:srgbClr val="333333"/>
+                </a:solidFill>
+              </a:defRPr>
+            </a:pPr>
+            <a:r>
+              <a:t>📅 Musim giling: April - November (±6-7 bulan)</a:t>
+            </a:r>
+          </a:p>
+          <a:p>
+            <a:pPr>
+              <a:spcAft>
+                <a:spcPts val="1400"/>
+              </a:spcAft>
+              <a:defRPr sz="1600">
+                <a:solidFill>
+                  <a:srgbClr val="333333"/>
+                </a:solidFill>
+              </a:defRPr>
+            </a:pPr>
+            <a:r>
+              <a:t>💼 Kontribusi: lapangan kerja, devisa, komoditas strategis</a:t>
             </a:r>
           </a:p>
         </p:txBody>
@@ -4640,14 +7538,59 @@
       <p:grpSpPr/>
       <p:sp>
         <p:nvSpPr>
-          <p:cNvPr id="2" name="TextBox 1"/>
+          <p:cNvPr id="2" name="Rectangle 1"/>
+          <p:cNvSpPr/>
+          <p:nvPr/>
+        </p:nvSpPr>
+        <p:spPr>
+          <a:xfrm>
+            <a:off x="0" y="0"/>
+            <a:ext cx="9144000" cy="914400"/>
+          </a:xfrm>
+          <a:prstGeom prst="rect">
+            <a:avLst/>
+          </a:prstGeom>
+          <a:solidFill>
+            <a:srgbClr val="003366"/>
+          </a:solidFill>
+          <a:ln>
+            <a:solidFill>
+              <a:srgbClr val="003366"/>
+            </a:solidFill>
+          </a:ln>
+        </p:spPr>
+        <p:style>
+          <a:lnRef idx="1">
+            <a:schemeClr val="accent1"/>
+          </a:lnRef>
+          <a:fillRef idx="3">
+            <a:schemeClr val="accent1"/>
+          </a:fillRef>
+          <a:effectRef idx="2">
+            <a:schemeClr val="accent1"/>
+          </a:effectRef>
+          <a:fontRef idx="minor">
+            <a:schemeClr val="lt1"/>
+          </a:fontRef>
+        </p:style>
+        <p:txBody>
+          <a:bodyPr rtlCol="0" anchor="ctr"/>
+          <a:lstStyle/>
+          <a:p>
+            <a:pPr algn="ctr"/>
+          </a:p>
+        </p:txBody>
+      </p:sp>
+      <p:sp>
+        <p:nvSpPr>
+          <p:cNvPr id="3" name="TextBox 2"/>
           <p:cNvSpPr txBox="1"/>
           <p:nvPr/>
         </p:nvSpPr>
         <p:spPr>
           <a:xfrm>
-            <a:off x="457200" y="457200"/>
-            <a:ext cx="8229600" cy="640080"/>
+            <a:off x="457200" y="228600"/>
+            <a:ext cx="8229600" cy="457200"/>
           </a:xfrm>
           <a:prstGeom prst="rect">
             <a:avLst/>
@@ -4663,7 +7606,7 @@
             <a:pPr>
               <a:defRPr sz="3200" b="1">
                 <a:solidFill>
-                  <a:srgbClr val="003366"/>
+                  <a:srgbClr val="FFFFFF"/>
                 </a:solidFill>
               </a:defRPr>
             </a:pPr>
@@ -4675,14 +7618,14 @@
       </p:sp>
       <p:sp>
         <p:nvSpPr>
-          <p:cNvPr id="3" name="TextBox 2"/>
+          <p:cNvPr id="4" name="TextBox 3"/>
           <p:cNvSpPr txBox="1"/>
           <p:nvPr/>
         </p:nvSpPr>
         <p:spPr>
           <a:xfrm>
-            <a:off x="731520" y="1371600"/>
-            <a:ext cx="7772400" cy="5029200"/>
+            <a:off x="457200" y="1371600"/>
+            <a:ext cx="4114800" cy="5029200"/>
           </a:xfrm>
           <a:prstGeom prst="rect">
             <a:avLst/>
@@ -4699,65 +7642,286 @@
               <a:spcAft>
                 <a:spcPts val="1200"/>
               </a:spcAft>
-              <a:defRPr sz="1600"/>
-            </a:pPr>
-            <a:r>
-              <a:t>1. UPSTREAM: Budidaya tebu (perkebunan sendiri + petani mitra)</a:t>
-            </a:r>
-          </a:p>
-          <a:p>
-            <a:pPr>
-              <a:spcAft>
-                <a:spcPts val="1200"/>
-              </a:spcAft>
-              <a:defRPr sz="1600"/>
-            </a:pPr>
-            <a:r>
-              <a:t>2. MIDSTREAM: Pabrik gula - pengolahan tebu jadi kristal gula</a:t>
-            </a:r>
-          </a:p>
-          <a:p>
-            <a:pPr>
-              <a:spcAft>
-                <a:spcPts val="1200"/>
-              </a:spcAft>
-              <a:defRPr sz="1600"/>
-            </a:pPr>
-            <a:r>
-              <a:t>3. DOWNSTREAM: Distribusi &amp; penjualan (retail, industri, ekspor)</a:t>
-            </a:r>
-          </a:p>
-          <a:p>
-            <a:pPr>
-              <a:spcAft>
-                <a:spcPts val="1200"/>
-              </a:spcAft>
-              <a:defRPr sz="1600"/>
-            </a:pPr>
-            <a:r>
-              <a:t>4. BY-PRODUCTS: Molasses, bagasse, blotong, listrik (co-gen)</a:t>
-            </a:r>
-          </a:p>
-          <a:p>
-            <a:pPr>
-              <a:spcAft>
-                <a:spcPts val="1200"/>
-              </a:spcAft>
-              <a:defRPr sz="1600"/>
-            </a:pPr>
-            <a:r>
-              <a:t>• Integrasi vertikal: kebun → pabrik → distribusi</a:t>
-            </a:r>
-          </a:p>
-          <a:p>
-            <a:pPr>
-              <a:spcAft>
-                <a:spcPts val="1200"/>
-              </a:spcAft>
-              <a:defRPr sz="1600"/>
-            </a:pPr>
-            <a:r>
-              <a:t>• Revenue streams: gula, molasses, energi listrik</a:t>
+              <a:defRPr sz="1500">
+                <a:solidFill>
+                  <a:srgbClr val="333333"/>
+                </a:solidFill>
+              </a:defRPr>
+            </a:pPr>
+            <a:r>
+              <a:t>📍 UPSTREAM</a:t>
+            </a:r>
+          </a:p>
+          <a:p>
+            <a:pPr>
+              <a:spcAft>
+                <a:spcPts val="1200"/>
+              </a:spcAft>
+              <a:defRPr sz="1500">
+                <a:solidFill>
+                  <a:srgbClr val="333333"/>
+                </a:solidFill>
+              </a:defRPr>
+            </a:pPr>
+            <a:r>
+              <a:t>• Budidaya tebu</a:t>
+            </a:r>
+          </a:p>
+          <a:p>
+            <a:pPr>
+              <a:spcAft>
+                <a:spcPts val="1200"/>
+              </a:spcAft>
+              <a:defRPr sz="1500">
+                <a:solidFill>
+                  <a:srgbClr val="333333"/>
+                </a:solidFill>
+              </a:defRPr>
+            </a:pPr>
+            <a:r>
+              <a:t>• Perkebunan sendiri</a:t>
+            </a:r>
+          </a:p>
+          <a:p>
+            <a:pPr>
+              <a:spcAft>
+                <a:spcPts val="1200"/>
+              </a:spcAft>
+              <a:defRPr sz="1500">
+                <a:solidFill>
+                  <a:srgbClr val="333333"/>
+                </a:solidFill>
+              </a:defRPr>
+            </a:pPr>
+            <a:r>
+              <a:t>• Petani mitra</a:t>
+            </a:r>
+          </a:p>
+          <a:p>
+            <a:pPr>
+              <a:spcAft>
+                <a:spcPts val="1200"/>
+              </a:spcAft>
+              <a:defRPr sz="1500">
+                <a:solidFill>
+                  <a:srgbClr val="333333"/>
+                </a:solidFill>
+              </a:defRPr>
+            </a:pPr>
+          </a:p>
+          <a:p>
+            <a:pPr>
+              <a:spcAft>
+                <a:spcPts val="1200"/>
+              </a:spcAft>
+              <a:defRPr sz="1500">
+                <a:solidFill>
+                  <a:srgbClr val="333333"/>
+                </a:solidFill>
+              </a:defRPr>
+            </a:pPr>
+            <a:r>
+              <a:t>📍 MIDSTREAM</a:t>
+            </a:r>
+          </a:p>
+          <a:p>
+            <a:pPr>
+              <a:spcAft>
+                <a:spcPts val="1200"/>
+              </a:spcAft>
+              <a:defRPr sz="1500">
+                <a:solidFill>
+                  <a:srgbClr val="333333"/>
+                </a:solidFill>
+              </a:defRPr>
+            </a:pPr>
+            <a:r>
+              <a:t>• Pabrik gula</a:t>
+            </a:r>
+          </a:p>
+          <a:p>
+            <a:pPr>
+              <a:spcAft>
+                <a:spcPts val="1200"/>
+              </a:spcAft>
+              <a:defRPr sz="1500">
+                <a:solidFill>
+                  <a:srgbClr val="333333"/>
+                </a:solidFill>
+              </a:defRPr>
+            </a:pPr>
+            <a:r>
+              <a:t>• Pengolahan tebu</a:t>
+            </a:r>
+          </a:p>
+          <a:p>
+            <a:pPr>
+              <a:spcAft>
+                <a:spcPts val="1200"/>
+              </a:spcAft>
+              <a:defRPr sz="1500">
+                <a:solidFill>
+                  <a:srgbClr val="333333"/>
+                </a:solidFill>
+              </a:defRPr>
+            </a:pPr>
+            <a:r>
+              <a:t>• Produksi kristal gula</a:t>
+            </a:r>
+          </a:p>
+        </p:txBody>
+      </p:sp>
+      <p:sp>
+        <p:nvSpPr>
+          <p:cNvPr id="5" name="TextBox 4"/>
+          <p:cNvSpPr txBox="1"/>
+          <p:nvPr/>
+        </p:nvSpPr>
+        <p:spPr>
+          <a:xfrm>
+            <a:off x="4754880" y="1371600"/>
+            <a:ext cx="4114800" cy="5029200"/>
+          </a:xfrm>
+          <a:prstGeom prst="rect">
+            <a:avLst/>
+          </a:prstGeom>
+          <a:noFill/>
+        </p:spPr>
+        <p:txBody>
+          <a:bodyPr wrap="square">
+            <a:spAutoFit/>
+          </a:bodyPr>
+          <a:lstStyle/>
+          <a:p>
+            <a:pPr>
+              <a:spcAft>
+                <a:spcPts val="1200"/>
+              </a:spcAft>
+              <a:defRPr sz="1500">
+                <a:solidFill>
+                  <a:srgbClr val="333333"/>
+                </a:solidFill>
+              </a:defRPr>
+            </a:pPr>
+            <a:r>
+              <a:t>📍 DOWNSTREAM</a:t>
+            </a:r>
+          </a:p>
+          <a:p>
+            <a:pPr>
+              <a:spcAft>
+                <a:spcPts val="1200"/>
+              </a:spcAft>
+              <a:defRPr sz="1500">
+                <a:solidFill>
+                  <a:srgbClr val="333333"/>
+                </a:solidFill>
+              </a:defRPr>
+            </a:pPr>
+            <a:r>
+              <a:t>• Distribusi &amp; penjualan</a:t>
+            </a:r>
+          </a:p>
+          <a:p>
+            <a:pPr>
+              <a:spcAft>
+                <a:spcPts val="1200"/>
+              </a:spcAft>
+              <a:defRPr sz="1500">
+                <a:solidFill>
+                  <a:srgbClr val="333333"/>
+                </a:solidFill>
+              </a:defRPr>
+            </a:pPr>
+            <a:r>
+              <a:t>• Retail &amp; industri</a:t>
+            </a:r>
+          </a:p>
+          <a:p>
+            <a:pPr>
+              <a:spcAft>
+                <a:spcPts val="1200"/>
+              </a:spcAft>
+              <a:defRPr sz="1500">
+                <a:solidFill>
+                  <a:srgbClr val="333333"/>
+                </a:solidFill>
+              </a:defRPr>
+            </a:pPr>
+            <a:r>
+              <a:t>• Ekspor</a:t>
+            </a:r>
+          </a:p>
+          <a:p>
+            <a:pPr>
+              <a:spcAft>
+                <a:spcPts val="1200"/>
+              </a:spcAft>
+              <a:defRPr sz="1500">
+                <a:solidFill>
+                  <a:srgbClr val="333333"/>
+                </a:solidFill>
+              </a:defRPr>
+            </a:pPr>
+          </a:p>
+          <a:p>
+            <a:pPr>
+              <a:spcAft>
+                <a:spcPts val="1200"/>
+              </a:spcAft>
+              <a:defRPr sz="1500">
+                <a:solidFill>
+                  <a:srgbClr val="333333"/>
+                </a:solidFill>
+              </a:defRPr>
+            </a:pPr>
+            <a:r>
+              <a:t>📍 BY-PRODUCTS</a:t>
+            </a:r>
+          </a:p>
+          <a:p>
+            <a:pPr>
+              <a:spcAft>
+                <a:spcPts val="1200"/>
+              </a:spcAft>
+              <a:defRPr sz="1500">
+                <a:solidFill>
+                  <a:srgbClr val="333333"/>
+                </a:solidFill>
+              </a:defRPr>
+            </a:pPr>
+            <a:r>
+              <a:t>• Molasses (tetes)</a:t>
+            </a:r>
+          </a:p>
+          <a:p>
+            <a:pPr>
+              <a:spcAft>
+                <a:spcPts val="1200"/>
+              </a:spcAft>
+              <a:defRPr sz="1500">
+                <a:solidFill>
+                  <a:srgbClr val="333333"/>
+                </a:solidFill>
+              </a:defRPr>
+            </a:pPr>
+            <a:r>
+              <a:t>• Bagasse (listrik)</a:t>
+            </a:r>
+          </a:p>
+          <a:p>
+            <a:pPr>
+              <a:spcAft>
+                <a:spcPts val="1200"/>
+              </a:spcAft>
+              <a:defRPr sz="1500">
+                <a:solidFill>
+                  <a:srgbClr val="333333"/>
+                </a:solidFill>
+              </a:defRPr>
+            </a:pPr>
+            <a:r>
+              <a:t>• Blotong (pupuk)</a:t>
             </a:r>
           </a:p>
         </p:txBody>
@@ -4782,14 +7946,59 @@
       <p:grpSpPr/>
       <p:sp>
         <p:nvSpPr>
-          <p:cNvPr id="2" name="TextBox 1"/>
+          <p:cNvPr id="2" name="Rectangle 1"/>
+          <p:cNvSpPr/>
+          <p:nvPr/>
+        </p:nvSpPr>
+        <p:spPr>
+          <a:xfrm>
+            <a:off x="0" y="0"/>
+            <a:ext cx="9144000" cy="914400"/>
+          </a:xfrm>
+          <a:prstGeom prst="rect">
+            <a:avLst/>
+          </a:prstGeom>
+          <a:solidFill>
+            <a:srgbClr val="003366"/>
+          </a:solidFill>
+          <a:ln>
+            <a:solidFill>
+              <a:srgbClr val="003366"/>
+            </a:solidFill>
+          </a:ln>
+        </p:spPr>
+        <p:style>
+          <a:lnRef idx="1">
+            <a:schemeClr val="accent1"/>
+          </a:lnRef>
+          <a:fillRef idx="3">
+            <a:schemeClr val="accent1"/>
+          </a:fillRef>
+          <a:effectRef idx="2">
+            <a:schemeClr val="accent1"/>
+          </a:effectRef>
+          <a:fontRef idx="minor">
+            <a:schemeClr val="lt1"/>
+          </a:fontRef>
+        </p:style>
+        <p:txBody>
+          <a:bodyPr rtlCol="0" anchor="ctr"/>
+          <a:lstStyle/>
+          <a:p>
+            <a:pPr algn="ctr"/>
+          </a:p>
+        </p:txBody>
+      </p:sp>
+      <p:sp>
+        <p:nvSpPr>
+          <p:cNvPr id="3" name="TextBox 2"/>
           <p:cNvSpPr txBox="1"/>
           <p:nvPr/>
         </p:nvSpPr>
         <p:spPr>
           <a:xfrm>
-            <a:off x="457200" y="457200"/>
-            <a:ext cx="8229600" cy="640080"/>
+            <a:off x="457200" y="228600"/>
+            <a:ext cx="8229600" cy="457200"/>
           </a:xfrm>
           <a:prstGeom prst="rect">
             <a:avLst/>
@@ -4805,19 +8014,19 @@
             <a:pPr>
               <a:defRPr sz="3200" b="1">
                 <a:solidFill>
-                  <a:srgbClr val="003366"/>
-                </a:solidFill>
-              </a:defRPr>
-            </a:pPr>
-            <a:r>
-              <a:t>Alur Bisnis Pabrik Gula: End-to-End</a:t>
-            </a:r>
-          </a:p>
-        </p:txBody>
-      </p:sp>
-      <p:sp>
-        <p:nvSpPr>
-          <p:cNvPr id="3" name="TextBox 2"/>
+                  <a:srgbClr val="FFFFFF"/>
+                </a:solidFill>
+              </a:defRPr>
+            </a:pPr>
+            <a:r>
+              <a:t>Alur Bisnis End-to-End</a:t>
+            </a:r>
+          </a:p>
+        </p:txBody>
+      </p:sp>
+      <p:sp>
+        <p:nvSpPr>
+          <p:cNvPr id="4" name="TextBox 3"/>
           <p:cNvSpPr txBox="1"/>
           <p:nvPr/>
         </p:nvSpPr>
@@ -4839,100 +8048,139 @@
           <a:p>
             <a:pPr>
               <a:spcAft>
-                <a:spcPts val="1200"/>
-              </a:spcAft>
-              <a:defRPr sz="1600"/>
-            </a:pPr>
-            <a:r>
-              <a:t>KEBUN → tebu dipanen (manual/mekanis) → transportasi</a:t>
-            </a:r>
-          </a:p>
-          <a:p>
-            <a:pPr>
-              <a:spcAft>
-                <a:spcPts val="1200"/>
-              </a:spcAft>
-              <a:defRPr sz="1600"/>
-            </a:pPr>
-            <a:r>
-              <a:t>↓</a:t>
-            </a:r>
-          </a:p>
-          <a:p>
-            <a:pPr>
-              <a:spcAft>
-                <a:spcPts val="1200"/>
-              </a:spcAft>
-              <a:defRPr sz="1600"/>
-            </a:pPr>
-            <a:r>
-              <a:t>PABRIK → proses produksi (12-24 jam non-stop)</a:t>
-            </a:r>
-          </a:p>
-          <a:p>
-            <a:pPr>
-              <a:spcAft>
-                <a:spcPts val="1200"/>
-              </a:spcAft>
-              <a:defRPr sz="1600"/>
-            </a:pPr>
-            <a:r>
-              <a:t>↓</a:t>
-            </a:r>
-          </a:p>
-          <a:p>
-            <a:pPr>
-              <a:spcAft>
-                <a:spcPts val="1200"/>
-              </a:spcAft>
-              <a:defRPr sz="1600"/>
-            </a:pPr>
-            <a:r>
-              <a:t>OUTPUT → gula kristal + produk samping</a:t>
-            </a:r>
-          </a:p>
-          <a:p>
-            <a:pPr>
-              <a:spcAft>
-                <a:spcPts val="1200"/>
-              </a:spcAft>
-              <a:defRPr sz="1600"/>
-            </a:pPr>
-            <a:r>
-              <a:t>↓</a:t>
-            </a:r>
-          </a:p>
-          <a:p>
-            <a:pPr>
-              <a:spcAft>
-                <a:spcPts val="1200"/>
-              </a:spcAft>
-              <a:defRPr sz="1600"/>
-            </a:pPr>
-            <a:r>
-              <a:t>DISTRIBUSI → gudang → pasar/industri</a:t>
-            </a:r>
-          </a:p>
-          <a:p>
-            <a:pPr>
-              <a:spcAft>
-                <a:spcPts val="1200"/>
-              </a:spcAft>
-              <a:defRPr sz="1600"/>
-            </a:pPr>
-            <a:r>
-              <a:t>• Lead time: tebu tebang sampai jadi gula = 24-48 jam</a:t>
-            </a:r>
-          </a:p>
-          <a:p>
-            <a:pPr>
-              <a:spcAft>
-                <a:spcPts val="1200"/>
-              </a:spcAft>
-              <a:defRPr sz="1600"/>
-            </a:pPr>
-            <a:r>
-              <a:t>• Target: rendemen 8-10% (100 ton tebu → 8-10 ton gula)</a:t>
+                <a:spcPts val="1400"/>
+              </a:spcAft>
+              <a:defRPr sz="1600">
+                <a:solidFill>
+                  <a:srgbClr val="333333"/>
+                </a:solidFill>
+              </a:defRPr>
+            </a:pPr>
+            <a:r>
+              <a:t>🌾 KEBUN → Tebu dipanen (manual/mekanis) → Transportasi</a:t>
+            </a:r>
+          </a:p>
+          <a:p>
+            <a:pPr>
+              <a:spcAft>
+                <a:spcPts val="1400"/>
+              </a:spcAft>
+              <a:defRPr sz="1600">
+                <a:solidFill>
+                  <a:srgbClr val="333333"/>
+                </a:solidFill>
+              </a:defRPr>
+            </a:pPr>
+          </a:p>
+          <a:p>
+            <a:pPr>
+              <a:spcAft>
+                <a:spcPts val="1400"/>
+              </a:spcAft>
+              <a:defRPr sz="1600">
+                <a:solidFill>
+                  <a:srgbClr val="333333"/>
+                </a:solidFill>
+              </a:defRPr>
+            </a:pPr>
+            <a:r>
+              <a:t>🏭 PABRIK → Proses produksi 12-24 jam non-stop</a:t>
+            </a:r>
+          </a:p>
+          <a:p>
+            <a:pPr>
+              <a:spcAft>
+                <a:spcPts val="1400"/>
+              </a:spcAft>
+              <a:defRPr sz="1600">
+                <a:solidFill>
+                  <a:srgbClr val="333333"/>
+                </a:solidFill>
+              </a:defRPr>
+            </a:pPr>
+          </a:p>
+          <a:p>
+            <a:pPr>
+              <a:spcAft>
+                <a:spcPts val="1400"/>
+              </a:spcAft>
+              <a:defRPr sz="1600">
+                <a:solidFill>
+                  <a:srgbClr val="333333"/>
+                </a:solidFill>
+              </a:defRPr>
+            </a:pPr>
+            <a:r>
+              <a:t>📦 OUTPUT → Gula kristal + produk samping</a:t>
+            </a:r>
+          </a:p>
+          <a:p>
+            <a:pPr>
+              <a:spcAft>
+                <a:spcPts val="1400"/>
+              </a:spcAft>
+              <a:defRPr sz="1600">
+                <a:solidFill>
+                  <a:srgbClr val="333333"/>
+                </a:solidFill>
+              </a:defRPr>
+            </a:pPr>
+          </a:p>
+          <a:p>
+            <a:pPr>
+              <a:spcAft>
+                <a:spcPts val="1400"/>
+              </a:spcAft>
+              <a:defRPr sz="1600">
+                <a:solidFill>
+                  <a:srgbClr val="333333"/>
+                </a:solidFill>
+              </a:defRPr>
+            </a:pPr>
+            <a:r>
+              <a:t>🚚 DISTRIBUSI → Gudang → Pasar/Industri</a:t>
+            </a:r>
+          </a:p>
+          <a:p>
+            <a:pPr>
+              <a:spcAft>
+                <a:spcPts val="1400"/>
+              </a:spcAft>
+              <a:defRPr sz="1600">
+                <a:solidFill>
+                  <a:srgbClr val="333333"/>
+                </a:solidFill>
+              </a:defRPr>
+            </a:pPr>
+          </a:p>
+          <a:p>
+            <a:pPr>
+              <a:spcAft>
+                <a:spcPts val="1400"/>
+              </a:spcAft>
+              <a:defRPr sz="1600">
+                <a:solidFill>
+                  <a:srgbClr val="333333"/>
+                </a:solidFill>
+              </a:defRPr>
+            </a:pPr>
+            <a:r>
+              <a:t>⏱️  Lead time: Tebu tebang s/d jadi gula = 24-48 jam</a:t>
+            </a:r>
+          </a:p>
+          <a:p>
+            <a:pPr>
+              <a:spcAft>
+                <a:spcPts val="1400"/>
+              </a:spcAft>
+              <a:defRPr sz="1600">
+                <a:solidFill>
+                  <a:srgbClr val="333333"/>
+                </a:solidFill>
+              </a:defRPr>
+            </a:pPr>
+            <a:r>
+              <a:t>🎯 Target: Rendemen 8-10% (100 ton tebu → 8-10 ton gula)</a:t>
             </a:r>
           </a:p>
         </p:txBody>
@@ -4957,14 +8205,59 @@
       <p:grpSpPr/>
       <p:sp>
         <p:nvSpPr>
-          <p:cNvPr id="2" name="TextBox 1"/>
+          <p:cNvPr id="2" name="Rectangle 1"/>
+          <p:cNvSpPr/>
+          <p:nvPr/>
+        </p:nvSpPr>
+        <p:spPr>
+          <a:xfrm>
+            <a:off x="0" y="0"/>
+            <a:ext cx="9144000" cy="914400"/>
+          </a:xfrm>
+          <a:prstGeom prst="rect">
+            <a:avLst/>
+          </a:prstGeom>
+          <a:solidFill>
+            <a:srgbClr val="003366"/>
+          </a:solidFill>
+          <a:ln>
+            <a:solidFill>
+              <a:srgbClr val="003366"/>
+            </a:solidFill>
+          </a:ln>
+        </p:spPr>
+        <p:style>
+          <a:lnRef idx="1">
+            <a:schemeClr val="accent1"/>
+          </a:lnRef>
+          <a:fillRef idx="3">
+            <a:schemeClr val="accent1"/>
+          </a:fillRef>
+          <a:effectRef idx="2">
+            <a:schemeClr val="accent1"/>
+          </a:effectRef>
+          <a:fontRef idx="minor">
+            <a:schemeClr val="lt1"/>
+          </a:fontRef>
+        </p:style>
+        <p:txBody>
+          <a:bodyPr rtlCol="0" anchor="ctr"/>
+          <a:lstStyle/>
+          <a:p>
+            <a:pPr algn="ctr"/>
+          </a:p>
+        </p:txBody>
+      </p:sp>
+      <p:sp>
+        <p:nvSpPr>
+          <p:cNvPr id="3" name="TextBox 2"/>
           <p:cNvSpPr txBox="1"/>
           <p:nvPr/>
         </p:nvSpPr>
         <p:spPr>
           <a:xfrm>
-            <a:off x="457200" y="457200"/>
-            <a:ext cx="8229600" cy="640080"/>
+            <a:off x="457200" y="228600"/>
+            <a:ext cx="8229600" cy="457200"/>
           </a:xfrm>
           <a:prstGeom prst="rect">
             <a:avLst/>
@@ -4980,134 +8273,813 @@
             <a:pPr>
               <a:defRPr sz="3200" b="1">
                 <a:solidFill>
-                  <a:srgbClr val="003366"/>
-                </a:solidFill>
-              </a:defRPr>
-            </a:pPr>
-            <a:r>
-              <a:t>Proses Produksi di Pabrik (1/3)</a:t>
-            </a:r>
-          </a:p>
-        </p:txBody>
-      </p:sp>
-      <p:sp>
-        <p:nvSpPr>
-          <p:cNvPr id="3" name="TextBox 2"/>
-          <p:cNvSpPr txBox="1"/>
+                  <a:srgbClr val="FFFFFF"/>
+                </a:solidFill>
+              </a:defRPr>
+            </a:pPr>
+            <a:r>
+              <a:t>Proses Produksi: 9 Tahapan Utama</a:t>
+            </a:r>
+          </a:p>
+        </p:txBody>
+      </p:sp>
+      <p:sp>
+        <p:nvSpPr>
+          <p:cNvPr id="4" name="Rounded Rectangle 3"/>
+          <p:cNvSpPr/>
           <p:nvPr/>
         </p:nvSpPr>
         <p:spPr>
           <a:xfrm>
-            <a:off x="731520" y="1371600"/>
-            <a:ext cx="7772400" cy="5029200"/>
-          </a:xfrm>
-          <a:prstGeom prst="rect">
+            <a:off x="457200" y="1828800"/>
+            <a:ext cx="1645920" cy="731520"/>
+          </a:xfrm>
+          <a:prstGeom prst="roundRect">
             <a:avLst/>
           </a:prstGeom>
-          <a:noFill/>
-        </p:spPr>
-        <p:txBody>
-          <a:bodyPr wrap="square">
-            <a:spAutoFit/>
-          </a:bodyPr>
-          <a:lstStyle/>
-          <a:p>
-            <a:pPr>
-              <a:spcAft>
-                <a:spcPts val="1200"/>
-              </a:spcAft>
-              <a:defRPr sz="1600"/>
-            </a:pPr>
-            <a:r>
-              <a:t>1. PENERIMAAN TEBU: timbangan, sampling kualitas (pol, brix)</a:t>
-            </a:r>
-          </a:p>
-          <a:p>
-            <a:pPr>
-              <a:spcAft>
-                <a:spcPts val="1200"/>
-              </a:spcAft>
-              <a:defRPr sz="1600"/>
-            </a:pPr>
-            <a:r>
-              <a:t>2. CANE HANDLING: unloading, conveyor, cane preparation</a:t>
-            </a:r>
-          </a:p>
-          <a:p>
-            <a:pPr>
-              <a:spcAft>
-                <a:spcPts val="1200"/>
-              </a:spcAft>
-              <a:defRPr sz="1600"/>
-            </a:pPr>
-            <a:r>
-              <a:t>3. MILLING (Penggilingan): ekstraksi nira mentah dari tebu</a:t>
-            </a:r>
-          </a:p>
-          <a:p>
-            <a:pPr>
-              <a:spcAft>
-                <a:spcPts val="1200"/>
-              </a:spcAft>
-              <a:defRPr sz="1600"/>
-            </a:pPr>
-            <a:r>
-              <a:t>   - 4-7 unit gilingan</a:t>
-            </a:r>
-          </a:p>
-          <a:p>
-            <a:pPr>
-              <a:spcAft>
-                <a:spcPts val="1200"/>
-              </a:spcAft>
-              <a:defRPr sz="1600"/>
-            </a:pPr>
-            <a:r>
-              <a:t>   - Ekstraksi pol: 92-96%</a:t>
-            </a:r>
-          </a:p>
-          <a:p>
-            <a:pPr>
-              <a:spcAft>
-                <a:spcPts val="1200"/>
-              </a:spcAft>
-              <a:defRPr sz="1600"/>
-            </a:pPr>
-            <a:r>
-              <a:t>   - Output: nira mentah (juice) + ampas (bagasse)</a:t>
-            </a:r>
-          </a:p>
-          <a:p>
-            <a:pPr>
-              <a:spcAft>
-                <a:spcPts val="1200"/>
-              </a:spcAft>
-              <a:defRPr sz="1600"/>
-            </a:pPr>
-            <a:r>
-              <a:t>4. CLARIFICATION (Pemurnian): heating, sulfitasi, defekasi</a:t>
-            </a:r>
-          </a:p>
-          <a:p>
-            <a:pPr>
-              <a:spcAft>
-                <a:spcPts val="1200"/>
-              </a:spcAft>
-              <a:defRPr sz="1600"/>
-            </a:pPr>
-            <a:r>
-              <a:t>   - Tambah kapur + pemanasan → endapkan kotoran</a:t>
-            </a:r>
-          </a:p>
-          <a:p>
-            <a:pPr>
-              <a:spcAft>
-                <a:spcPts val="1200"/>
-              </a:spcAft>
-              <a:defRPr sz="1600"/>
-            </a:pPr>
-            <a:r>
-              <a:t>   - Output: nira jernih + blotong (filter cake)</a:t>
+          <a:solidFill>
+            <a:srgbClr val="2980B9"/>
+          </a:solidFill>
+          <a:ln w="25400">
+            <a:solidFill>
+              <a:srgbClr val="FFFFFF"/>
+            </a:solidFill>
+          </a:ln>
+        </p:spPr>
+        <p:style>
+          <a:lnRef idx="1">
+            <a:schemeClr val="accent1"/>
+          </a:lnRef>
+          <a:fillRef idx="3">
+            <a:schemeClr val="accent1"/>
+          </a:fillRef>
+          <a:effectRef idx="2">
+            <a:schemeClr val="accent1"/>
+          </a:effectRef>
+          <a:fontRef idx="minor">
+            <a:schemeClr val="lt1"/>
+          </a:fontRef>
+        </p:style>
+        <p:txBody>
+          <a:bodyPr rtlCol="0" anchor="ctr"/>
+          <a:lstStyle/>
+          <a:p>
+            <a:pPr algn="ctr">
+              <a:defRPr sz="1300" b="1">
+                <a:solidFill>
+                  <a:srgbClr val="FFFFFF"/>
+                </a:solidFill>
+              </a:defRPr>
+            </a:pPr>
+            <a:r>
+              <a:t>1. Penerimaan</a:t>
+            </a:r>
+          </a:p>
+          <a:p>
+            <a:r>
+              <a:t>Tebu</a:t>
+            </a:r>
+          </a:p>
+        </p:txBody>
+      </p:sp>
+      <p:sp>
+        <p:nvSpPr>
+          <p:cNvPr id="5" name="Right Arrow 4"/>
+          <p:cNvSpPr/>
+          <p:nvPr/>
+        </p:nvSpPr>
+        <p:spPr>
+          <a:xfrm>
+            <a:off x="2148840" y="2057400"/>
+            <a:ext cx="182880" cy="274320"/>
+          </a:xfrm>
+          <a:prstGeom prst="rightArrow">
+            <a:avLst/>
+          </a:prstGeom>
+          <a:solidFill>
+            <a:srgbClr val="95A5A6"/>
+          </a:solidFill>
+          <a:ln>
+            <a:solidFill>
+              <a:srgbClr val="95A5A6"/>
+            </a:solidFill>
+          </a:ln>
+        </p:spPr>
+        <p:style>
+          <a:lnRef idx="1">
+            <a:schemeClr val="accent1"/>
+          </a:lnRef>
+          <a:fillRef idx="3">
+            <a:schemeClr val="accent1"/>
+          </a:fillRef>
+          <a:effectRef idx="2">
+            <a:schemeClr val="accent1"/>
+          </a:effectRef>
+          <a:fontRef idx="minor">
+            <a:schemeClr val="lt1"/>
+          </a:fontRef>
+        </p:style>
+        <p:txBody>
+          <a:bodyPr rtlCol="0" anchor="ctr"/>
+          <a:lstStyle/>
+          <a:p>
+            <a:pPr algn="ctr"/>
+          </a:p>
+        </p:txBody>
+      </p:sp>
+      <p:sp>
+        <p:nvSpPr>
+          <p:cNvPr id="6" name="Rounded Rectangle 5"/>
+          <p:cNvSpPr/>
+          <p:nvPr/>
+        </p:nvSpPr>
+        <p:spPr>
+          <a:xfrm>
+            <a:off x="2377440" y="1828800"/>
+            <a:ext cx="1645920" cy="731520"/>
+          </a:xfrm>
+          <a:prstGeom prst="roundRect">
+            <a:avLst/>
+          </a:prstGeom>
+          <a:solidFill>
+            <a:srgbClr val="3498DB"/>
+          </a:solidFill>
+          <a:ln w="25400">
+            <a:solidFill>
+              <a:srgbClr val="FFFFFF"/>
+            </a:solidFill>
+          </a:ln>
+        </p:spPr>
+        <p:style>
+          <a:lnRef idx="1">
+            <a:schemeClr val="accent1"/>
+          </a:lnRef>
+          <a:fillRef idx="3">
+            <a:schemeClr val="accent1"/>
+          </a:fillRef>
+          <a:effectRef idx="2">
+            <a:schemeClr val="accent1"/>
+          </a:effectRef>
+          <a:fontRef idx="minor">
+            <a:schemeClr val="lt1"/>
+          </a:fontRef>
+        </p:style>
+        <p:txBody>
+          <a:bodyPr rtlCol="0" anchor="ctr"/>
+          <a:lstStyle/>
+          <a:p>
+            <a:pPr algn="ctr">
+              <a:defRPr sz="1300" b="1">
+                <a:solidFill>
+                  <a:srgbClr val="FFFFFF"/>
+                </a:solidFill>
+              </a:defRPr>
+            </a:pPr>
+            <a:r>
+              <a:t>2. Cane</a:t>
+            </a:r>
+          </a:p>
+          <a:p>
+            <a:r>
+              <a:t>Handling</a:t>
+            </a:r>
+          </a:p>
+        </p:txBody>
+      </p:sp>
+      <p:sp>
+        <p:nvSpPr>
+          <p:cNvPr id="7" name="Right Arrow 6"/>
+          <p:cNvSpPr/>
+          <p:nvPr/>
+        </p:nvSpPr>
+        <p:spPr>
+          <a:xfrm>
+            <a:off x="4069080" y="2057400"/>
+            <a:ext cx="182880" cy="274320"/>
+          </a:xfrm>
+          <a:prstGeom prst="rightArrow">
+            <a:avLst/>
+          </a:prstGeom>
+          <a:solidFill>
+            <a:srgbClr val="95A5A6"/>
+          </a:solidFill>
+          <a:ln>
+            <a:solidFill>
+              <a:srgbClr val="95A5A6"/>
+            </a:solidFill>
+          </a:ln>
+        </p:spPr>
+        <p:style>
+          <a:lnRef idx="1">
+            <a:schemeClr val="accent1"/>
+          </a:lnRef>
+          <a:fillRef idx="3">
+            <a:schemeClr val="accent1"/>
+          </a:fillRef>
+          <a:effectRef idx="2">
+            <a:schemeClr val="accent1"/>
+          </a:effectRef>
+          <a:fontRef idx="minor">
+            <a:schemeClr val="lt1"/>
+          </a:fontRef>
+        </p:style>
+        <p:txBody>
+          <a:bodyPr rtlCol="0" anchor="ctr"/>
+          <a:lstStyle/>
+          <a:p>
+            <a:pPr algn="ctr"/>
+          </a:p>
+        </p:txBody>
+      </p:sp>
+      <p:sp>
+        <p:nvSpPr>
+          <p:cNvPr id="8" name="Rounded Rectangle 7"/>
+          <p:cNvSpPr/>
+          <p:nvPr/>
+        </p:nvSpPr>
+        <p:spPr>
+          <a:xfrm>
+            <a:off x="4297680" y="1828800"/>
+            <a:ext cx="1645920" cy="731520"/>
+          </a:xfrm>
+          <a:prstGeom prst="roundRect">
+            <a:avLst/>
+          </a:prstGeom>
+          <a:solidFill>
+            <a:srgbClr val="1ABC9C"/>
+          </a:solidFill>
+          <a:ln w="25400">
+            <a:solidFill>
+              <a:srgbClr val="FFFFFF"/>
+            </a:solidFill>
+          </a:ln>
+        </p:spPr>
+        <p:style>
+          <a:lnRef idx="1">
+            <a:schemeClr val="accent1"/>
+          </a:lnRef>
+          <a:fillRef idx="3">
+            <a:schemeClr val="accent1"/>
+          </a:fillRef>
+          <a:effectRef idx="2">
+            <a:schemeClr val="accent1"/>
+          </a:effectRef>
+          <a:fontRef idx="minor">
+            <a:schemeClr val="lt1"/>
+          </a:fontRef>
+        </p:style>
+        <p:txBody>
+          <a:bodyPr rtlCol="0" anchor="ctr"/>
+          <a:lstStyle/>
+          <a:p>
+            <a:pPr algn="ctr">
+              <a:defRPr sz="1300" b="1">
+                <a:solidFill>
+                  <a:srgbClr val="FFFFFF"/>
+                </a:solidFill>
+              </a:defRPr>
+            </a:pPr>
+            <a:r>
+              <a:t>3. Milling</a:t>
+            </a:r>
+          </a:p>
+          <a:p>
+            <a:r>
+              <a:t>(Giling)</a:t>
+            </a:r>
+          </a:p>
+        </p:txBody>
+      </p:sp>
+      <p:sp>
+        <p:nvSpPr>
+          <p:cNvPr id="9" name="Right Arrow 8"/>
+          <p:cNvSpPr/>
+          <p:nvPr/>
+        </p:nvSpPr>
+        <p:spPr>
+          <a:xfrm>
+            <a:off x="5989320" y="2057400"/>
+            <a:ext cx="182880" cy="274320"/>
+          </a:xfrm>
+          <a:prstGeom prst="rightArrow">
+            <a:avLst/>
+          </a:prstGeom>
+          <a:solidFill>
+            <a:srgbClr val="95A5A6"/>
+          </a:solidFill>
+          <a:ln>
+            <a:solidFill>
+              <a:srgbClr val="95A5A6"/>
+            </a:solidFill>
+          </a:ln>
+        </p:spPr>
+        <p:style>
+          <a:lnRef idx="1">
+            <a:schemeClr val="accent1"/>
+          </a:lnRef>
+          <a:fillRef idx="3">
+            <a:schemeClr val="accent1"/>
+          </a:fillRef>
+          <a:effectRef idx="2">
+            <a:schemeClr val="accent1"/>
+          </a:effectRef>
+          <a:fontRef idx="minor">
+            <a:schemeClr val="lt1"/>
+          </a:fontRef>
+        </p:style>
+        <p:txBody>
+          <a:bodyPr rtlCol="0" anchor="ctr"/>
+          <a:lstStyle/>
+          <a:p>
+            <a:pPr algn="ctr"/>
+          </a:p>
+        </p:txBody>
+      </p:sp>
+      <p:sp>
+        <p:nvSpPr>
+          <p:cNvPr id="10" name="Rounded Rectangle 9"/>
+          <p:cNvSpPr/>
+          <p:nvPr/>
+        </p:nvSpPr>
+        <p:spPr>
+          <a:xfrm>
+            <a:off x="6217920" y="1828800"/>
+            <a:ext cx="1645920" cy="731520"/>
+          </a:xfrm>
+          <a:prstGeom prst="roundRect">
+            <a:avLst/>
+          </a:prstGeom>
+          <a:solidFill>
+            <a:srgbClr val="2ECC71"/>
+          </a:solidFill>
+          <a:ln w="25400">
+            <a:solidFill>
+              <a:srgbClr val="FFFFFF"/>
+            </a:solidFill>
+          </a:ln>
+        </p:spPr>
+        <p:style>
+          <a:lnRef idx="1">
+            <a:schemeClr val="accent1"/>
+          </a:lnRef>
+          <a:fillRef idx="3">
+            <a:schemeClr val="accent1"/>
+          </a:fillRef>
+          <a:effectRef idx="2">
+            <a:schemeClr val="accent1"/>
+          </a:effectRef>
+          <a:fontRef idx="minor">
+            <a:schemeClr val="lt1"/>
+          </a:fontRef>
+        </p:style>
+        <p:txBody>
+          <a:bodyPr rtlCol="0" anchor="ctr"/>
+          <a:lstStyle/>
+          <a:p>
+            <a:pPr algn="ctr">
+              <a:defRPr sz="1300" b="1">
+                <a:solidFill>
+                  <a:srgbClr val="FFFFFF"/>
+                </a:solidFill>
+              </a:defRPr>
+            </a:pPr>
+            <a:r>
+              <a:t>4. Clarification</a:t>
+            </a:r>
+          </a:p>
+          <a:p>
+            <a:r>
+              <a:t>(Jernihkan)</a:t>
+            </a:r>
+          </a:p>
+        </p:txBody>
+      </p:sp>
+      <p:sp>
+        <p:nvSpPr>
+          <p:cNvPr id="11" name="Rounded Rectangle 10"/>
+          <p:cNvSpPr/>
+          <p:nvPr/>
+        </p:nvSpPr>
+        <p:spPr>
+          <a:xfrm>
+            <a:off x="457200" y="3200400"/>
+            <a:ext cx="1645920" cy="731520"/>
+          </a:xfrm>
+          <a:prstGeom prst="roundRect">
+            <a:avLst/>
+          </a:prstGeom>
+          <a:solidFill>
+            <a:srgbClr val="F1C40F"/>
+          </a:solidFill>
+          <a:ln w="25400">
+            <a:solidFill>
+              <a:srgbClr val="FFFFFF"/>
+            </a:solidFill>
+          </a:ln>
+        </p:spPr>
+        <p:style>
+          <a:lnRef idx="1">
+            <a:schemeClr val="accent1"/>
+          </a:lnRef>
+          <a:fillRef idx="3">
+            <a:schemeClr val="accent1"/>
+          </a:fillRef>
+          <a:effectRef idx="2">
+            <a:schemeClr val="accent1"/>
+          </a:effectRef>
+          <a:fontRef idx="minor">
+            <a:schemeClr val="lt1"/>
+          </a:fontRef>
+        </p:style>
+        <p:txBody>
+          <a:bodyPr rtlCol="0" anchor="ctr"/>
+          <a:lstStyle/>
+          <a:p>
+            <a:pPr algn="ctr">
+              <a:defRPr sz="1300" b="1">
+                <a:solidFill>
+                  <a:srgbClr val="FFFFFF"/>
+                </a:solidFill>
+              </a:defRPr>
+            </a:pPr>
+            <a:r>
+              <a:t>5. Evaporation</a:t>
+            </a:r>
+          </a:p>
+          <a:p>
+            <a:r>
+              <a:t>(Uapkan)</a:t>
+            </a:r>
+          </a:p>
+        </p:txBody>
+      </p:sp>
+      <p:sp>
+        <p:nvSpPr>
+          <p:cNvPr id="12" name="Right Arrow 11"/>
+          <p:cNvSpPr/>
+          <p:nvPr/>
+        </p:nvSpPr>
+        <p:spPr>
+          <a:xfrm>
+            <a:off x="2148840" y="3429000"/>
+            <a:ext cx="182880" cy="274320"/>
+          </a:xfrm>
+          <a:prstGeom prst="rightArrow">
+            <a:avLst/>
+          </a:prstGeom>
+          <a:solidFill>
+            <a:srgbClr val="95A5A6"/>
+          </a:solidFill>
+          <a:ln>
+            <a:solidFill>
+              <a:srgbClr val="95A5A6"/>
+            </a:solidFill>
+          </a:ln>
+        </p:spPr>
+        <p:style>
+          <a:lnRef idx="1">
+            <a:schemeClr val="accent1"/>
+          </a:lnRef>
+          <a:fillRef idx="3">
+            <a:schemeClr val="accent1"/>
+          </a:fillRef>
+          <a:effectRef idx="2">
+            <a:schemeClr val="accent1"/>
+          </a:effectRef>
+          <a:fontRef idx="minor">
+            <a:schemeClr val="lt1"/>
+          </a:fontRef>
+        </p:style>
+        <p:txBody>
+          <a:bodyPr rtlCol="0" anchor="ctr"/>
+          <a:lstStyle/>
+          <a:p>
+            <a:pPr algn="ctr"/>
+          </a:p>
+        </p:txBody>
+      </p:sp>
+      <p:sp>
+        <p:nvSpPr>
+          <p:cNvPr id="13" name="Rounded Rectangle 12"/>
+          <p:cNvSpPr/>
+          <p:nvPr/>
+        </p:nvSpPr>
+        <p:spPr>
+          <a:xfrm>
+            <a:off x="2377440" y="3200400"/>
+            <a:ext cx="1645920" cy="731520"/>
+          </a:xfrm>
+          <a:prstGeom prst="roundRect">
+            <a:avLst/>
+          </a:prstGeom>
+          <a:solidFill>
+            <a:srgbClr val="2980B9"/>
+          </a:solidFill>
+          <a:ln w="25400">
+            <a:solidFill>
+              <a:srgbClr val="FFFFFF"/>
+            </a:solidFill>
+          </a:ln>
+        </p:spPr>
+        <p:style>
+          <a:lnRef idx="1">
+            <a:schemeClr val="accent1"/>
+          </a:lnRef>
+          <a:fillRef idx="3">
+            <a:schemeClr val="accent1"/>
+          </a:fillRef>
+          <a:effectRef idx="2">
+            <a:schemeClr val="accent1"/>
+          </a:effectRef>
+          <a:fontRef idx="minor">
+            <a:schemeClr val="lt1"/>
+          </a:fontRef>
+        </p:style>
+        <p:txBody>
+          <a:bodyPr rtlCol="0" anchor="ctr"/>
+          <a:lstStyle/>
+          <a:p>
+            <a:pPr algn="ctr">
+              <a:defRPr sz="1300" b="1">
+                <a:solidFill>
+                  <a:srgbClr val="FFFFFF"/>
+                </a:solidFill>
+              </a:defRPr>
+            </a:pPr>
+            <a:r>
+              <a:t>6. Crystallization</a:t>
+            </a:r>
+          </a:p>
+          <a:p>
+            <a:r>
+              <a:t>(Kristal)</a:t>
+            </a:r>
+          </a:p>
+        </p:txBody>
+      </p:sp>
+      <p:sp>
+        <p:nvSpPr>
+          <p:cNvPr id="14" name="Right Arrow 13"/>
+          <p:cNvSpPr/>
+          <p:nvPr/>
+        </p:nvSpPr>
+        <p:spPr>
+          <a:xfrm>
+            <a:off x="4069080" y="3429000"/>
+            <a:ext cx="182880" cy="274320"/>
+          </a:xfrm>
+          <a:prstGeom prst="rightArrow">
+            <a:avLst/>
+          </a:prstGeom>
+          <a:solidFill>
+            <a:srgbClr val="95A5A6"/>
+          </a:solidFill>
+          <a:ln>
+            <a:solidFill>
+              <a:srgbClr val="95A5A6"/>
+            </a:solidFill>
+          </a:ln>
+        </p:spPr>
+        <p:style>
+          <a:lnRef idx="1">
+            <a:schemeClr val="accent1"/>
+          </a:lnRef>
+          <a:fillRef idx="3">
+            <a:schemeClr val="accent1"/>
+          </a:fillRef>
+          <a:effectRef idx="2">
+            <a:schemeClr val="accent1"/>
+          </a:effectRef>
+          <a:fontRef idx="minor">
+            <a:schemeClr val="lt1"/>
+          </a:fontRef>
+        </p:style>
+        <p:txBody>
+          <a:bodyPr rtlCol="0" anchor="ctr"/>
+          <a:lstStyle/>
+          <a:p>
+            <a:pPr algn="ctr"/>
+          </a:p>
+        </p:txBody>
+      </p:sp>
+      <p:sp>
+        <p:nvSpPr>
+          <p:cNvPr id="15" name="Rounded Rectangle 14"/>
+          <p:cNvSpPr/>
+          <p:nvPr/>
+        </p:nvSpPr>
+        <p:spPr>
+          <a:xfrm>
+            <a:off x="4297680" y="3200400"/>
+            <a:ext cx="1645920" cy="731520"/>
+          </a:xfrm>
+          <a:prstGeom prst="roundRect">
+            <a:avLst/>
+          </a:prstGeom>
+          <a:solidFill>
+            <a:srgbClr val="3498DB"/>
+          </a:solidFill>
+          <a:ln w="25400">
+            <a:solidFill>
+              <a:srgbClr val="FFFFFF"/>
+            </a:solidFill>
+          </a:ln>
+        </p:spPr>
+        <p:style>
+          <a:lnRef idx="1">
+            <a:schemeClr val="accent1"/>
+          </a:lnRef>
+          <a:fillRef idx="3">
+            <a:schemeClr val="accent1"/>
+          </a:fillRef>
+          <a:effectRef idx="2">
+            <a:schemeClr val="accent1"/>
+          </a:effectRef>
+          <a:fontRef idx="minor">
+            <a:schemeClr val="lt1"/>
+          </a:fontRef>
+        </p:style>
+        <p:txBody>
+          <a:bodyPr rtlCol="0" anchor="ctr"/>
+          <a:lstStyle/>
+          <a:p>
+            <a:pPr algn="ctr">
+              <a:defRPr sz="1300" b="1">
+                <a:solidFill>
+                  <a:srgbClr val="FFFFFF"/>
+                </a:solidFill>
+              </a:defRPr>
+            </a:pPr>
+            <a:r>
+              <a:t>7. Centrifugation</a:t>
+            </a:r>
+          </a:p>
+          <a:p>
+            <a:r>
+              <a:t>(Pisahkan)</a:t>
+            </a:r>
+          </a:p>
+        </p:txBody>
+      </p:sp>
+      <p:sp>
+        <p:nvSpPr>
+          <p:cNvPr id="16" name="Right Arrow 15"/>
+          <p:cNvSpPr/>
+          <p:nvPr/>
+        </p:nvSpPr>
+        <p:spPr>
+          <a:xfrm>
+            <a:off x="5989320" y="3429000"/>
+            <a:ext cx="182880" cy="274320"/>
+          </a:xfrm>
+          <a:prstGeom prst="rightArrow">
+            <a:avLst/>
+          </a:prstGeom>
+          <a:solidFill>
+            <a:srgbClr val="95A5A6"/>
+          </a:solidFill>
+          <a:ln>
+            <a:solidFill>
+              <a:srgbClr val="95A5A6"/>
+            </a:solidFill>
+          </a:ln>
+        </p:spPr>
+        <p:style>
+          <a:lnRef idx="1">
+            <a:schemeClr val="accent1"/>
+          </a:lnRef>
+          <a:fillRef idx="3">
+            <a:schemeClr val="accent1"/>
+          </a:fillRef>
+          <a:effectRef idx="2">
+            <a:schemeClr val="accent1"/>
+          </a:effectRef>
+          <a:fontRef idx="minor">
+            <a:schemeClr val="lt1"/>
+          </a:fontRef>
+        </p:style>
+        <p:txBody>
+          <a:bodyPr rtlCol="0" anchor="ctr"/>
+          <a:lstStyle/>
+          <a:p>
+            <a:pPr algn="ctr"/>
+          </a:p>
+        </p:txBody>
+      </p:sp>
+      <p:sp>
+        <p:nvSpPr>
+          <p:cNvPr id="17" name="Rounded Rectangle 16"/>
+          <p:cNvSpPr/>
+          <p:nvPr/>
+        </p:nvSpPr>
+        <p:spPr>
+          <a:xfrm>
+            <a:off x="6217920" y="3200400"/>
+            <a:ext cx="1645920" cy="731520"/>
+          </a:xfrm>
+          <a:prstGeom prst="roundRect">
+            <a:avLst/>
+          </a:prstGeom>
+          <a:solidFill>
+            <a:srgbClr val="1ABC9C"/>
+          </a:solidFill>
+          <a:ln w="25400">
+            <a:solidFill>
+              <a:srgbClr val="FFFFFF"/>
+            </a:solidFill>
+          </a:ln>
+        </p:spPr>
+        <p:style>
+          <a:lnRef idx="1">
+            <a:schemeClr val="accent1"/>
+          </a:lnRef>
+          <a:fillRef idx="3">
+            <a:schemeClr val="accent1"/>
+          </a:fillRef>
+          <a:effectRef idx="2">
+            <a:schemeClr val="accent1"/>
+          </a:effectRef>
+          <a:fontRef idx="minor">
+            <a:schemeClr val="lt1"/>
+          </a:fontRef>
+        </p:style>
+        <p:txBody>
+          <a:bodyPr rtlCol="0" anchor="ctr"/>
+          <a:lstStyle/>
+          <a:p>
+            <a:pPr algn="ctr">
+              <a:defRPr sz="1300" b="1">
+                <a:solidFill>
+                  <a:srgbClr val="FFFFFF"/>
+                </a:solidFill>
+              </a:defRPr>
+            </a:pPr>
+            <a:r>
+              <a:t>8. Drying &amp;</a:t>
+            </a:r>
+          </a:p>
+          <a:p>
+            <a:r>
+              <a:t>Cooling</a:t>
+            </a:r>
+          </a:p>
+        </p:txBody>
+      </p:sp>
+      <p:sp>
+        <p:nvSpPr>
+          <p:cNvPr id="18" name="Rounded Rectangle 17"/>
+          <p:cNvSpPr/>
+          <p:nvPr/>
+        </p:nvSpPr>
+        <p:spPr>
+          <a:xfrm>
+            <a:off x="457200" y="4572000"/>
+            <a:ext cx="1645920" cy="731520"/>
+          </a:xfrm>
+          <a:prstGeom prst="roundRect">
+            <a:avLst/>
+          </a:prstGeom>
+          <a:solidFill>
+            <a:srgbClr val="2ECC71"/>
+          </a:solidFill>
+          <a:ln w="25400">
+            <a:solidFill>
+              <a:srgbClr val="FFFFFF"/>
+            </a:solidFill>
+          </a:ln>
+        </p:spPr>
+        <p:style>
+          <a:lnRef idx="1">
+            <a:schemeClr val="accent1"/>
+          </a:lnRef>
+          <a:fillRef idx="3">
+            <a:schemeClr val="accent1"/>
+          </a:fillRef>
+          <a:effectRef idx="2">
+            <a:schemeClr val="accent1"/>
+          </a:effectRef>
+          <a:fontRef idx="minor">
+            <a:schemeClr val="lt1"/>
+          </a:fontRef>
+        </p:style>
+        <p:txBody>
+          <a:bodyPr rtlCol="0" anchor="ctr"/>
+          <a:lstStyle/>
+          <a:p>
+            <a:pPr algn="ctr">
+              <a:defRPr sz="1300" b="1">
+                <a:solidFill>
+                  <a:srgbClr val="FFFFFF"/>
+                </a:solidFill>
+              </a:defRPr>
+            </a:pPr>
+            <a:r>
+              <a:t>9. Packaging</a:t>
+            </a:r>
+          </a:p>
+          <a:p>
+            <a:r>
+              <a:t>&amp; Storage</a:t>
             </a:r>
           </a:p>
         </p:txBody>
@@ -5132,14 +9104,59 @@
       <p:grpSpPr/>
       <p:sp>
         <p:nvSpPr>
-          <p:cNvPr id="2" name="TextBox 1"/>
+          <p:cNvPr id="2" name="Rectangle 1"/>
+          <p:cNvSpPr/>
+          <p:nvPr/>
+        </p:nvSpPr>
+        <p:spPr>
+          <a:xfrm>
+            <a:off x="0" y="0"/>
+            <a:ext cx="9144000" cy="914400"/>
+          </a:xfrm>
+          <a:prstGeom prst="rect">
+            <a:avLst/>
+          </a:prstGeom>
+          <a:solidFill>
+            <a:srgbClr val="003366"/>
+          </a:solidFill>
+          <a:ln>
+            <a:solidFill>
+              <a:srgbClr val="003366"/>
+            </a:solidFill>
+          </a:ln>
+        </p:spPr>
+        <p:style>
+          <a:lnRef idx="1">
+            <a:schemeClr val="accent1"/>
+          </a:lnRef>
+          <a:fillRef idx="3">
+            <a:schemeClr val="accent1"/>
+          </a:fillRef>
+          <a:effectRef idx="2">
+            <a:schemeClr val="accent1"/>
+          </a:effectRef>
+          <a:fontRef idx="minor">
+            <a:schemeClr val="lt1"/>
+          </a:fontRef>
+        </p:style>
+        <p:txBody>
+          <a:bodyPr rtlCol="0" anchor="ctr"/>
+          <a:lstStyle/>
+          <a:p>
+            <a:pPr algn="ctr"/>
+          </a:p>
+        </p:txBody>
+      </p:sp>
+      <p:sp>
+        <p:nvSpPr>
+          <p:cNvPr id="3" name="TextBox 2"/>
           <p:cNvSpPr txBox="1"/>
           <p:nvPr/>
         </p:nvSpPr>
         <p:spPr>
           <a:xfrm>
-            <a:off x="457200" y="457200"/>
-            <a:ext cx="8229600" cy="640080"/>
+            <a:off x="457200" y="228600"/>
+            <a:ext cx="8229600" cy="457200"/>
           </a:xfrm>
           <a:prstGeom prst="rect">
             <a:avLst/>
@@ -5155,19 +9172,19 @@
             <a:pPr>
               <a:defRPr sz="3200" b="1">
                 <a:solidFill>
-                  <a:srgbClr val="003366"/>
-                </a:solidFill>
-              </a:defRPr>
-            </a:pPr>
-            <a:r>
-              <a:t>Proses Produksi di Pabrik (2/3)</a:t>
-            </a:r>
-          </a:p>
-        </p:txBody>
-      </p:sp>
-      <p:sp>
-        <p:nvSpPr>
-          <p:cNvPr id="3" name="TextBox 2"/>
+                  <a:srgbClr val="FFFFFF"/>
+                </a:solidFill>
+              </a:defRPr>
+            </a:pPr>
+            <a:r>
+              <a:t>Detail Proses (1/3): Penerimaan - Clarification</a:t>
+            </a:r>
+          </a:p>
+        </p:txBody>
+      </p:sp>
+      <p:sp>
+        <p:nvSpPr>
+          <p:cNvPr id="4" name="TextBox 3"/>
           <p:cNvSpPr txBox="1"/>
           <p:nvPr/>
         </p:nvSpPr>
@@ -5189,89 +9206,187 @@
           <a:p>
             <a:pPr>
               <a:spcAft>
-                <a:spcPts val="1200"/>
-              </a:spcAft>
-              <a:defRPr sz="1600"/>
-            </a:pPr>
-            <a:r>
-              <a:t>5. EVAPORATION (Penguapan): nira jernih → nira kental</a:t>
-            </a:r>
-          </a:p>
-          <a:p>
-            <a:pPr>
-              <a:spcAft>
-                <a:spcPts val="1200"/>
-              </a:spcAft>
-              <a:defRPr sz="1600"/>
-            </a:pPr>
-            <a:r>
-              <a:t>   - Multiple effect evaporator (4-5 badan)</a:t>
-            </a:r>
-          </a:p>
-          <a:p>
-            <a:pPr>
-              <a:spcAft>
-                <a:spcPts val="1200"/>
-              </a:spcAft>
-              <a:defRPr sz="1600"/>
-            </a:pPr>
-            <a:r>
-              <a:t>   - Brix naik: 12-15% → 60-65%</a:t>
-            </a:r>
-          </a:p>
-          <a:p>
-            <a:pPr>
-              <a:spcAft>
-                <a:spcPts val="1200"/>
-              </a:spcAft>
-              <a:defRPr sz="1600"/>
-            </a:pPr>
-            <a:r>
-              <a:t>   - Hemat energi dengan sistem multi-effect</a:t>
-            </a:r>
-          </a:p>
-          <a:p>
-            <a:pPr>
-              <a:spcAft>
-                <a:spcPts val="1200"/>
-              </a:spcAft>
-              <a:defRPr sz="1600"/>
-            </a:pPr>
-            <a:r>
-              <a:t>6. CRYSTALLIZATION (Masakan): nira kental → kristal gula</a:t>
-            </a:r>
-          </a:p>
-          <a:p>
-            <a:pPr>
-              <a:spcAft>
-                <a:spcPts val="1200"/>
-              </a:spcAft>
-              <a:defRPr sz="1600"/>
-            </a:pPr>
-            <a:r>
-              <a:t>   - Vacuum pan A, C, D (3 tingkat masakan)</a:t>
-            </a:r>
-          </a:p>
-          <a:p>
-            <a:pPr>
-              <a:spcAft>
-                <a:spcPts val="1200"/>
-              </a:spcAft>
-              <a:defRPr sz="1600"/>
-            </a:pPr>
-            <a:r>
-              <a:t>   - Brix naik: 65% → 92-94%</a:t>
-            </a:r>
-          </a:p>
-          <a:p>
-            <a:pPr>
-              <a:spcAft>
-                <a:spcPts val="1200"/>
-              </a:spcAft>
-              <a:defRPr sz="1600"/>
-            </a:pPr>
-            <a:r>
-              <a:t>   - Output: massecuite (campuran kristal + stroop)</a:t>
+                <a:spcPts val="1400"/>
+              </a:spcAft>
+              <a:defRPr sz="1600">
+                <a:solidFill>
+                  <a:srgbClr val="333333"/>
+                </a:solidFill>
+              </a:defRPr>
+            </a:pPr>
+            <a:r>
+              <a:t>1️⃣ PENERIMAAN TEBU</a:t>
+            </a:r>
+          </a:p>
+          <a:p>
+            <a:pPr>
+              <a:spcAft>
+                <a:spcPts val="1400"/>
+              </a:spcAft>
+              <a:defRPr sz="1600">
+                <a:solidFill>
+                  <a:srgbClr val="333333"/>
+                </a:solidFill>
+              </a:defRPr>
+            </a:pPr>
+            <a:r>
+              <a:t>   • Timbangan &amp; sampling kualitas (pol, brix)</a:t>
+            </a:r>
+          </a:p>
+          <a:p>
+            <a:pPr>
+              <a:spcAft>
+                <a:spcPts val="1400"/>
+              </a:spcAft>
+              <a:defRPr sz="1600">
+                <a:solidFill>
+                  <a:srgbClr val="333333"/>
+                </a:solidFill>
+              </a:defRPr>
+            </a:pPr>
+          </a:p>
+          <a:p>
+            <a:pPr>
+              <a:spcAft>
+                <a:spcPts val="1400"/>
+              </a:spcAft>
+              <a:defRPr sz="1600">
+                <a:solidFill>
+                  <a:srgbClr val="333333"/>
+                </a:solidFill>
+              </a:defRPr>
+            </a:pPr>
+            <a:r>
+              <a:t>2️⃣ CANE HANDLING</a:t>
+            </a:r>
+          </a:p>
+          <a:p>
+            <a:pPr>
+              <a:spcAft>
+                <a:spcPts val="1400"/>
+              </a:spcAft>
+              <a:defRPr sz="1600">
+                <a:solidFill>
+                  <a:srgbClr val="333333"/>
+                </a:solidFill>
+              </a:defRPr>
+            </a:pPr>
+            <a:r>
+              <a:t>   • Unloading, conveyor, cane preparation</a:t>
+            </a:r>
+          </a:p>
+          <a:p>
+            <a:pPr>
+              <a:spcAft>
+                <a:spcPts val="1400"/>
+              </a:spcAft>
+              <a:defRPr sz="1600">
+                <a:solidFill>
+                  <a:srgbClr val="333333"/>
+                </a:solidFill>
+              </a:defRPr>
+            </a:pPr>
+          </a:p>
+          <a:p>
+            <a:pPr>
+              <a:spcAft>
+                <a:spcPts val="1400"/>
+              </a:spcAft>
+              <a:defRPr sz="1600">
+                <a:solidFill>
+                  <a:srgbClr val="333333"/>
+                </a:solidFill>
+              </a:defRPr>
+            </a:pPr>
+            <a:r>
+              <a:t>3️⃣ MILLING (Penggilingan)</a:t>
+            </a:r>
+          </a:p>
+          <a:p>
+            <a:pPr>
+              <a:spcAft>
+                <a:spcPts val="1400"/>
+              </a:spcAft>
+              <a:defRPr sz="1600">
+                <a:solidFill>
+                  <a:srgbClr val="333333"/>
+                </a:solidFill>
+              </a:defRPr>
+            </a:pPr>
+            <a:r>
+              <a:t>   • 4-7 unit gilingan | Ekstraksi pol: 92-96%</a:t>
+            </a:r>
+          </a:p>
+          <a:p>
+            <a:pPr>
+              <a:spcAft>
+                <a:spcPts val="1400"/>
+              </a:spcAft>
+              <a:defRPr sz="1600">
+                <a:solidFill>
+                  <a:srgbClr val="333333"/>
+                </a:solidFill>
+              </a:defRPr>
+            </a:pPr>
+            <a:r>
+              <a:t>   • Output: nira mentah + ampas (bagasse)</a:t>
+            </a:r>
+          </a:p>
+          <a:p>
+            <a:pPr>
+              <a:spcAft>
+                <a:spcPts val="1400"/>
+              </a:spcAft>
+              <a:defRPr sz="1600">
+                <a:solidFill>
+                  <a:srgbClr val="333333"/>
+                </a:solidFill>
+              </a:defRPr>
+            </a:pPr>
+          </a:p>
+          <a:p>
+            <a:pPr>
+              <a:spcAft>
+                <a:spcPts val="1400"/>
+              </a:spcAft>
+              <a:defRPr sz="1600">
+                <a:solidFill>
+                  <a:srgbClr val="333333"/>
+                </a:solidFill>
+              </a:defRPr>
+            </a:pPr>
+            <a:r>
+              <a:t>4️⃣ CLARIFICATION (Pemurnian)</a:t>
+            </a:r>
+          </a:p>
+          <a:p>
+            <a:pPr>
+              <a:spcAft>
+                <a:spcPts val="1400"/>
+              </a:spcAft>
+              <a:defRPr sz="1600">
+                <a:solidFill>
+                  <a:srgbClr val="333333"/>
+                </a:solidFill>
+              </a:defRPr>
+            </a:pPr>
+            <a:r>
+              <a:t>   • Heating, sulfitasi, defekasi (tambah kapur)</a:t>
+            </a:r>
+          </a:p>
+          <a:p>
+            <a:pPr>
+              <a:spcAft>
+                <a:spcPts val="1400"/>
+              </a:spcAft>
+              <a:defRPr sz="1600">
+                <a:solidFill>
+                  <a:srgbClr val="333333"/>
+                </a:solidFill>
+              </a:defRPr>
+            </a:pPr>
+            <a:r>
+              <a:t>   • Output: nira jernih + blotong (filter cake)</a:t>
             </a:r>
           </a:p>
         </p:txBody>
@@ -5296,14 +9411,59 @@
       <p:grpSpPr/>
       <p:sp>
         <p:nvSpPr>
-          <p:cNvPr id="2" name="TextBox 1"/>
+          <p:cNvPr id="2" name="Rectangle 1"/>
+          <p:cNvSpPr/>
+          <p:nvPr/>
+        </p:nvSpPr>
+        <p:spPr>
+          <a:xfrm>
+            <a:off x="0" y="0"/>
+            <a:ext cx="9144000" cy="914400"/>
+          </a:xfrm>
+          <a:prstGeom prst="rect">
+            <a:avLst/>
+          </a:prstGeom>
+          <a:solidFill>
+            <a:srgbClr val="003366"/>
+          </a:solidFill>
+          <a:ln>
+            <a:solidFill>
+              <a:srgbClr val="003366"/>
+            </a:solidFill>
+          </a:ln>
+        </p:spPr>
+        <p:style>
+          <a:lnRef idx="1">
+            <a:schemeClr val="accent1"/>
+          </a:lnRef>
+          <a:fillRef idx="3">
+            <a:schemeClr val="accent1"/>
+          </a:fillRef>
+          <a:effectRef idx="2">
+            <a:schemeClr val="accent1"/>
+          </a:effectRef>
+          <a:fontRef idx="minor">
+            <a:schemeClr val="lt1"/>
+          </a:fontRef>
+        </p:style>
+        <p:txBody>
+          <a:bodyPr rtlCol="0" anchor="ctr"/>
+          <a:lstStyle/>
+          <a:p>
+            <a:pPr algn="ctr"/>
+          </a:p>
+        </p:txBody>
+      </p:sp>
+      <p:sp>
+        <p:nvSpPr>
+          <p:cNvPr id="3" name="TextBox 2"/>
           <p:cNvSpPr txBox="1"/>
           <p:nvPr/>
         </p:nvSpPr>
         <p:spPr>
           <a:xfrm>
-            <a:off x="457200" y="457200"/>
-            <a:ext cx="8229600" cy="640080"/>
+            <a:off x="457200" y="228600"/>
+            <a:ext cx="8229600" cy="457200"/>
           </a:xfrm>
           <a:prstGeom prst="rect">
             <a:avLst/>
@@ -5319,19 +9479,19 @@
             <a:pPr>
               <a:defRPr sz="3200" b="1">
                 <a:solidFill>
-                  <a:srgbClr val="003366"/>
-                </a:solidFill>
-              </a:defRPr>
-            </a:pPr>
-            <a:r>
-              <a:t>Proses Produksi di Pabrik (3/3)</a:t>
-            </a:r>
-          </a:p>
-        </p:txBody>
-      </p:sp>
-      <p:sp>
-        <p:nvSpPr>
-          <p:cNvPr id="3" name="TextBox 2"/>
+                  <a:srgbClr val="FFFFFF"/>
+                </a:solidFill>
+              </a:defRPr>
+            </a:pPr>
+            <a:r>
+              <a:t>Detail Proses (2/3): Evaporation - Crystallization</a:t>
+            </a:r>
+          </a:p>
+        </p:txBody>
+      </p:sp>
+      <p:sp>
+        <p:nvSpPr>
+          <p:cNvPr id="4" name="TextBox 3"/>
           <p:cNvSpPr txBox="1"/>
           <p:nvPr/>
         </p:nvSpPr>
@@ -5353,78 +9513,163 @@
           <a:p>
             <a:pPr>
               <a:spcAft>
-                <a:spcPts val="1200"/>
-              </a:spcAft>
-              <a:defRPr sz="1600"/>
-            </a:pPr>
-            <a:r>
-              <a:t>7. CENTRIFUGATION (Pemisahan): pisahkan kristal &amp; molasses</a:t>
-            </a:r>
-          </a:p>
-          <a:p>
-            <a:pPr>
-              <a:spcAft>
-                <a:spcPts val="1200"/>
-              </a:spcAft>
-              <a:defRPr sz="1600"/>
-            </a:pPr>
-            <a:r>
-              <a:t>   - Putaran centrifuge: 1000-1500 RPM</a:t>
-            </a:r>
-          </a:p>
-          <a:p>
-            <a:pPr>
-              <a:spcAft>
-                <a:spcPts val="1200"/>
-              </a:spcAft>
-              <a:defRPr sz="1600"/>
-            </a:pPr>
-            <a:r>
-              <a:t>   - Output: gula kristal (SHS) + tetes (molasses)</a:t>
-            </a:r>
-          </a:p>
-          <a:p>
-            <a:pPr>
-              <a:spcAft>
-                <a:spcPts val="1200"/>
-              </a:spcAft>
-              <a:defRPr sz="1600"/>
-            </a:pPr>
-            <a:r>
-              <a:t>8. DRYING &amp; COOLING: keringkan gula kristal</a:t>
-            </a:r>
-          </a:p>
-          <a:p>
-            <a:pPr>
-              <a:spcAft>
-                <a:spcPts val="1200"/>
-              </a:spcAft>
-              <a:defRPr sz="1600"/>
-            </a:pPr>
-            <a:r>
-              <a:t>   - Kadar air turun: 2-3% → 0,5%</a:t>
-            </a:r>
-          </a:p>
-          <a:p>
-            <a:pPr>
-              <a:spcAft>
-                <a:spcPts val="1200"/>
-              </a:spcAft>
-              <a:defRPr sz="1600"/>
-            </a:pPr>
-            <a:r>
-              <a:t>   - Suhu turun: 65°C → 35-40°C</a:t>
-            </a:r>
-          </a:p>
-          <a:p>
-            <a:pPr>
-              <a:spcAft>
-                <a:spcPts val="1200"/>
-              </a:spcAft>
-              <a:defRPr sz="1600"/>
-            </a:pPr>
-            <a:r>
-              <a:t>9. PACKAGING &amp; STORAGE: karung/bulk, gudang, distribusi</a:t>
+                <a:spcPts val="1400"/>
+              </a:spcAft>
+              <a:defRPr sz="1600">
+                <a:solidFill>
+                  <a:srgbClr val="333333"/>
+                </a:solidFill>
+              </a:defRPr>
+            </a:pPr>
+            <a:r>
+              <a:t>5️⃣ EVAPORATION (Penguapan)</a:t>
+            </a:r>
+          </a:p>
+          <a:p>
+            <a:pPr>
+              <a:spcAft>
+                <a:spcPts val="1400"/>
+              </a:spcAft>
+              <a:defRPr sz="1600">
+                <a:solidFill>
+                  <a:srgbClr val="333333"/>
+                </a:solidFill>
+              </a:defRPr>
+            </a:pPr>
+            <a:r>
+              <a:t>   • Nira jernih → nira kental</a:t>
+            </a:r>
+          </a:p>
+          <a:p>
+            <a:pPr>
+              <a:spcAft>
+                <a:spcPts val="1400"/>
+              </a:spcAft>
+              <a:defRPr sz="1600">
+                <a:solidFill>
+                  <a:srgbClr val="333333"/>
+                </a:solidFill>
+              </a:defRPr>
+            </a:pPr>
+            <a:r>
+              <a:t>   • Multiple effect evaporator (4-5 badan)</a:t>
+            </a:r>
+          </a:p>
+          <a:p>
+            <a:pPr>
+              <a:spcAft>
+                <a:spcPts val="1400"/>
+              </a:spcAft>
+              <a:defRPr sz="1600">
+                <a:solidFill>
+                  <a:srgbClr val="333333"/>
+                </a:solidFill>
+              </a:defRPr>
+            </a:pPr>
+            <a:r>
+              <a:t>   • Brix naik: 12-15% → 60-65%</a:t>
+            </a:r>
+          </a:p>
+          <a:p>
+            <a:pPr>
+              <a:spcAft>
+                <a:spcPts val="1400"/>
+              </a:spcAft>
+              <a:defRPr sz="1600">
+                <a:solidFill>
+                  <a:srgbClr val="333333"/>
+                </a:solidFill>
+              </a:defRPr>
+            </a:pPr>
+            <a:r>
+              <a:t>   • Hemat energi dengan sistem multi-effect</a:t>
+            </a:r>
+          </a:p>
+          <a:p>
+            <a:pPr>
+              <a:spcAft>
+                <a:spcPts val="1400"/>
+              </a:spcAft>
+              <a:defRPr sz="1600">
+                <a:solidFill>
+                  <a:srgbClr val="333333"/>
+                </a:solidFill>
+              </a:defRPr>
+            </a:pPr>
+          </a:p>
+          <a:p>
+            <a:pPr>
+              <a:spcAft>
+                <a:spcPts val="1400"/>
+              </a:spcAft>
+              <a:defRPr sz="1600">
+                <a:solidFill>
+                  <a:srgbClr val="333333"/>
+                </a:solidFill>
+              </a:defRPr>
+            </a:pPr>
+            <a:r>
+              <a:t>6️⃣ CRYSTALLIZATION (Masakan)</a:t>
+            </a:r>
+          </a:p>
+          <a:p>
+            <a:pPr>
+              <a:spcAft>
+                <a:spcPts val="1400"/>
+              </a:spcAft>
+              <a:defRPr sz="1600">
+                <a:solidFill>
+                  <a:srgbClr val="333333"/>
+                </a:solidFill>
+              </a:defRPr>
+            </a:pPr>
+            <a:r>
+              <a:t>   • Nira kental → kristal gula</a:t>
+            </a:r>
+          </a:p>
+          <a:p>
+            <a:pPr>
+              <a:spcAft>
+                <a:spcPts val="1400"/>
+              </a:spcAft>
+              <a:defRPr sz="1600">
+                <a:solidFill>
+                  <a:srgbClr val="333333"/>
+                </a:solidFill>
+              </a:defRPr>
+            </a:pPr>
+            <a:r>
+              <a:t>   • Vacuum pan A, C, D (3 tingkat masakan)</a:t>
+            </a:r>
+          </a:p>
+          <a:p>
+            <a:pPr>
+              <a:spcAft>
+                <a:spcPts val="1400"/>
+              </a:spcAft>
+              <a:defRPr sz="1600">
+                <a:solidFill>
+                  <a:srgbClr val="333333"/>
+                </a:solidFill>
+              </a:defRPr>
+            </a:pPr>
+            <a:r>
+              <a:t>   • Brix naik: 65% → 92-94%</a:t>
+            </a:r>
+          </a:p>
+          <a:p>
+            <a:pPr>
+              <a:spcAft>
+                <a:spcPts val="1400"/>
+              </a:spcAft>
+              <a:defRPr sz="1600">
+                <a:solidFill>
+                  <a:srgbClr val="333333"/>
+                </a:solidFill>
+              </a:defRPr>
+            </a:pPr>
+            <a:r>
+              <a:t>   • Output: massecuite (campuran kristal + stroop)</a:t>
             </a:r>
           </a:p>
         </p:txBody>
@@ -5449,14 +9694,59 @@
       <p:grpSpPr/>
       <p:sp>
         <p:nvSpPr>
-          <p:cNvPr id="2" name="TextBox 1"/>
+          <p:cNvPr id="2" name="Rectangle 1"/>
+          <p:cNvSpPr/>
+          <p:nvPr/>
+        </p:nvSpPr>
+        <p:spPr>
+          <a:xfrm>
+            <a:off x="0" y="0"/>
+            <a:ext cx="9144000" cy="914400"/>
+          </a:xfrm>
+          <a:prstGeom prst="rect">
+            <a:avLst/>
+          </a:prstGeom>
+          <a:solidFill>
+            <a:srgbClr val="003366"/>
+          </a:solidFill>
+          <a:ln>
+            <a:solidFill>
+              <a:srgbClr val="003366"/>
+            </a:solidFill>
+          </a:ln>
+        </p:spPr>
+        <p:style>
+          <a:lnRef idx="1">
+            <a:schemeClr val="accent1"/>
+          </a:lnRef>
+          <a:fillRef idx="3">
+            <a:schemeClr val="accent1"/>
+          </a:fillRef>
+          <a:effectRef idx="2">
+            <a:schemeClr val="accent1"/>
+          </a:effectRef>
+          <a:fontRef idx="minor">
+            <a:schemeClr val="lt1"/>
+          </a:fontRef>
+        </p:style>
+        <p:txBody>
+          <a:bodyPr rtlCol="0" anchor="ctr"/>
+          <a:lstStyle/>
+          <a:p>
+            <a:pPr algn="ctr"/>
+          </a:p>
+        </p:txBody>
+      </p:sp>
+      <p:sp>
+        <p:nvSpPr>
+          <p:cNvPr id="3" name="TextBox 2"/>
           <p:cNvSpPr txBox="1"/>
           <p:nvPr/>
         </p:nvSpPr>
         <p:spPr>
           <a:xfrm>
-            <a:off x="457200" y="457200"/>
-            <a:ext cx="8229600" cy="640080"/>
+            <a:off x="457200" y="228600"/>
+            <a:ext cx="8229600" cy="457200"/>
           </a:xfrm>
           <a:prstGeom prst="rect">
             <a:avLst/>
@@ -5472,19 +9762,19 @@
             <a:pPr>
               <a:defRPr sz="3200" b="1">
                 <a:solidFill>
-                  <a:srgbClr val="003366"/>
-                </a:solidFill>
-              </a:defRPr>
-            </a:pPr>
-            <a:r>
-              <a:t>Produk Utama dan Produk Samping</a:t>
-            </a:r>
-          </a:p>
-        </p:txBody>
-      </p:sp>
-      <p:sp>
-        <p:nvSpPr>
-          <p:cNvPr id="3" name="TextBox 2"/>
+                  <a:srgbClr val="FFFFFF"/>
+                </a:solidFill>
+              </a:defRPr>
+            </a:pPr>
+            <a:r>
+              <a:t>Detail Proses (3/3): Centrifuge - Packaging</a:t>
+            </a:r>
+          </a:p>
+        </p:txBody>
+      </p:sp>
+      <p:sp>
+        <p:nvSpPr>
+          <p:cNvPr id="4" name="TextBox 3"/>
           <p:cNvSpPr txBox="1"/>
           <p:nvPr/>
         </p:nvSpPr>
@@ -5506,97 +9796,175 @@
           <a:p>
             <a:pPr>
               <a:spcAft>
-                <a:spcPts val="1200"/>
-              </a:spcAft>
-              <a:defRPr sz="1600"/>
-            </a:pPr>
-            <a:r>
-              <a:t>PRODUK UTAMA:</a:t>
-            </a:r>
-          </a:p>
-          <a:p>
-            <a:pPr>
-              <a:spcAft>
-                <a:spcPts val="1200"/>
-              </a:spcAft>
-              <a:defRPr sz="1600"/>
-            </a:pPr>
-            <a:r>
-              <a:t>• Gula SHS (Superior High Sugar): pol ≥99,3%, ICUMSA 150-600</a:t>
-            </a:r>
-          </a:p>
-          <a:p>
-            <a:pPr>
-              <a:spcAft>
-                <a:spcPts val="1200"/>
-              </a:spcAft>
-              <a:defRPr sz="1600"/>
-            </a:pPr>
-          </a:p>
-          <a:p>
-            <a:pPr>
-              <a:spcAft>
-                <a:spcPts val="1200"/>
-              </a:spcAft>
-              <a:defRPr sz="1600"/>
-            </a:pPr>
-            <a:r>
-              <a:t>PRODUK SAMPING (By-Products):</a:t>
-            </a:r>
-          </a:p>
-          <a:p>
-            <a:pPr>
-              <a:spcAft>
-                <a:spcPts val="1200"/>
-              </a:spcAft>
-              <a:defRPr sz="1600"/>
-            </a:pPr>
-            <a:r>
-              <a:t>• Molasses (Tetes): untuk pakan, alkohol, MSG (~4-5% dari tebu)</a:t>
-            </a:r>
-          </a:p>
-          <a:p>
-            <a:pPr>
-              <a:spcAft>
-                <a:spcPts val="1200"/>
-              </a:spcAft>
-              <a:defRPr sz="1600"/>
-            </a:pPr>
-            <a:r>
-              <a:t>• Bagasse (Ampas): bahan bakar boiler, kertas (~30% dari tebu)</a:t>
-            </a:r>
-          </a:p>
-          <a:p>
-            <a:pPr>
-              <a:spcAft>
-                <a:spcPts val="1200"/>
-              </a:spcAft>
-              <a:defRPr sz="1600"/>
-            </a:pPr>
-            <a:r>
-              <a:t>• Blotong (Filter Cake): pupuk organik (~3-4% dari tebu)</a:t>
-            </a:r>
-          </a:p>
-          <a:p>
-            <a:pPr>
-              <a:spcAft>
-                <a:spcPts val="1200"/>
-              </a:spcAft>
-              <a:defRPr sz="1600"/>
-            </a:pPr>
-            <a:r>
-              <a:t>• Listrik: co-generation dari bagasse (~30-50% kebutuhan sendiri)</a:t>
-            </a:r>
-          </a:p>
-          <a:p>
-            <a:pPr>
-              <a:spcAft>
-                <a:spcPts val="1200"/>
-              </a:spcAft>
-              <a:defRPr sz="1600"/>
-            </a:pPr>
-            <a:r>
-              <a:t>• Revenue tambahan: 15-25% dari penjualan total</a:t>
+                <a:spcPts val="1400"/>
+              </a:spcAft>
+              <a:defRPr sz="1600">
+                <a:solidFill>
+                  <a:srgbClr val="333333"/>
+                </a:solidFill>
+              </a:defRPr>
+            </a:pPr>
+            <a:r>
+              <a:t>7️⃣ CENTRIFUGATION (Pemisahan)</a:t>
+            </a:r>
+          </a:p>
+          <a:p>
+            <a:pPr>
+              <a:spcAft>
+                <a:spcPts val="1400"/>
+              </a:spcAft>
+              <a:defRPr sz="1600">
+                <a:solidFill>
+                  <a:srgbClr val="333333"/>
+                </a:solidFill>
+              </a:defRPr>
+            </a:pPr>
+            <a:r>
+              <a:t>   • Pisahkan kristal &amp; molasses</a:t>
+            </a:r>
+          </a:p>
+          <a:p>
+            <a:pPr>
+              <a:spcAft>
+                <a:spcPts val="1400"/>
+              </a:spcAft>
+              <a:defRPr sz="1600">
+                <a:solidFill>
+                  <a:srgbClr val="333333"/>
+                </a:solidFill>
+              </a:defRPr>
+            </a:pPr>
+            <a:r>
+              <a:t>   • Putaran centrifuge: 1000-1500 RPM</a:t>
+            </a:r>
+          </a:p>
+          <a:p>
+            <a:pPr>
+              <a:spcAft>
+                <a:spcPts val="1400"/>
+              </a:spcAft>
+              <a:defRPr sz="1600">
+                <a:solidFill>
+                  <a:srgbClr val="333333"/>
+                </a:solidFill>
+              </a:defRPr>
+            </a:pPr>
+            <a:r>
+              <a:t>   • Output: gula kristal (SHS) + tetes (molasses)</a:t>
+            </a:r>
+          </a:p>
+          <a:p>
+            <a:pPr>
+              <a:spcAft>
+                <a:spcPts val="1400"/>
+              </a:spcAft>
+              <a:defRPr sz="1600">
+                <a:solidFill>
+                  <a:srgbClr val="333333"/>
+                </a:solidFill>
+              </a:defRPr>
+            </a:pPr>
+          </a:p>
+          <a:p>
+            <a:pPr>
+              <a:spcAft>
+                <a:spcPts val="1400"/>
+              </a:spcAft>
+              <a:defRPr sz="1600">
+                <a:solidFill>
+                  <a:srgbClr val="333333"/>
+                </a:solidFill>
+              </a:defRPr>
+            </a:pPr>
+            <a:r>
+              <a:t>8️⃣ DRYING &amp; COOLING</a:t>
+            </a:r>
+          </a:p>
+          <a:p>
+            <a:pPr>
+              <a:spcAft>
+                <a:spcPts val="1400"/>
+              </a:spcAft>
+              <a:defRPr sz="1600">
+                <a:solidFill>
+                  <a:srgbClr val="333333"/>
+                </a:solidFill>
+              </a:defRPr>
+            </a:pPr>
+            <a:r>
+              <a:t>   • Keringkan gula kristal</a:t>
+            </a:r>
+          </a:p>
+          <a:p>
+            <a:pPr>
+              <a:spcAft>
+                <a:spcPts val="1400"/>
+              </a:spcAft>
+              <a:defRPr sz="1600">
+                <a:solidFill>
+                  <a:srgbClr val="333333"/>
+                </a:solidFill>
+              </a:defRPr>
+            </a:pPr>
+            <a:r>
+              <a:t>   • Kadar air turun: 2-3% → 0,5%</a:t>
+            </a:r>
+          </a:p>
+          <a:p>
+            <a:pPr>
+              <a:spcAft>
+                <a:spcPts val="1400"/>
+              </a:spcAft>
+              <a:defRPr sz="1600">
+                <a:solidFill>
+                  <a:srgbClr val="333333"/>
+                </a:solidFill>
+              </a:defRPr>
+            </a:pPr>
+            <a:r>
+              <a:t>   • Suhu turun: 65°C → 35-40°C</a:t>
+            </a:r>
+          </a:p>
+          <a:p>
+            <a:pPr>
+              <a:spcAft>
+                <a:spcPts val="1400"/>
+              </a:spcAft>
+              <a:defRPr sz="1600">
+                <a:solidFill>
+                  <a:srgbClr val="333333"/>
+                </a:solidFill>
+              </a:defRPr>
+            </a:pPr>
+          </a:p>
+          <a:p>
+            <a:pPr>
+              <a:spcAft>
+                <a:spcPts val="1400"/>
+              </a:spcAft>
+              <a:defRPr sz="1600">
+                <a:solidFill>
+                  <a:srgbClr val="333333"/>
+                </a:solidFill>
+              </a:defRPr>
+            </a:pPr>
+            <a:r>
+              <a:t>9️⃣ PACKAGING &amp; STORAGE</a:t>
+            </a:r>
+          </a:p>
+          <a:p>
+            <a:pPr>
+              <a:spcAft>
+                <a:spcPts val="1400"/>
+              </a:spcAft>
+              <a:defRPr sz="1600">
+                <a:solidFill>
+                  <a:srgbClr val="333333"/>
+                </a:solidFill>
+              </a:defRPr>
+            </a:pPr>
+            <a:r>
+              <a:t>   • Karung 50kg / bulk | Gudang | Distribusi</a:t>
             </a:r>
           </a:p>
         </p:txBody>
@@ -5621,14 +9989,59 @@
       <p:grpSpPr/>
       <p:sp>
         <p:nvSpPr>
-          <p:cNvPr id="2" name="TextBox 1"/>
+          <p:cNvPr id="2" name="Rectangle 1"/>
+          <p:cNvSpPr/>
+          <p:nvPr/>
+        </p:nvSpPr>
+        <p:spPr>
+          <a:xfrm>
+            <a:off x="0" y="0"/>
+            <a:ext cx="9144000" cy="914400"/>
+          </a:xfrm>
+          <a:prstGeom prst="rect">
+            <a:avLst/>
+          </a:prstGeom>
+          <a:solidFill>
+            <a:srgbClr val="003366"/>
+          </a:solidFill>
+          <a:ln>
+            <a:solidFill>
+              <a:srgbClr val="003366"/>
+            </a:solidFill>
+          </a:ln>
+        </p:spPr>
+        <p:style>
+          <a:lnRef idx="1">
+            <a:schemeClr val="accent1"/>
+          </a:lnRef>
+          <a:fillRef idx="3">
+            <a:schemeClr val="accent1"/>
+          </a:fillRef>
+          <a:effectRef idx="2">
+            <a:schemeClr val="accent1"/>
+          </a:effectRef>
+          <a:fontRef idx="minor">
+            <a:schemeClr val="lt1"/>
+          </a:fontRef>
+        </p:style>
+        <p:txBody>
+          <a:bodyPr rtlCol="0" anchor="ctr"/>
+          <a:lstStyle/>
+          <a:p>
+            <a:pPr algn="ctr"/>
+          </a:p>
+        </p:txBody>
+      </p:sp>
+      <p:sp>
+        <p:nvSpPr>
+          <p:cNvPr id="3" name="TextBox 2"/>
           <p:cNvSpPr txBox="1"/>
           <p:nvPr/>
         </p:nvSpPr>
         <p:spPr>
           <a:xfrm>
-            <a:off x="457200" y="457200"/>
-            <a:ext cx="8229600" cy="640080"/>
+            <a:off x="457200" y="228600"/>
+            <a:ext cx="8229600" cy="457200"/>
           </a:xfrm>
           <a:prstGeom prst="rect">
             <a:avLst/>
@@ -5644,26 +10057,26 @@
             <a:pPr>
               <a:defRPr sz="3200" b="1">
                 <a:solidFill>
-                  <a:srgbClr val="003366"/>
-                </a:solidFill>
-              </a:defRPr>
-            </a:pPr>
-            <a:r>
-              <a:t>Struktur Divisi Pabrik Gula</a:t>
-            </a:r>
-          </a:p>
-        </p:txBody>
-      </p:sp>
-      <p:sp>
-        <p:nvSpPr>
-          <p:cNvPr id="3" name="TextBox 2"/>
+                  <a:srgbClr val="FFFFFF"/>
+                </a:solidFill>
+              </a:defRPr>
+            </a:pPr>
+            <a:r>
+              <a:t>Produk Utama dan Produk Samping</a:t>
+            </a:r>
+          </a:p>
+        </p:txBody>
+      </p:sp>
+      <p:sp>
+        <p:nvSpPr>
+          <p:cNvPr id="4" name="TextBox 3"/>
           <p:cNvSpPr txBox="1"/>
           <p:nvPr/>
         </p:nvSpPr>
         <p:spPr>
           <a:xfrm>
-            <a:off x="731520" y="1371600"/>
-            <a:ext cx="7772400" cy="5029200"/>
+            <a:off x="457200" y="1371600"/>
+            <a:ext cx="4114800" cy="5029200"/>
           </a:xfrm>
           <a:prstGeom prst="rect">
             <a:avLst/>
@@ -5680,76 +10093,319 @@
               <a:spcAft>
                 <a:spcPts val="1200"/>
               </a:spcAft>
-              <a:defRPr sz="1600"/>
-            </a:pPr>
-            <a:r>
-              <a:t>1. DIVISI TANAMAN: budidaya tebu, panen, logistik tebu</a:t>
-            </a:r>
-          </a:p>
-          <a:p>
-            <a:pPr>
-              <a:spcAft>
-                <a:spcPts val="1200"/>
-              </a:spcAft>
-              <a:defRPr sz="1600"/>
-            </a:pPr>
-            <a:r>
-              <a:t>2. DIVISI PABRIKASI: proses produksi gula (24/7 saat musim giling)</a:t>
-            </a:r>
-          </a:p>
-          <a:p>
-            <a:pPr>
-              <a:spcAft>
-                <a:spcPts val="1200"/>
-              </a:spcAft>
-              <a:defRPr sz="1600"/>
-            </a:pPr>
-            <a:r>
-              <a:t>3. DIVISI INSTALASI: listrik, mesin, boiler, maintenance</a:t>
-            </a:r>
-          </a:p>
-          <a:p>
-            <a:pPr>
-              <a:spcAft>
-                <a:spcPts val="1200"/>
-              </a:spcAft>
-              <a:defRPr sz="1600"/>
-            </a:pPr>
-            <a:r>
-              <a:t>4. DIVISI AKUNTANSI &amp; KEUANGAN: cash flow, payroll, reporting</a:t>
-            </a:r>
-          </a:p>
-          <a:p>
-            <a:pPr>
-              <a:spcAft>
-                <a:spcPts val="1200"/>
-              </a:spcAft>
-              <a:defRPr sz="1600"/>
-            </a:pPr>
-            <a:r>
-              <a:t>5. DIVISI SDM &amp; UMUM: rekrutmen, K3, gudang, security</a:t>
-            </a:r>
-          </a:p>
-          <a:p>
-            <a:pPr>
-              <a:spcAft>
-                <a:spcPts val="1200"/>
-              </a:spcAft>
-              <a:defRPr sz="1600"/>
-            </a:pPr>
-            <a:r>
-              <a:t>6. DIVISI PEMASARAN: sales gula, molasses, distribusi</a:t>
-            </a:r>
-          </a:p>
-          <a:p>
-            <a:pPr>
-              <a:spcAft>
-                <a:spcPts val="1200"/>
-              </a:spcAft>
-              <a:defRPr sz="1600"/>
-            </a:pPr>
-            <a:r>
-              <a:t>• Operasional 24/7 selama musim giling (shift 3x8 jam)</a:t>
+              <a:defRPr sz="1500">
+                <a:solidFill>
+                  <a:srgbClr val="333333"/>
+                </a:solidFill>
+              </a:defRPr>
+            </a:pPr>
+            <a:r>
+              <a:t>📦 PRODUK UTAMA</a:t>
+            </a:r>
+          </a:p>
+          <a:p>
+            <a:pPr>
+              <a:spcAft>
+                <a:spcPts val="1200"/>
+              </a:spcAft>
+              <a:defRPr sz="1500">
+                <a:solidFill>
+                  <a:srgbClr val="333333"/>
+                </a:solidFill>
+              </a:defRPr>
+            </a:pPr>
+          </a:p>
+          <a:p>
+            <a:pPr>
+              <a:spcAft>
+                <a:spcPts val="1200"/>
+              </a:spcAft>
+              <a:defRPr sz="1500">
+                <a:solidFill>
+                  <a:srgbClr val="333333"/>
+                </a:solidFill>
+              </a:defRPr>
+            </a:pPr>
+            <a:r>
+              <a:t>🍬 Gula SHS</a:t>
+            </a:r>
+          </a:p>
+          <a:p>
+            <a:pPr>
+              <a:spcAft>
+                <a:spcPts val="1200"/>
+              </a:spcAft>
+              <a:defRPr sz="1500">
+                <a:solidFill>
+                  <a:srgbClr val="333333"/>
+                </a:solidFill>
+              </a:defRPr>
+            </a:pPr>
+            <a:r>
+              <a:t>   (Superior High Sugar)</a:t>
+            </a:r>
+          </a:p>
+          <a:p>
+            <a:pPr>
+              <a:spcAft>
+                <a:spcPts val="1200"/>
+              </a:spcAft>
+              <a:defRPr sz="1500">
+                <a:solidFill>
+                  <a:srgbClr val="333333"/>
+                </a:solidFill>
+              </a:defRPr>
+            </a:pPr>
+            <a:r>
+              <a:t>   • Pol ≥99,3%</a:t>
+            </a:r>
+          </a:p>
+          <a:p>
+            <a:pPr>
+              <a:spcAft>
+                <a:spcPts val="1200"/>
+              </a:spcAft>
+              <a:defRPr sz="1500">
+                <a:solidFill>
+                  <a:srgbClr val="333333"/>
+                </a:solidFill>
+              </a:defRPr>
+            </a:pPr>
+            <a:r>
+              <a:t>   • ICUMSA 150-600</a:t>
+            </a:r>
+          </a:p>
+          <a:p>
+            <a:pPr>
+              <a:spcAft>
+                <a:spcPts val="1200"/>
+              </a:spcAft>
+              <a:defRPr sz="1500">
+                <a:solidFill>
+                  <a:srgbClr val="333333"/>
+                </a:solidFill>
+              </a:defRPr>
+            </a:pPr>
+            <a:r>
+              <a:t>   • 8-10 ton per 100 ton tebu</a:t>
+            </a:r>
+          </a:p>
+          <a:p>
+            <a:pPr>
+              <a:spcAft>
+                <a:spcPts val="1200"/>
+              </a:spcAft>
+              <a:defRPr sz="1500">
+                <a:solidFill>
+                  <a:srgbClr val="333333"/>
+                </a:solidFill>
+              </a:defRPr>
+            </a:pPr>
+          </a:p>
+          <a:p>
+            <a:pPr>
+              <a:spcAft>
+                <a:spcPts val="1200"/>
+              </a:spcAft>
+              <a:defRPr sz="1500">
+                <a:solidFill>
+                  <a:srgbClr val="333333"/>
+                </a:solidFill>
+              </a:defRPr>
+            </a:pPr>
+            <a:r>
+              <a:t>💰 Revenue: 70-80%</a:t>
+            </a:r>
+          </a:p>
+        </p:txBody>
+      </p:sp>
+      <p:sp>
+        <p:nvSpPr>
+          <p:cNvPr id="5" name="TextBox 4"/>
+          <p:cNvSpPr txBox="1"/>
+          <p:nvPr/>
+        </p:nvSpPr>
+        <p:spPr>
+          <a:xfrm>
+            <a:off x="4754880" y="1371600"/>
+            <a:ext cx="4114800" cy="5029200"/>
+          </a:xfrm>
+          <a:prstGeom prst="rect">
+            <a:avLst/>
+          </a:prstGeom>
+          <a:noFill/>
+        </p:spPr>
+        <p:txBody>
+          <a:bodyPr wrap="square">
+            <a:spAutoFit/>
+          </a:bodyPr>
+          <a:lstStyle/>
+          <a:p>
+            <a:pPr>
+              <a:spcAft>
+                <a:spcPts val="1200"/>
+              </a:spcAft>
+              <a:defRPr sz="1500">
+                <a:solidFill>
+                  <a:srgbClr val="333333"/>
+                </a:solidFill>
+              </a:defRPr>
+            </a:pPr>
+            <a:r>
+              <a:t>♻️  PRODUK SAMPING</a:t>
+            </a:r>
+          </a:p>
+          <a:p>
+            <a:pPr>
+              <a:spcAft>
+                <a:spcPts val="1200"/>
+              </a:spcAft>
+              <a:defRPr sz="1500">
+                <a:solidFill>
+                  <a:srgbClr val="333333"/>
+                </a:solidFill>
+              </a:defRPr>
+            </a:pPr>
+          </a:p>
+          <a:p>
+            <a:pPr>
+              <a:spcAft>
+                <a:spcPts val="1200"/>
+              </a:spcAft>
+              <a:defRPr sz="1500">
+                <a:solidFill>
+                  <a:srgbClr val="333333"/>
+                </a:solidFill>
+              </a:defRPr>
+            </a:pPr>
+            <a:r>
+              <a:t>🍯 Molasses: 4-5 ton (10-15%)</a:t>
+            </a:r>
+          </a:p>
+          <a:p>
+            <a:pPr>
+              <a:spcAft>
+                <a:spcPts val="1200"/>
+              </a:spcAft>
+              <a:defRPr sz="1500">
+                <a:solidFill>
+                  <a:srgbClr val="333333"/>
+                </a:solidFill>
+              </a:defRPr>
+            </a:pPr>
+            <a:r>
+              <a:t>   → Pakan, alkohol, MSG</a:t>
+            </a:r>
+          </a:p>
+          <a:p>
+            <a:pPr>
+              <a:spcAft>
+                <a:spcPts val="1200"/>
+              </a:spcAft>
+              <a:defRPr sz="1500">
+                <a:solidFill>
+                  <a:srgbClr val="333333"/>
+                </a:solidFill>
+              </a:defRPr>
+            </a:pPr>
+          </a:p>
+          <a:p>
+            <a:pPr>
+              <a:spcAft>
+                <a:spcPts val="1200"/>
+              </a:spcAft>
+              <a:defRPr sz="1500">
+                <a:solidFill>
+                  <a:srgbClr val="333333"/>
+                </a:solidFill>
+              </a:defRPr>
+            </a:pPr>
+            <a:r>
+              <a:t>⚡ Bagasse: 30 ton (5-10%)</a:t>
+            </a:r>
+          </a:p>
+          <a:p>
+            <a:pPr>
+              <a:spcAft>
+                <a:spcPts val="1200"/>
+              </a:spcAft>
+              <a:defRPr sz="1500">
+                <a:solidFill>
+                  <a:srgbClr val="333333"/>
+                </a:solidFill>
+              </a:defRPr>
+            </a:pPr>
+            <a:r>
+              <a:t>   → Listrik co-generation</a:t>
+            </a:r>
+          </a:p>
+          <a:p>
+            <a:pPr>
+              <a:spcAft>
+                <a:spcPts val="1200"/>
+              </a:spcAft>
+              <a:defRPr sz="1500">
+                <a:solidFill>
+                  <a:srgbClr val="333333"/>
+                </a:solidFill>
+              </a:defRPr>
+            </a:pPr>
+          </a:p>
+          <a:p>
+            <a:pPr>
+              <a:spcAft>
+                <a:spcPts val="1200"/>
+              </a:spcAft>
+              <a:defRPr sz="1500">
+                <a:solidFill>
+                  <a:srgbClr val="333333"/>
+                </a:solidFill>
+              </a:defRPr>
+            </a:pPr>
+            <a:r>
+              <a:t>🌱 Blotong: 3-4 ton (2-3%)</a:t>
+            </a:r>
+          </a:p>
+          <a:p>
+            <a:pPr>
+              <a:spcAft>
+                <a:spcPts val="1200"/>
+              </a:spcAft>
+              <a:defRPr sz="1500">
+                <a:solidFill>
+                  <a:srgbClr val="333333"/>
+                </a:solidFill>
+              </a:defRPr>
+            </a:pPr>
+            <a:r>
+              <a:t>   → Pupuk organik</a:t>
+            </a:r>
+          </a:p>
+          <a:p>
+            <a:pPr>
+              <a:spcAft>
+                <a:spcPts val="1200"/>
+              </a:spcAft>
+              <a:defRPr sz="1500">
+                <a:solidFill>
+                  <a:srgbClr val="333333"/>
+                </a:solidFill>
+              </a:defRPr>
+            </a:pPr>
+          </a:p>
+          <a:p>
+            <a:pPr>
+              <a:spcAft>
+                <a:spcPts val="1200"/>
+              </a:spcAft>
+              <a:defRPr sz="1500">
+                <a:solidFill>
+                  <a:srgbClr val="333333"/>
+                </a:solidFill>
+              </a:defRPr>
+            </a:pPr>
+            <a:r>
+              <a:t>💰 Total By-products: 15-25%</a:t>
             </a:r>
           </a:p>
         </p:txBody>
